--- a/docs/analysis/대구-달서구-다이어트-상권분석.pptx
+++ b/docs/analysis/대구-달서구-다이어트-상권분석.pptx
@@ -1788,7 +1788,7 @@
           <a:p>
             <a:r>
               <a:rPr lang="en-US" dirty="0"/>
-              <a:t>총인구 517,059명(2025.12 행안부). 대구 1위, 밀도 8,300/㎢. 감소 추세. 성별은 여초 경향이나 정확 인원은 원자료 필요.</a:t>
+              <a:t>주민등록 515,142명(2026.03 행안부 원자료). 여 263,101 &gt; 남 252,041, 성비 95.8 여초, 여성 51.1%. 세대 239,483. 여성 26.3만 1차 모수 + 남성 대사 세그먼트.</a:t>
             </a:r>
             <a:endParaRPr lang="en-US" dirty="0"/>
           </a:p>
@@ -2882,7 +2882,7 @@
                 <a:ea typeface="Cambria" pitchFamily="34" charset="-122"/>
                 <a:cs typeface="Cambria" pitchFamily="34" charset="-120"/>
               </a:rPr>
-              <a:t>517,059</a:t>
+              <a:t>515,142</a:t>
             </a:r>
             <a:endParaRPr lang="en-US" sz="2600" dirty="0"/>
           </a:p>
@@ -3344,7 +3344,7 @@
                 <a:ea typeface="Malgun Gothic" pitchFamily="34" charset="-122"/>
                 <a:cs typeface="Malgun Gothic" pitchFamily="34" charset="-120"/>
               </a:rPr>
-              <a:t>행정안전부 주민등록(2025.12) · 공공데이터포털
+              <a:t>행정안전부 주민등록 원자료(2026.03, 동별 성별) · 공공데이터포털
 </a:t>
             </a:r>
             <a:pPr indent="0" marL="0">
@@ -3557,7 +3557,7 @@
                 <a:ea typeface="Malgun Gothic" pitchFamily="34" charset="-122"/>
                 <a:cs typeface="Malgun Gothic" pitchFamily="34" charset="-120"/>
               </a:rPr>
-              <a:t>· 정확 남/여 인구·세대수  </a:t>
+              <a:t>· 여성 × 30~50대 코어 인원  </a:t>
             </a:r>
             <a:pPr indent="0" marL="0">
               <a:lnSpc>
@@ -3574,7 +3574,7 @@
                 <a:ea typeface="Malgun Gothic" pitchFamily="34" charset="-122"/>
                 <a:cs typeface="Malgun Gothic" pitchFamily="34" charset="-120"/>
               </a:rPr>
-              <a:t>→ 행안부 원자료(조직 egress 정책상 이번 세션 원문 다운로드 차단)
+              <a:t>→ 연령×성별 원자료(동별 성별 합계는 실측 확정)
 </a:t>
             </a:r>
             <a:pPr indent="0" marL="0">
@@ -3999,7 +3999,7 @@
                 <a:ea typeface="Malgun Gothic" pitchFamily="34" charset="-122"/>
                 <a:cs typeface="Malgun Gothic" pitchFamily="34" charset="-120"/>
               </a:rPr>
-              <a:t>달서구 517,059명으로 대구 자치구 인구 1위, 밀도 약 8,300명/㎢. 다이어트 잠재수요 절대량이 대구 최대.</a:t>
+              <a:t>달서구 515,142명(2026.3)·대구 인구 1위, 밀도 약 8,300명/㎢. 여성 26.3만 &gt; 남성 25.2만 — 다이어트 주 소구층 절대수 최대.</a:t>
             </a:r>
             <a:endParaRPr lang="en-US" sz="1200" dirty="0"/>
           </a:p>
@@ -4539,7 +4539,7 @@
                 <a:ea typeface="Malgun Gothic" pitchFamily="34" charset="-122"/>
                 <a:cs typeface="Malgun Gothic" pitchFamily="34" charset="-120"/>
               </a:rPr>
-              <a:t>행안부 주민등록(2025.12) · 심평원/공공데이터 · Naver DataLab·지역검색(2026.07)</a:t>
+              <a:t>행안부 주민등록(2026.03) · 심평원/공공데이터 · Naver DataLab·지역검색(2026.07)</a:t>
             </a:r>
             <a:endParaRPr lang="en-US" sz="800" dirty="0"/>
           </a:p>
@@ -4688,7 +4688,7 @@
                 <a:ea typeface="Malgun Gothic" pitchFamily="34" charset="-122"/>
                 <a:cs typeface="Malgun Gothic" pitchFamily="34" charset="-120"/>
               </a:rPr>
-              <a:t>대구 최대 자치구, 고밀도 정주 시장</a:t>
+              <a:t>대구 최대 자치구 · 여초, 고밀도 정주 시장</a:t>
             </a:r>
             <a:endParaRPr lang="en-US" sz="3000" dirty="0"/>
           </a:p>
@@ -4742,11 +4742,11 @@
         <p:spPr>
           <a:xfrm>
             <a:off x="548640" y="1691640"/>
-            <a:ext cx="4114800" cy="4297680"/>
+            <a:ext cx="3794760" cy="4297680"/>
           </a:xfrm>
           <a:prstGeom prst="roundRect">
             <a:avLst>
-              <a:gd name="adj" fmla="val 2667"/>
+              <a:gd name="adj" fmla="val 2892"/>
             </a:avLst>
           </a:prstGeom>
           <a:solidFill>
@@ -4763,8 +4763,8 @@
         </p:nvSpPr>
         <p:spPr>
           <a:xfrm>
-            <a:off x="777240" y="1965960"/>
-            <a:ext cx="3657600" cy="365760"/>
+            <a:off x="777240" y="1920240"/>
+            <a:ext cx="3383280" cy="365760"/>
           </a:xfrm>
           <a:prstGeom prst="rect">
             <a:avLst/>
@@ -4780,7 +4780,7 @@
               <a:buNone/>
             </a:pPr>
             <a:r>
-              <a:rPr lang="en-US" sz="1400" dirty="0">
+              <a:rPr lang="en-US" sz="1300" dirty="0">
                 <a:solidFill>
                   <a:srgbClr val="2BB79A"/>
                 </a:solidFill>
@@ -4788,9 +4788,9 @@
                 <a:ea typeface="Malgun Gothic" pitchFamily="34" charset="-122"/>
                 <a:cs typeface="Malgun Gothic" pitchFamily="34" charset="-120"/>
               </a:rPr>
-              <a:t>총인구 (2025.12)</a:t>
-            </a:r>
-            <a:endParaRPr lang="en-US" sz="1400" dirty="0"/>
+              <a:t>주민등록 인구 (2026.03)</a:t>
+            </a:r>
+            <a:endParaRPr lang="en-US" sz="1300" dirty="0"/>
           </a:p>
         </p:txBody>
       </p:sp>
@@ -4802,8 +4802,8 @@
         </p:nvSpPr>
         <p:spPr>
           <a:xfrm>
-            <a:off x="640080" y="2377440"/>
-            <a:ext cx="3931920" cy="914400"/>
+            <a:off x="548640" y="2286000"/>
+            <a:ext cx="3794760" cy="868680"/>
           </a:xfrm>
           <a:prstGeom prst="rect">
             <a:avLst/>
@@ -4819,7 +4819,7 @@
               <a:buNone/>
             </a:pPr>
             <a:r>
-              <a:rPr lang="en-US" sz="5200" b="1" dirty="0">
+              <a:rPr lang="en-US" sz="4600" b="1" dirty="0">
                 <a:solidFill>
                   <a:srgbClr val="FFFFFF"/>
                 </a:solidFill>
@@ -4827,9 +4827,9 @@
                 <a:ea typeface="Cambria" pitchFamily="34" charset="-122"/>
                 <a:cs typeface="Cambria" pitchFamily="34" charset="-120"/>
               </a:rPr>
-              <a:t>517,059</a:t>
-            </a:r>
-            <a:endParaRPr lang="en-US" sz="5200" dirty="0"/>
+              <a:t>515,142</a:t>
+            </a:r>
+            <a:endParaRPr lang="en-US" sz="4600" dirty="0"/>
           </a:p>
         </p:txBody>
       </p:sp>
@@ -4841,8 +4841,8 @@
         </p:nvSpPr>
         <p:spPr>
           <a:xfrm>
-            <a:off x="640080" y="3291840"/>
-            <a:ext cx="3931920" cy="365760"/>
+            <a:off x="548640" y="3127248"/>
+            <a:ext cx="3794760" cy="320040"/>
           </a:xfrm>
           <a:prstGeom prst="rect">
             <a:avLst/>
@@ -4858,7 +4858,7 @@
               <a:buNone/>
             </a:pPr>
             <a:r>
-              <a:rPr lang="en-US" sz="1600" dirty="0">
+              <a:rPr lang="en-US" sz="1200" dirty="0">
                 <a:solidFill>
                   <a:srgbClr val="CADCFC"/>
                 </a:solidFill>
@@ -4866,38 +4866,64 @@
                 <a:ea typeface="Malgun Gothic" pitchFamily="34" charset="-122"/>
                 <a:cs typeface="Malgun Gothic" pitchFamily="34" charset="-120"/>
               </a:rPr>
-              <a:t>명</a:t>
-            </a:r>
-            <a:endParaRPr lang="en-US" sz="1600" dirty="0"/>
-          </a:p>
-        </p:txBody>
-      </p:sp>
-      <p:sp>
-        <p:nvSpPr>
-          <p:cNvPr id="9" name="Text 7"/>
-          <p:cNvSpPr/>
-          <p:nvPr/>
-        </p:nvSpPr>
-        <p:spPr>
-          <a:xfrm>
-            <a:off x="777240" y="3794760"/>
-            <a:ext cx="3657600" cy="365760"/>
-          </a:xfrm>
-          <a:prstGeom prst="rect">
-            <a:avLst/>
-          </a:prstGeom>
-          <a:noFill/>
-          <a:ln/>
-        </p:spPr>
-        <p:txBody>
-          <a:bodyPr wrap="square" rtlCol="0" anchor="ctr"/>
-          <a:lstStyle/>
-          <a:p>
-            <a:pPr indent="0" marL="0">
-              <a:buNone/>
-            </a:pPr>
-            <a:r>
-              <a:rPr lang="en-US" sz="1300" b="1" dirty="0">
+              <a:t>명 · 대구 8개 구·군 중 1위</a:t>
+            </a:r>
+            <a:endParaRPr lang="en-US" sz="1200" dirty="0"/>
+          </a:p>
+        </p:txBody>
+      </p:sp>
+      <p:sp>
+        <p:nvSpPr>
+          <p:cNvPr id="9" name="Shape 7"/>
+          <p:cNvSpPr/>
+          <p:nvPr/>
+        </p:nvSpPr>
+        <p:spPr>
+          <a:xfrm>
+            <a:off x="868680" y="3611880"/>
+            <a:ext cx="3154680" cy="0"/>
+          </a:xfrm>
+          <a:prstGeom prst="line">
+            <a:avLst/>
+          </a:prstGeom>
+          <a:noFill/>
+          <a:ln w="12700">
+            <a:solidFill>
+              <a:srgbClr val="2E5E5C"/>
+            </a:solidFill>
+            <a:prstDash val="solid"/>
+          </a:ln>
+        </p:spPr>
+      </p:sp>
+      <p:sp>
+        <p:nvSpPr>
+          <p:cNvPr id="10" name="Text 8"/>
+          <p:cNvSpPr/>
+          <p:nvPr/>
+        </p:nvSpPr>
+        <p:spPr>
+          <a:xfrm>
+            <a:off x="777240" y="3749040"/>
+            <a:ext cx="3383280" cy="2011680"/>
+          </a:xfrm>
+          <a:prstGeom prst="rect">
+            <a:avLst/>
+          </a:prstGeom>
+          <a:noFill/>
+          <a:ln/>
+        </p:spPr>
+        <p:txBody>
+          <a:bodyPr wrap="square" rtlCol="0" anchor="t"/>
+          <a:lstStyle/>
+          <a:p>
+            <a:pPr indent="0" marL="0">
+              <a:lnSpc>
+                <a:spcPct val="135000"/>
+              </a:lnSpc>
+              <a:buNone/>
+            </a:pPr>
+            <a:r>
+              <a:rPr lang="en-US" sz="1150" b="1" dirty="0">
                 <a:solidFill>
                   <a:srgbClr val="FFFFFF"/>
                 </a:solidFill>
@@ -4905,41 +4931,16 @@
                 <a:ea typeface="Malgun Gothic" pitchFamily="34" charset="-122"/>
                 <a:cs typeface="Malgun Gothic" pitchFamily="34" charset="-120"/>
               </a:rPr>
-              <a:t>대구 8개 자치구·군 중 인구 1위</a:t>
-            </a:r>
-            <a:endParaRPr lang="en-US" sz="1300" dirty="0"/>
-          </a:p>
-        </p:txBody>
-      </p:sp>
-      <p:sp>
-        <p:nvSpPr>
-          <p:cNvPr id="10" name="Text 8"/>
-          <p:cNvSpPr/>
-          <p:nvPr/>
-        </p:nvSpPr>
-        <p:spPr>
-          <a:xfrm>
-            <a:off x="777240" y="4206240"/>
-            <a:ext cx="3703320" cy="731520"/>
-          </a:xfrm>
-          <a:prstGeom prst="rect">
-            <a:avLst/>
-          </a:prstGeom>
-          <a:noFill/>
-          <a:ln/>
-        </p:spPr>
-        <p:txBody>
-          <a:bodyPr wrap="square" rtlCol="0" anchor="ctr"/>
-          <a:lstStyle/>
-          <a:p>
+              <a:t>239,483 세대  </a:t>
+            </a:r>
             <a:pPr indent="0" marL="0">
               <a:lnSpc>
-                <a:spcPct val="110000"/>
+                <a:spcPct val="135000"/>
               </a:lnSpc>
               <a:buNone/>
             </a:pPr>
             <a:r>
-              <a:rPr lang="en-US" sz="1200" dirty="0">
+              <a:rPr lang="en-US" sz="1150" dirty="0">
                 <a:solidFill>
                   <a:srgbClr val="9FBAB7"/>
                 </a:solidFill>
@@ -4947,68 +4948,96 @@
                 <a:ea typeface="Malgun Gothic" pitchFamily="34" charset="-122"/>
                 <a:cs typeface="Malgun Gothic" pitchFamily="34" charset="-120"/>
               </a:rPr>
-              <a:t>▾ 전월 대비 −623명 · 정점(2013년 약 61만) 이후 완만한 감소</a:t>
-            </a:r>
-            <a:endParaRPr lang="en-US" sz="1200" dirty="0"/>
-          </a:p>
-        </p:txBody>
-      </p:sp>
-      <p:sp>
-        <p:nvSpPr>
-          <p:cNvPr id="11" name="Text 9"/>
-          <p:cNvSpPr/>
-          <p:nvPr/>
-        </p:nvSpPr>
-        <p:spPr>
-          <a:xfrm>
-            <a:off x="777240" y="5029200"/>
-            <a:ext cx="3703320" cy="731520"/>
-          </a:xfrm>
-          <a:prstGeom prst="rect">
-            <a:avLst/>
-          </a:prstGeom>
-          <a:noFill/>
-          <a:ln/>
-        </p:spPr>
-        <p:txBody>
-          <a:bodyPr wrap="square" rtlCol="0" anchor="ctr"/>
-          <a:lstStyle/>
-          <a:p>
+              <a:t>(세대당 2.15명)
+</a:t>
+            </a:r>
             <a:pPr indent="0" marL="0">
               <a:lnSpc>
-                <a:spcPct val="110000"/>
+                <a:spcPct val="135000"/>
               </a:lnSpc>
               <a:buNone/>
             </a:pPr>
             <a:r>
-              <a:rPr lang="en-US" sz="1200" dirty="0">
-                <a:solidFill>
-                  <a:srgbClr val="CADCFC"/>
-                </a:solidFill>
-                <a:latin typeface="Malgun Gothic" pitchFamily="34" charset="0"/>
-                <a:ea typeface="Malgun Gothic" pitchFamily="34" charset="-122"/>
-                <a:cs typeface="Malgun Gothic" pitchFamily="34" charset="-120"/>
-              </a:rPr>
-              <a:t>인구밀도 ≈ 8,300명/㎢  (면적 62.3㎢) — 대구 평균의 3배대</a:t>
-            </a:r>
-            <a:endParaRPr lang="en-US" sz="1200" dirty="0"/>
-          </a:p>
-        </p:txBody>
-      </p:sp>
-      <p:sp>
-        <p:nvSpPr>
-          <p:cNvPr id="12" name="Shape 10"/>
-          <p:cNvSpPr/>
-          <p:nvPr/>
-        </p:nvSpPr>
-        <p:spPr>
-          <a:xfrm>
-            <a:off x="4937760" y="1691640"/>
-            <a:ext cx="3337560" cy="2011680"/>
+              <a:rPr lang="en-US" sz="1150" b="1" dirty="0">
+                <a:solidFill>
+                  <a:srgbClr val="FFFFFF"/>
+                </a:solidFill>
+                <a:latin typeface="Malgun Gothic" pitchFamily="34" charset="0"/>
+                <a:ea typeface="Malgun Gothic" pitchFamily="34" charset="-122"/>
+                <a:cs typeface="Malgun Gothic" pitchFamily="34" charset="-120"/>
+              </a:rPr>
+              <a:t>밀도 ≈ 8,300명/㎢  </a:t>
+            </a:r>
+            <a:pPr indent="0" marL="0">
+              <a:lnSpc>
+                <a:spcPct val="135000"/>
+              </a:lnSpc>
+              <a:buNone/>
+            </a:pPr>
+            <a:r>
+              <a:rPr lang="en-US" sz="1150" dirty="0">
+                <a:solidFill>
+                  <a:srgbClr val="9FBAB7"/>
+                </a:solidFill>
+                <a:latin typeface="Malgun Gothic" pitchFamily="34" charset="0"/>
+                <a:ea typeface="Malgun Gothic" pitchFamily="34" charset="-122"/>
+                <a:cs typeface="Malgun Gothic" pitchFamily="34" charset="-120"/>
+              </a:rPr>
+              <a:t>(대구 평균의 3배대)
+</a:t>
+            </a:r>
+            <a:pPr indent="0" marL="0">
+              <a:lnSpc>
+                <a:spcPct val="135000"/>
+              </a:lnSpc>
+              <a:buNone/>
+            </a:pPr>
+            <a:r>
+              <a:rPr lang="en-US" sz="1150" b="1" dirty="0">
+                <a:solidFill>
+                  <a:srgbClr val="FFFFFF"/>
+                </a:solidFill>
+                <a:latin typeface="Malgun Gothic" pitchFamily="34" charset="0"/>
+                <a:ea typeface="Malgun Gothic" pitchFamily="34" charset="-122"/>
+                <a:cs typeface="Malgun Gothic" pitchFamily="34" charset="-120"/>
+              </a:rPr>
+              <a:t>517,059(2025.12) → 515,142  </a:t>
+            </a:r>
+            <a:pPr indent="0" marL="0">
+              <a:lnSpc>
+                <a:spcPct val="135000"/>
+              </a:lnSpc>
+              <a:buNone/>
+            </a:pPr>
+            <a:r>
+              <a:rPr lang="en-US" sz="1150" dirty="0">
+                <a:solidFill>
+                  <a:srgbClr val="9FBAB7"/>
+                </a:solidFill>
+                <a:latin typeface="Malgun Gothic" pitchFamily="34" charset="0"/>
+                <a:ea typeface="Malgun Gothic" pitchFamily="34" charset="-122"/>
+                <a:cs typeface="Malgun Gothic" pitchFamily="34" charset="-120"/>
+              </a:rPr>
+              <a:t>감소 지속</a:t>
+            </a:r>
+            <a:endParaRPr lang="en-US" sz="1150" dirty="0"/>
+          </a:p>
+        </p:txBody>
+      </p:sp>
+      <p:sp>
+        <p:nvSpPr>
+          <p:cNvPr id="11" name="Shape 9"/>
+          <p:cNvSpPr/>
+          <p:nvPr/>
+        </p:nvSpPr>
+        <p:spPr>
+          <a:xfrm>
+            <a:off x="4526280" y="1691640"/>
+            <a:ext cx="7086600" cy="2057400"/>
           </a:xfrm>
           <a:prstGeom prst="roundRect">
             <a:avLst>
-              <a:gd name="adj" fmla="val 4091"/>
+              <a:gd name="adj" fmla="val 4444"/>
             </a:avLst>
           </a:prstGeom>
           <a:solidFill>
@@ -5020,14 +5049,46 @@
             </a:solidFill>
             <a:prstDash val="solid"/>
           </a:ln>
-          <a:effectLst>
-            <a:outerShdw sx="100000" sy="100000" kx="0" ky="0" algn="bl" rotWithShape="0" blurRad="76200" dist="25400" dir="5400000">
-              <a:srgbClr val="BFCFCC">
-                <a:alpha val="50000"/>
-              </a:srgbClr>
-            </a:outerShdw>
-          </a:effectLst>
-        </p:spPr>
+        </p:spPr>
+      </p:sp>
+      <p:sp>
+        <p:nvSpPr>
+          <p:cNvPr id="12" name="Text 10"/>
+          <p:cNvSpPr/>
+          <p:nvPr/>
+        </p:nvSpPr>
+        <p:spPr>
+          <a:xfrm>
+            <a:off x="4754880" y="1874520"/>
+            <a:ext cx="6583680" cy="365760"/>
+          </a:xfrm>
+          <a:prstGeom prst="rect">
+            <a:avLst/>
+          </a:prstGeom>
+          <a:noFill/>
+          <a:ln/>
+        </p:spPr>
+        <p:txBody>
+          <a:bodyPr wrap="square" rtlCol="0" anchor="ctr"/>
+          <a:lstStyle/>
+          <a:p>
+            <a:pPr indent="0" marL="0">
+              <a:buNone/>
+            </a:pPr>
+            <a:r>
+              <a:rPr lang="en-US" sz="1500" b="1" dirty="0">
+                <a:solidFill>
+                  <a:srgbClr val="16302E"/>
+                </a:solidFill>
+                <a:latin typeface="Malgun Gothic" pitchFamily="34" charset="0"/>
+                <a:ea typeface="Malgun Gothic" pitchFamily="34" charset="-122"/>
+                <a:cs typeface="Malgun Gothic" pitchFamily="34" charset="-120"/>
+              </a:rPr>
+              <a:t>성별 구성 — 여초(女超) 확정</a:t>
+            </a:r>
+            <a:endParaRPr lang="en-US" sz="1500" dirty="0"/>
+          </a:p>
+        </p:txBody>
       </p:sp>
       <p:sp>
         <p:nvSpPr>
@@ -5037,8 +5098,8 @@
         </p:nvSpPr>
         <p:spPr>
           <a:xfrm>
-            <a:off x="4983480" y="1837944"/>
-            <a:ext cx="3246120" cy="640080"/>
+            <a:off x="4754880" y="2286000"/>
+            <a:ext cx="3291840" cy="457200"/>
           </a:xfrm>
           <a:prstGeom prst="rect">
             <a:avLst/>
@@ -5050,11 +5111,22 @@
           <a:bodyPr wrap="square" lIns="0" tIns="0" rIns="0" bIns="0" rtlCol="0" anchor="ctr"/>
           <a:lstStyle/>
           <a:p>
-            <a:pPr algn="ctr" indent="0" marL="0">
-              <a:buNone/>
-            </a:pPr>
-            <a:r>
-              <a:rPr lang="en-US" sz="3300" b="1" dirty="0">
+            <a:pPr indent="0" marL="0">
+              <a:buNone/>
+            </a:pPr>
+            <a:r>
+              <a:rPr lang="en-US" sz="1300" dirty="0">
+                <a:solidFill>
+                  <a:srgbClr val="5B6B6A"/>
+                </a:solidFill>
+              </a:rPr>
+              <a:t>여자  </a:t>
+            </a:r>
+            <a:pPr indent="0" marL="0">
+              <a:buNone/>
+            </a:pPr>
+            <a:r>
+              <a:rPr lang="en-US" sz="2400" b="1" dirty="0">
                 <a:solidFill>
                   <a:srgbClr val="FF6B5B"/>
                 </a:solidFill>
@@ -5062,12 +5134,20 @@
                 <a:ea typeface="Cambria" pitchFamily="34" charset="-122"/>
                 <a:cs typeface="Cambria" pitchFamily="34" charset="-120"/>
               </a:rPr>
-              <a:t>여초</a:t>
-            </a:r>
-            <a:pPr algn="ctr" indent="0" marL="0">
-              <a:buNone/>
-            </a:pPr>
-            <a:endParaRPr lang="en-US" sz="3300" dirty="0"/>
+              <a:t>263,101</a:t>
+            </a:r>
+            <a:pPr indent="0" marL="0">
+              <a:buNone/>
+            </a:pPr>
+            <a:r>
+              <a:rPr lang="en-US" sz="1200" dirty="0">
+                <a:solidFill>
+                  <a:srgbClr val="5B6B6A"/>
+                </a:solidFill>
+              </a:rPr>
+              <a:t> 명</a:t>
+            </a:r>
+            <a:endParaRPr lang="en-US" sz="1300" dirty="0"/>
           </a:p>
         </p:txBody>
       </p:sp>
@@ -5079,97 +5159,35 @@
         </p:nvSpPr>
         <p:spPr>
           <a:xfrm>
-            <a:off x="5047488" y="3136392"/>
-            <a:ext cx="3118104" cy="457200"/>
-          </a:xfrm>
-          <a:prstGeom prst="rect">
-            <a:avLst/>
-          </a:prstGeom>
-          <a:noFill/>
-          <a:ln/>
-        </p:spPr>
-        <p:txBody>
-          <a:bodyPr wrap="square" rtlCol="0" anchor="t"/>
-          <a:lstStyle/>
-          <a:p>
-            <a:pPr algn="ctr" indent="0" marL="0">
-              <a:buNone/>
-            </a:pPr>
-            <a:r>
-              <a:rPr lang="en-US" sz="1100" dirty="0">
+            <a:off x="8183880" y="2286000"/>
+            <a:ext cx="3291840" cy="457200"/>
+          </a:xfrm>
+          <a:prstGeom prst="rect">
+            <a:avLst/>
+          </a:prstGeom>
+          <a:noFill/>
+          <a:ln/>
+        </p:spPr>
+        <p:txBody>
+          <a:bodyPr wrap="square" lIns="0" tIns="0" rIns="0" bIns="0" rtlCol="0" anchor="ctr"/>
+          <a:lstStyle/>
+          <a:p>
+            <a:pPr indent="0" marL="0">
+              <a:buNone/>
+            </a:pPr>
+            <a:r>
+              <a:rPr lang="en-US" sz="1300" dirty="0">
                 <a:solidFill>
                   <a:srgbClr val="5B6B6A"/>
                 </a:solidFill>
-                <a:latin typeface="Malgun Gothic" pitchFamily="34" charset="0"/>
-                <a:ea typeface="Malgun Gothic" pitchFamily="34" charset="-122"/>
-                <a:cs typeface="Malgun Gothic" pitchFamily="34" charset="-120"/>
-              </a:rPr>
-              <a:t>성인 연령대 여성 우세 경향(대구 통상). 정확 남/여 인원은 행안부 원자료로 확정 필요.</a:t>
-            </a:r>
-            <a:endParaRPr lang="en-US" sz="1100" dirty="0"/>
-          </a:p>
-        </p:txBody>
-      </p:sp>
-      <p:sp>
-        <p:nvSpPr>
-          <p:cNvPr id="15" name="Shape 13"/>
-          <p:cNvSpPr/>
-          <p:nvPr/>
-        </p:nvSpPr>
-        <p:spPr>
-          <a:xfrm>
-            <a:off x="8458200" y="1691640"/>
-            <a:ext cx="3154680" cy="2011680"/>
-          </a:xfrm>
-          <a:prstGeom prst="roundRect">
-            <a:avLst>
-              <a:gd name="adj" fmla="val 4091"/>
-            </a:avLst>
-          </a:prstGeom>
-          <a:solidFill>
-            <a:srgbClr val="FFFFFF"/>
-          </a:solidFill>
-          <a:ln w="12700">
-            <a:solidFill>
-              <a:srgbClr val="D9E5E3"/>
-            </a:solidFill>
-            <a:prstDash val="solid"/>
-          </a:ln>
-          <a:effectLst>
-            <a:outerShdw sx="100000" sy="100000" kx="0" ky="0" algn="bl" rotWithShape="0" blurRad="76200" dist="25400" dir="5400000">
-              <a:srgbClr val="BFCFCC">
-                <a:alpha val="50000"/>
-              </a:srgbClr>
-            </a:outerShdw>
-          </a:effectLst>
-        </p:spPr>
-      </p:sp>
-      <p:sp>
-        <p:nvSpPr>
-          <p:cNvPr id="16" name="Text 14"/>
-          <p:cNvSpPr/>
-          <p:nvPr/>
-        </p:nvSpPr>
-        <p:spPr>
-          <a:xfrm>
-            <a:off x="8503920" y="1837944"/>
-            <a:ext cx="3063240" cy="640080"/>
-          </a:xfrm>
-          <a:prstGeom prst="rect">
-            <a:avLst/>
-          </a:prstGeom>
-          <a:noFill/>
-          <a:ln/>
-        </p:spPr>
-        <p:txBody>
-          <a:bodyPr wrap="square" lIns="0" tIns="0" rIns="0" bIns="0" rtlCol="0" anchor="ctr"/>
-          <a:lstStyle/>
-          <a:p>
-            <a:pPr algn="ctr" indent="0" marL="0">
-              <a:buNone/>
-            </a:pPr>
-            <a:r>
-              <a:rPr lang="en-US" sz="3300" b="1" dirty="0">
+              </a:rPr>
+              <a:t>남자  </a:t>
+            </a:r>
+            <a:pPr indent="0" marL="0">
+              <a:buNone/>
+            </a:pPr>
+            <a:r>
+              <a:rPr lang="en-US" sz="2400" b="1" dirty="0">
                 <a:solidFill>
                   <a:srgbClr val="0E7C7B"/>
                 </a:solidFill>
@@ -5177,14 +5195,66 @@
                 <a:ea typeface="Cambria" pitchFamily="34" charset="-122"/>
                 <a:cs typeface="Cambria" pitchFamily="34" charset="-120"/>
               </a:rPr>
-              <a:t>정주형</a:t>
-            </a:r>
-            <a:pPr algn="ctr" indent="0" marL="0">
-              <a:buNone/>
-            </a:pPr>
-            <a:endParaRPr lang="en-US" sz="3300" dirty="0"/>
-          </a:p>
-        </p:txBody>
+              <a:t>252,041</a:t>
+            </a:r>
+            <a:pPr indent="0" marL="0">
+              <a:buNone/>
+            </a:pPr>
+            <a:r>
+              <a:rPr lang="en-US" sz="1200" dirty="0">
+                <a:solidFill>
+                  <a:srgbClr val="5B6B6A"/>
+                </a:solidFill>
+              </a:rPr>
+              <a:t> 명</a:t>
+            </a:r>
+            <a:endParaRPr lang="en-US" sz="1300" dirty="0"/>
+          </a:p>
+        </p:txBody>
+      </p:sp>
+      <p:sp>
+        <p:nvSpPr>
+          <p:cNvPr id="15" name="Shape 13"/>
+          <p:cNvSpPr/>
+          <p:nvPr/>
+        </p:nvSpPr>
+        <p:spPr>
+          <a:xfrm>
+            <a:off x="4754880" y="2852928"/>
+            <a:ext cx="3385635" cy="384048"/>
+          </a:xfrm>
+          <a:prstGeom prst="roundRect">
+            <a:avLst>
+              <a:gd name="adj" fmla="val 11905"/>
+            </a:avLst>
+          </a:prstGeom>
+          <a:solidFill>
+            <a:srgbClr val="FF6B5B"/>
+          </a:solidFill>
+          <a:ln/>
+        </p:spPr>
+      </p:sp>
+      <p:sp>
+        <p:nvSpPr>
+          <p:cNvPr id="16" name="Shape 14"/>
+          <p:cNvSpPr/>
+          <p:nvPr/>
+        </p:nvSpPr>
+        <p:spPr>
+          <a:xfrm>
+            <a:off x="8140515" y="2852928"/>
+            <a:ext cx="3243765" cy="384048"/>
+          </a:xfrm>
+          <a:prstGeom prst="roundRect">
+            <a:avLst>
+              <a:gd name="adj" fmla="val 11905"/>
+            </a:avLst>
+          </a:prstGeom>
+          <a:solidFill>
+            <a:srgbClr val="0E7C7B"/>
+          </a:solidFill>
+          <a:ln/>
+        </p:spPr>
       </p:sp>
       <p:sp>
         <p:nvSpPr>
@@ -5194,24 +5264,102 @@
         </p:nvSpPr>
         <p:spPr>
           <a:xfrm>
-            <a:off x="8567928" y="3136392"/>
-            <a:ext cx="2935224" cy="457200"/>
-          </a:xfrm>
-          <a:prstGeom prst="rect">
-            <a:avLst/>
-          </a:prstGeom>
-          <a:noFill/>
-          <a:ln/>
-        </p:spPr>
-        <p:txBody>
-          <a:bodyPr wrap="square" rtlCol="0" anchor="t"/>
-          <a:lstStyle/>
-          <a:p>
-            <a:pPr algn="ctr" indent="0" marL="0">
-              <a:buNone/>
-            </a:pPr>
-            <a:r>
-              <a:rPr lang="en-US" sz="1100" dirty="0">
+            <a:off x="4846320" y="2852928"/>
+            <a:ext cx="1371600" cy="384048"/>
+          </a:xfrm>
+          <a:prstGeom prst="rect">
+            <a:avLst/>
+          </a:prstGeom>
+          <a:noFill/>
+          <a:ln/>
+        </p:spPr>
+        <p:txBody>
+          <a:bodyPr wrap="square" lIns="0" tIns="0" rIns="0" bIns="0" rtlCol="0" anchor="ctr"/>
+          <a:lstStyle/>
+          <a:p>
+            <a:pPr indent="0" marL="0">
+              <a:buNone/>
+            </a:pPr>
+            <a:r>
+              <a:rPr lang="en-US" sz="1100" b="1" dirty="0">
+                <a:solidFill>
+                  <a:srgbClr val="FFFFFF"/>
+                </a:solidFill>
+                <a:latin typeface="Malgun Gothic" pitchFamily="34" charset="0"/>
+                <a:ea typeface="Malgun Gothic" pitchFamily="34" charset="-122"/>
+                <a:cs typeface="Malgun Gothic" pitchFamily="34" charset="-120"/>
+              </a:rPr>
+              <a:t>51.1%</a:t>
+            </a:r>
+            <a:endParaRPr lang="en-US" sz="1100" dirty="0"/>
+          </a:p>
+        </p:txBody>
+      </p:sp>
+      <p:sp>
+        <p:nvSpPr>
+          <p:cNvPr id="18" name="Text 16"/>
+          <p:cNvSpPr/>
+          <p:nvPr/>
+        </p:nvSpPr>
+        <p:spPr>
+          <a:xfrm>
+            <a:off x="9921240" y="2852928"/>
+            <a:ext cx="1371600" cy="384048"/>
+          </a:xfrm>
+          <a:prstGeom prst="rect">
+            <a:avLst/>
+          </a:prstGeom>
+          <a:noFill/>
+          <a:ln/>
+        </p:spPr>
+        <p:txBody>
+          <a:bodyPr wrap="square" lIns="0" tIns="0" rIns="0" bIns="0" rtlCol="0" anchor="ctr"/>
+          <a:lstStyle/>
+          <a:p>
+            <a:pPr algn="r" indent="0" marL="0">
+              <a:buNone/>
+            </a:pPr>
+            <a:r>
+              <a:rPr lang="en-US" sz="1100" b="1" dirty="0">
+                <a:solidFill>
+                  <a:srgbClr val="FFFFFF"/>
+                </a:solidFill>
+                <a:latin typeface="Malgun Gothic" pitchFamily="34" charset="0"/>
+                <a:ea typeface="Malgun Gothic" pitchFamily="34" charset="-122"/>
+                <a:cs typeface="Malgun Gothic" pitchFamily="34" charset="-120"/>
+              </a:rPr>
+              <a:t>48.9%</a:t>
+            </a:r>
+            <a:endParaRPr lang="en-US" sz="1100" dirty="0"/>
+          </a:p>
+        </p:txBody>
+      </p:sp>
+      <p:sp>
+        <p:nvSpPr>
+          <p:cNvPr id="19" name="Text 17"/>
+          <p:cNvSpPr/>
+          <p:nvPr/>
+        </p:nvSpPr>
+        <p:spPr>
+          <a:xfrm>
+            <a:off x="4754880" y="3310128"/>
+            <a:ext cx="6583680" cy="320040"/>
+          </a:xfrm>
+          <a:prstGeom prst="rect">
+            <a:avLst/>
+          </a:prstGeom>
+          <a:noFill/>
+          <a:ln/>
+        </p:spPr>
+        <p:txBody>
+          <a:bodyPr wrap="square" rtlCol="0" anchor="ctr"/>
+          <a:lstStyle/>
+          <a:p>
+            <a:pPr indent="0" marL="0">
+              <a:buNone/>
+            </a:pPr>
+            <a:r>
+              <a:rPr lang="en-US" sz="1100" i="1" dirty="0">
                 <a:solidFill>
                   <a:srgbClr val="5B6B6A"/>
                 </a:solidFill>
@@ -5219,7 +5367,7 @@
                 <a:ea typeface="Malgun Gothic" pitchFamily="34" charset="-122"/>
                 <a:cs typeface="Malgun Gothic" pitchFamily="34" charset="-120"/>
               </a:rPr>
-              <a:t>대단지 아파트 배후(성서·월배·죽전). 재방문·회차 치료(패키지)에 유리한 구조.</a:t>
+              <a:t>성비 95.8 (여자 100명당 남자 95.8명) · 여성이 11,060명 더 많음</a:t>
             </a:r>
             <a:endParaRPr lang="en-US" sz="1100" dirty="0"/>
           </a:p>
@@ -5227,14 +5375,14 @@
       </p:sp>
       <p:sp>
         <p:nvSpPr>
-          <p:cNvPr id="18" name="Shape 16"/>
-          <p:cNvSpPr/>
-          <p:nvPr/>
-        </p:nvSpPr>
-        <p:spPr>
-          <a:xfrm>
-            <a:off x="4937760" y="3977640"/>
-            <a:ext cx="6675120" cy="2011680"/>
+          <p:cNvPr id="20" name="Shape 18"/>
+          <p:cNvSpPr/>
+          <p:nvPr/>
+        </p:nvSpPr>
+        <p:spPr>
+          <a:xfrm>
+            <a:off x="4526280" y="3977640"/>
+            <a:ext cx="7086600" cy="2011680"/>
           </a:xfrm>
           <a:prstGeom prst="roundRect">
             <a:avLst>
@@ -5254,14 +5402,14 @@
       </p:sp>
       <p:sp>
         <p:nvSpPr>
-          <p:cNvPr id="19" name="Text 17"/>
-          <p:cNvSpPr/>
-          <p:nvPr/>
-        </p:nvSpPr>
-        <p:spPr>
-          <a:xfrm>
-            <a:off x="5166360" y="4160520"/>
-            <a:ext cx="6217920" cy="365760"/>
+          <p:cNvPr id="21" name="Text 19"/>
+          <p:cNvSpPr/>
+          <p:nvPr/>
+        </p:nvSpPr>
+        <p:spPr>
+          <a:xfrm>
+            <a:off x="4754880" y="4160520"/>
+            <a:ext cx="6583680" cy="365760"/>
           </a:xfrm>
           <a:prstGeom prst="rect">
             <a:avLst/>
@@ -5293,14 +5441,14 @@
       </p:sp>
       <p:sp>
         <p:nvSpPr>
-          <p:cNvPr id="20" name="Text 18"/>
-          <p:cNvSpPr/>
-          <p:nvPr/>
-        </p:nvSpPr>
-        <p:spPr>
-          <a:xfrm>
-            <a:off x="5166360" y="4526280"/>
-            <a:ext cx="6263640" cy="1371600"/>
+          <p:cNvPr id="22" name="Text 20"/>
+          <p:cNvSpPr/>
+          <p:nvPr/>
+        </p:nvSpPr>
+        <p:spPr>
+          <a:xfrm>
+            <a:off x="4754880" y="4526280"/>
+            <a:ext cx="6629400" cy="1371600"/>
           </a:xfrm>
           <a:prstGeom prst="rect">
             <a:avLst/>
@@ -5314,12 +5462,12 @@
           <a:p>
             <a:pPr indent="0" marL="0">
               <a:lnSpc>
-                <a:spcPct val="115000"/>
+                <a:spcPct val="112000"/>
               </a:lnSpc>
               <a:buNone/>
             </a:pPr>
             <a:r>
-              <a:rPr lang="en-US" sz="1250" b="1" dirty="0">
+              <a:rPr lang="en-US" sz="1200" b="1" dirty="0">
                 <a:solidFill>
                   <a:srgbClr val="16302E"/>
                 </a:solidFill>
@@ -5327,16 +5475,16 @@
                 <a:ea typeface="Malgun Gothic" pitchFamily="34" charset="-122"/>
                 <a:cs typeface="Malgun Gothic" pitchFamily="34" charset="-120"/>
               </a:rPr>
-              <a:t>수요 절대량 최대  </a:t>
+              <a:t>여성 26.3만 = 1차 타깃 모수(TAM) 상한.  </a:t>
             </a:r>
             <a:pPr indent="0" marL="0">
               <a:lnSpc>
-                <a:spcPct val="115000"/>
+                <a:spcPct val="112000"/>
               </a:lnSpc>
               <a:buNone/>
             </a:pPr>
             <a:r>
-              <a:rPr lang="en-US" sz="1250" dirty="0">
+              <a:rPr lang="en-US" sz="1200" dirty="0">
                 <a:solidFill>
                   <a:srgbClr val="5B6B6A"/>
                 </a:solidFill>
@@ -5344,17 +5492,17 @@
                 <a:ea typeface="Malgun Gothic" pitchFamily="34" charset="-122"/>
                 <a:cs typeface="Malgun Gothic" pitchFamily="34" charset="-120"/>
               </a:rPr>
-              <a:t>→ 신규 유입보다 기존 주민 내 검색·인지 점유(마인드셰어) 확보가 핵심.
+              <a:t>다이어트 주 소구층 여성 절대수가 대구 자치구 중 최대.
 </a:t>
             </a:r>
             <a:pPr indent="0" marL="0">
               <a:lnSpc>
-                <a:spcPct val="115000"/>
+                <a:spcPct val="112000"/>
               </a:lnSpc>
               <a:buNone/>
             </a:pPr>
             <a:r>
-              <a:rPr lang="en-US" sz="1250" b="1" dirty="0">
+              <a:rPr lang="en-US" sz="1200" b="1" dirty="0">
                 <a:solidFill>
                   <a:srgbClr val="16302E"/>
                 </a:solidFill>
@@ -5362,16 +5510,51 @@
                 <a:ea typeface="Malgun Gothic" pitchFamily="34" charset="-122"/>
                 <a:cs typeface="Malgun Gothic" pitchFamily="34" charset="-120"/>
               </a:rPr>
+              <a:t>남성 25.2만도 유효  </a:t>
+            </a:r>
+            <a:pPr indent="0" marL="0">
+              <a:lnSpc>
+                <a:spcPct val="112000"/>
+              </a:lnSpc>
+              <a:buNone/>
+            </a:pPr>
+            <a:r>
+              <a:rPr lang="en-US" sz="1200" dirty="0">
+                <a:solidFill>
+                  <a:srgbClr val="5B6B6A"/>
+                </a:solidFill>
+                <a:latin typeface="Malgun Gothic" pitchFamily="34" charset="0"/>
+                <a:ea typeface="Malgun Gothic" pitchFamily="34" charset="-122"/>
+                <a:cs typeface="Malgun Gothic" pitchFamily="34" charset="-120"/>
+              </a:rPr>
+              <a:t>→ 40~50대 대사·검진 연계 비만치료로 이원 설계.
+</a:t>
+            </a:r>
+            <a:pPr indent="0" marL="0">
+              <a:lnSpc>
+                <a:spcPct val="112000"/>
+              </a:lnSpc>
+              <a:buNone/>
+            </a:pPr>
+            <a:r>
+              <a:rPr lang="en-US" sz="1200" b="1" dirty="0">
+                <a:solidFill>
+                  <a:srgbClr val="16302E"/>
+                </a:solidFill>
+                <a:latin typeface="Malgun Gothic" pitchFamily="34" charset="0"/>
+                <a:ea typeface="Malgun Gothic" pitchFamily="34" charset="-122"/>
+                <a:cs typeface="Malgun Gothic" pitchFamily="34" charset="-120"/>
+              </a:rPr>
               <a:t>고밀·정주형  </a:t>
             </a:r>
             <a:pPr indent="0" marL="0">
               <a:lnSpc>
-                <a:spcPct val="115000"/>
+                <a:spcPct val="112000"/>
               </a:lnSpc>
               <a:buNone/>
             </a:pPr>
             <a:r>
-              <a:rPr lang="en-US" sz="1250" dirty="0">
+              <a:rPr lang="en-US" sz="1200" dirty="0">
                 <a:solidFill>
                   <a:srgbClr val="5B6B6A"/>
                 </a:solidFill>
@@ -5379,15 +5562,15 @@
                 <a:ea typeface="Malgun Gothic" pitchFamily="34" charset="-122"/>
                 <a:cs typeface="Malgun Gothic" pitchFamily="34" charset="-120"/>
               </a:rPr>
-              <a:t>→ 회차·패키지 치료와 재방문 설계에 유리. LTV 중심 마케팅 적합.</a:t>
-            </a:r>
-            <a:endParaRPr lang="en-US" sz="1250" dirty="0"/>
-          </a:p>
-        </p:txBody>
-      </p:sp>
-      <p:sp>
-        <p:nvSpPr>
-          <p:cNvPr id="21" name="Text 19"/>
+              <a:t>→ 회차·패키지·재방문(LTV) 중심 마케팅에 유리.</a:t>
+            </a:r>
+            <a:endParaRPr lang="en-US" sz="1200" dirty="0"/>
+          </a:p>
+        </p:txBody>
+      </p:sp>
+      <p:sp>
+        <p:nvSpPr>
+          <p:cNvPr id="23" name="Text 21"/>
           <p:cNvSpPr/>
           <p:nvPr/>
         </p:nvSpPr>
@@ -5418,7 +5601,7 @@
                 <a:ea typeface="Malgun Gothic" pitchFamily="34" charset="-122"/>
                 <a:cs typeface="Malgun Gothic" pitchFamily="34" charset="-120"/>
               </a:rPr>
-              <a:t>행안부 주민등록(2025.12) · 심평원/공공데이터 · Naver DataLab·지역검색(2026.07)</a:t>
+              <a:t>행안부 주민등록(2026.03) · 심평원/공공데이터 · Naver DataLab·지역검색(2026.07)</a:t>
             </a:r>
             <a:endParaRPr lang="en-US" sz="800" dirty="0"/>
           </a:p>
@@ -5426,7 +5609,7 @@
       </p:sp>
       <p:sp>
         <p:nvSpPr>
-          <p:cNvPr id="22" name="Text 20"/>
+          <p:cNvPr id="24" name="Text 22"/>
           <p:cNvSpPr/>
           <p:nvPr/>
         </p:nvSpPr>
@@ -6207,7 +6390,7 @@
                 <a:ea typeface="Malgun Gothic" pitchFamily="34" charset="-122"/>
                 <a:cs typeface="Malgun Gothic" pitchFamily="34" charset="-120"/>
               </a:rPr>
-              <a:t>인구 비중과 공급 총량은 균형.  </a:t>
+              <a:t>인구 비중 21.9% vs 의료기관 비중 20.8% → 소폭 과소공급.  </a:t>
             </a:r>
             <a:pPr indent="0" marL="0">
               <a:lnSpc>
@@ -6224,7 +6407,7 @@
                 <a:ea typeface="Malgun Gothic" pitchFamily="34" charset="-122"/>
                 <a:cs typeface="Malgun Gothic" pitchFamily="34" charset="-120"/>
               </a:rPr>
-              <a:t>달서구는 대구 인구의 약 1/5, 의료기관도 20.8% 보유.
+              <a:t>대형 수요 대비 공급 밀도가 낮아 신규 진입 여지가 있음.
 </a:t>
             </a:r>
             <a:pPr indent="0" marL="0">
@@ -6316,7 +6499,7 @@
                 <a:ea typeface="Malgun Gothic" pitchFamily="34" charset="-122"/>
                 <a:cs typeface="Malgun Gothic" pitchFamily="34" charset="-120"/>
               </a:rPr>
-              <a:t>행안부 주민등록(2025.12) · 심평원/공공데이터 · Naver DataLab·지역검색(2026.07)</a:t>
+              <a:t>행안부 주민등록(2026.03) · 심평원/공공데이터 · Naver DataLab·지역검색(2026.07)</a:t>
             </a:r>
             <a:endParaRPr lang="en-US" sz="800" dirty="0"/>
           </a:p>
@@ -7580,7 +7763,7 @@
                 <a:ea typeface="Malgun Gothic" pitchFamily="34" charset="-122"/>
                 <a:cs typeface="Malgun Gothic" pitchFamily="34" charset="-120"/>
               </a:rPr>
-              <a:t>행안부 주민등록(2025.12) · 심평원/공공데이터 · Naver DataLab·지역검색(2026.07)</a:t>
+              <a:t>행안부 주민등록(2026.03) · 심평원/공공데이터 · Naver DataLab·지역검색(2026.07)</a:t>
             </a:r>
             <a:endParaRPr lang="en-US" sz="800" dirty="0"/>
           </a:p>
@@ -8001,7 +8184,7 @@
                 <a:ea typeface="Malgun Gothic" pitchFamily="34" charset="-122"/>
                 <a:cs typeface="Malgun Gothic" pitchFamily="34" charset="-120"/>
               </a:rPr>
-              <a:t>성별:  </a:t>
+              <a:t>성별(실측):  </a:t>
             </a:r>
             <a:pPr indent="0" marL="0">
               <a:lnSpc>
@@ -8018,7 +8201,7 @@
                 <a:ea typeface="Malgun Gothic" pitchFamily="34" charset="-122"/>
                 <a:cs typeface="Malgun Gothic" pitchFamily="34" charset="-120"/>
               </a:rPr>
-              <a:t>여성 우세 + 남성(40~50대 대사증후군) 별도 세그먼트. 정확 f:m 비는 광고계정 데이터로 확정.</a:t>
+              <a:t>여 263,101 &gt; 남 252,041 (여초). 여성 코어 + 남성 40~50대 대사 세그먼트 이원화.</a:t>
             </a:r>
             <a:endParaRPr lang="en-US" sz="1250" dirty="0"/>
           </a:p>
@@ -8057,7 +8240,7 @@
                 <a:ea typeface="Malgun Gothic" pitchFamily="34" charset="-122"/>
                 <a:cs typeface="Malgun Gothic" pitchFamily="34" charset="-120"/>
               </a:rPr>
-              <a:t>행안부 주민등록(2025.12) · 심평원/공공데이터 · Naver DataLab·지역검색(2026.07)</a:t>
+              <a:t>행안부 주민등록(2026.03) · 심평원/공공데이터 · Naver DataLab·지역검색(2026.07)</a:t>
             </a:r>
             <a:endParaRPr lang="en-US" sz="800" dirty="0"/>
           </a:p>
@@ -8595,7 +8778,7 @@
                 <a:ea typeface="Malgun Gothic" pitchFamily="34" charset="-122"/>
                 <a:cs typeface="Malgun Gothic" pitchFamily="34" charset="-120"/>
               </a:rPr>
-              <a:t>행안부 주민등록(2025.12) · 심평원/공공데이터 · Naver DataLab·지역검색(2026.07)</a:t>
+              <a:t>행안부 주민등록(2026.03) · 심평원/공공데이터 · Naver DataLab·지역검색(2026.07)</a:t>
             </a:r>
             <a:endParaRPr lang="en-US" sz="800" dirty="0"/>
           </a:p>
@@ -9498,7 +9681,7 @@
                 <a:ea typeface="Malgun Gothic" pitchFamily="34" charset="-122"/>
                 <a:cs typeface="Malgun Gothic" pitchFamily="34" charset="-120"/>
               </a:rPr>
-              <a:t>행안부 주민등록(2025.12) · 심평원/공공데이터 · Naver DataLab·지역검색(2026.07)</a:t>
+              <a:t>행안부 주민등록(2026.03) · 심평원/공공데이터 · Naver DataLab·지역검색(2026.07)</a:t>
             </a:r>
             <a:endParaRPr lang="en-US" sz="800" dirty="0"/>
           </a:p>
@@ -10618,7 +10801,7 @@
                 <a:ea typeface="Malgun Gothic" pitchFamily="34" charset="-122"/>
                 <a:cs typeface="Malgun Gothic" pitchFamily="34" charset="-120"/>
               </a:rPr>
-              <a:t>행안부 주민등록(2025.12) · 심평원/공공데이터 · Naver DataLab·지역검색(2026.07)</a:t>
+              <a:t>행안부 주민등록(2026.03) · 심평원/공공데이터 · Naver DataLab·지역검색(2026.07)</a:t>
             </a:r>
             <a:endParaRPr lang="en-US" sz="800" dirty="0"/>
           </a:p>

--- a/docs/analysis/대구-달서구-다이어트-상권분석.pptx
+++ b/docs/analysis/대구-달서구-다이어트-상권분석.pptx
@@ -15,9 +15,10 @@
     <p:sldId id="263" r:id="rId9"/>
     <p:sldId id="264" r:id="rId10"/>
     <p:sldId id="265" r:id="rId11"/>
+    <p:sldId id="266" r:id="rId12"/>
   </p:sldIdLst>
   <p:notesMasterIdLst>
-    <p:notesMasterId r:id="rId12"/>
+    <p:notesMasterId r:id="rId13"/>
   </p:notesMasterIdLst>
   <p:sldSz cx="12192000" cy="6858000"/>
   <p:notesSz cx="6858000" cy="12192000"/>
@@ -1612,7 +1613,7 @@
           <a:p>
             <a:r>
               <a:rPr lang="en-US" dirty="0"/>
-              <a:t>출처와 신뢰성. 실측 소스 명시, 미확정 항목은 확정법과 함께 투명 표기. 통계 날조 금지 원칙 준수.</a:t>
+              <a:t>4단계 로드맵: 데이터 확정 → 포지션/크리에이티브 → 검색 선점 → 제안·집행.</a:t>
             </a:r>
             <a:endParaRPr lang="en-US" dirty="0"/>
           </a:p>
@@ -1636,6 +1637,94 @@
             <a:fld id="{F7021451-1387-4CA6-816F-3879F97B5CBC}" type="slidenum">
               <a:rPr lang="en-US"/>
               <a:t>10</a:t>
+            </a:fld>
+            <a:endParaRPr lang="en-US"/>
+          </a:p>
+        </p:txBody>
+      </p:sp>
+    </p:spTree>
+    <p:extLst>
+      <p:ext uri="{BB962C8B-B14F-4D97-AF65-F5344CB8AC3E}">
+        <p14:creationId xmlns:p14="http://schemas.microsoft.com/office/powerpoint/2010/main" val="1024086991"/>
+      </p:ext>
+    </p:extLst>
+  </p:cSld>
+  <p:clrMapOvr>
+    <a:masterClrMapping/>
+  </p:clrMapOvr>
+</p:notes>
+</file>
+
+<file path=ppt/notesSlides/notesSlide11.xml><?xml version="1.0" encoding="utf-8"?>
+<p:notes xmlns:a="http://schemas.openxmlformats.org/drawingml/2006/main" xmlns:r="http://schemas.openxmlformats.org/officeDocument/2006/relationships" xmlns:p="http://schemas.openxmlformats.org/presentationml/2006/main">
+  <p:cSld>
+    <p:spTree>
+      <p:nvGrpSpPr>
+        <p:cNvPr id="1" name=""/>
+        <p:cNvGrpSpPr/>
+        <p:nvPr/>
+      </p:nvGrpSpPr>
+      <p:grpSpPr>
+        <a:xfrm>
+          <a:off x="0" y="0"/>
+          <a:ext cx="0" cy="0"/>
+          <a:chOff x="0" y="0"/>
+          <a:chExt cx="0" cy="0"/>
+        </a:xfrm>
+      </p:grpSpPr>
+      <p:sp>
+        <p:nvSpPr>
+          <p:cNvPr id="2" name="Slide Image Placeholder 1"/>
+          <p:cNvSpPr>
+            <a:spLocks noGrp="1" noRot="1" noChangeAspect="1"/>
+          </p:cNvSpPr>
+          <p:nvPr>
+            <p:ph type="sldImg"/>
+          </p:nvPr>
+        </p:nvSpPr>
+        <p:spPr/>
+      </p:sp>
+      <p:sp>
+        <p:nvSpPr>
+          <p:cNvPr id="3" name="Notes Placeholder 2"/>
+          <p:cNvSpPr>
+            <a:spLocks noGrp="1"/>
+          </p:cNvSpPr>
+          <p:nvPr>
+            <p:ph type="body" idx="1"/>
+          </p:nvPr>
+        </p:nvSpPr>
+        <p:spPr/>
+        <p:txBody>
+          <a:bodyPr/>
+          <a:lstStyle/>
+          <a:p>
+            <a:r>
+              <a:rPr lang="en-US" dirty="0"/>
+              <a:t>출처와 신뢰성. 실측 소스 명시, 미확정 항목은 확정법과 함께 투명 표기. 통계 날조 금지 원칙 준수.</a:t>
+            </a:r>
+            <a:endParaRPr lang="en-US" dirty="0"/>
+          </a:p>
+        </p:txBody>
+      </p:sp>
+      <p:sp>
+        <p:nvSpPr>
+          <p:cNvPr id="4" name="Slide Number Placeholder 3"/>
+          <p:cNvSpPr>
+            <a:spLocks noGrp="1"/>
+          </p:cNvSpPr>
+          <p:nvPr>
+            <p:ph type="sldNum" sz="quarter" idx="10"/>
+          </p:nvPr>
+        </p:nvSpPr>
+        <p:spPr/>
+        <p:txBody>
+          <a:bodyPr/>
+          <a:lstStyle/>
+          <a:p>
+            <a:fld id="{F7021451-1387-4CA6-816F-3879F97B5CBC}" type="slidenum">
+              <a:rPr lang="en-US"/>
+              <a:t>11</a:t>
             </a:fld>
             <a:endParaRPr lang="en-US"/>
           </a:p>
@@ -1964,7 +2053,7 @@
           <a:p>
             <a:r>
               <a:rPr lang="en-US" dirty="0"/>
-              <a:t>Naver 지역검색 리뷰순 상위 샘플(API가 5건 캡이라 개수 아님). 한방 강세, 양방 얇음. 죽전~감삼 클러스터.</a:t>
+              <a:t>심평원 진료통계 실측: 비만(E66) 직접 진료 174명 vs 대사질환군(고혈압/당뇨/고지혈) 약 13.5만. 비만 의료화 갭이 기회. 대사질환 배후가 의학 비만치료 1차 타깃.</a:t>
             </a:r>
             <a:endParaRPr lang="en-US" dirty="0"/>
           </a:p>
@@ -2052,7 +2141,7 @@
           <a:p>
             <a:r>
               <a:rPr lang="en-US" dirty="0"/>
-              <a:t>연령 지수 40대100 30대78 50대53 20대35 60대14 10대6. 코어 30~50대. 의학적 신뢰 소구. 성별은 여성우세+남성 대사 세그먼트.</a:t>
+              <a:t>Naver 지역검색 리뷰순 상위 샘플(API가 5건 캡이라 개수 아님). 한방 강세, 양방 얇음. 죽전~감삼 클러스터.</a:t>
             </a:r>
             <a:endParaRPr lang="en-US" dirty="0"/>
           </a:p>
@@ -2140,7 +2229,7 @@
           <a:p>
             <a:r>
               <a:rPr lang="en-US" dirty="0"/>
-              <a:t>핵심 슬라이드. 주사(위고비·삭센다) 2024.10 폭증 2025봄 정점. 일반어 하락. 한약 낮고 안정. 계절성 1~5월.</a:t>
+              <a:t>연령 지수 40대100 30대78 50대53 20대35 60대14 10대6. 코어 30~50대. 의학적 신뢰 소구. 성별은 여성우세+남성 대사 세그먼트.</a:t>
             </a:r>
             <a:endParaRPr lang="en-US" dirty="0"/>
           </a:p>
@@ -2228,7 +2317,7 @@
           <a:p>
             <a:r>
               <a:rPr lang="en-US" dirty="0"/>
-              <a:t>4축: 양방 의학 포지션, 40대·이원화 타깃, 시술어+지역롱테일 키워드, 12~1월 선행 타이밍.</a:t>
+              <a:t>핵심 슬라이드. 주사(위고비·삭센다) 2024.10 폭증 2025봄 정점. 일반어 하락. 한약 낮고 안정. 계절성 1~5월.</a:t>
             </a:r>
             <a:endParaRPr lang="en-US" dirty="0"/>
           </a:p>
@@ -2316,7 +2405,7 @@
           <a:p>
             <a:r>
               <a:rPr lang="en-US" dirty="0"/>
-              <a:t>4단계 로드맵: 데이터 확정 → 포지션/크리에이티브 → 검색 선점 → 제안·집행.</a:t>
+              <a:t>4축: 양방 의학 포지션, 40대·이원화 타깃, 시술어+지역롱테일 키워드, 12~1월 선행 타이밍.</a:t>
             </a:r>
             <a:endParaRPr lang="en-US" dirty="0"/>
           </a:p>
@@ -3136,6 +3225,1126 @@
     <p:bg>
       <p:bgPr>
         <a:solidFill>
+          <a:srgbClr val="FFFFFF"/>
+        </a:solidFill>
+      </p:bgPr>
+    </p:bg>
+    <p:spTree>
+      <p:nvGrpSpPr>
+        <p:cNvPr id="1" name=""/>
+        <p:cNvGrpSpPr/>
+        <p:nvPr/>
+      </p:nvGrpSpPr>
+      <p:grpSpPr>
+        <a:xfrm>
+          <a:off x="0" y="0"/>
+          <a:ext cx="0" cy="0"/>
+          <a:chOff x="0" y="0"/>
+          <a:chExt cx="0" cy="0"/>
+        </a:xfrm>
+      </p:grpSpPr>
+      <p:sp>
+        <p:nvSpPr>
+          <p:cNvPr id="2" name="Text 0"/>
+          <p:cNvSpPr/>
+          <p:nvPr/>
+        </p:nvSpPr>
+        <p:spPr>
+          <a:xfrm>
+            <a:off x="548640" y="384048"/>
+            <a:ext cx="8229600" cy="274320"/>
+          </a:xfrm>
+          <a:prstGeom prst="rect">
+            <a:avLst/>
+          </a:prstGeom>
+          <a:noFill/>
+          <a:ln/>
+        </p:spPr>
+        <p:txBody>
+          <a:bodyPr wrap="square" rtlCol="0" anchor="ctr"/>
+          <a:lstStyle/>
+          <a:p>
+            <a:pPr indent="0" marL="0">
+              <a:buNone/>
+            </a:pPr>
+            <a:r>
+              <a:rPr lang="en-US" sz="1200" b="1" spc="200" kern="0" dirty="0">
+                <a:solidFill>
+                  <a:srgbClr val="0E7C7B"/>
+                </a:solidFill>
+                <a:latin typeface="Malgun Gothic" pitchFamily="34" charset="0"/>
+                <a:ea typeface="Malgun Gothic" pitchFamily="34" charset="-122"/>
+                <a:cs typeface="Malgun Gothic" pitchFamily="34" charset="-120"/>
+              </a:rPr>
+              <a:t>실행 로드맵</a:t>
+            </a:r>
+            <a:endParaRPr lang="en-US" sz="1200" dirty="0"/>
+          </a:p>
+        </p:txBody>
+      </p:sp>
+      <p:sp>
+        <p:nvSpPr>
+          <p:cNvPr id="3" name="Text 1"/>
+          <p:cNvSpPr/>
+          <p:nvPr/>
+        </p:nvSpPr>
+        <p:spPr>
+          <a:xfrm>
+            <a:off x="548640" y="621792"/>
+            <a:ext cx="11064240" cy="640080"/>
+          </a:xfrm>
+          <a:prstGeom prst="rect">
+            <a:avLst/>
+          </a:prstGeom>
+          <a:noFill/>
+          <a:ln/>
+        </p:spPr>
+        <p:txBody>
+          <a:bodyPr wrap="square" rtlCol="0" anchor="ctr"/>
+          <a:lstStyle/>
+          <a:p>
+            <a:pPr indent="0" marL="0">
+              <a:buNone/>
+            </a:pPr>
+            <a:r>
+              <a:rPr lang="en-US" sz="3000" b="1" dirty="0">
+                <a:solidFill>
+                  <a:srgbClr val="16302E"/>
+                </a:solidFill>
+                <a:latin typeface="Malgun Gothic" pitchFamily="34" charset="0"/>
+                <a:ea typeface="Malgun Gothic" pitchFamily="34" charset="-122"/>
+                <a:cs typeface="Malgun Gothic" pitchFamily="34" charset="-120"/>
+              </a:rPr>
+              <a:t>실측 → 조준 → 선점 → 제안</a:t>
+            </a:r>
+            <a:endParaRPr lang="en-US" sz="3000" dirty="0"/>
+          </a:p>
+        </p:txBody>
+      </p:sp>
+      <p:sp>
+        <p:nvSpPr>
+          <p:cNvPr id="4" name="Text 2"/>
+          <p:cNvSpPr/>
+          <p:nvPr/>
+        </p:nvSpPr>
+        <p:spPr>
+          <a:xfrm>
+            <a:off x="8869680" y="420624"/>
+            <a:ext cx="2743200" cy="274320"/>
+          </a:xfrm>
+          <a:prstGeom prst="rect">
+            <a:avLst/>
+          </a:prstGeom>
+          <a:noFill/>
+          <a:ln/>
+        </p:spPr>
+        <p:txBody>
+          <a:bodyPr wrap="square" rtlCol="0" anchor="ctr"/>
+          <a:lstStyle/>
+          <a:p>
+            <a:pPr algn="r" indent="0" marL="0">
+              <a:buNone/>
+            </a:pPr>
+            <a:r>
+              <a:rPr lang="en-US" sz="900" dirty="0">
+                <a:solidFill>
+                  <a:srgbClr val="5B6B6A"/>
+                </a:solidFill>
+                <a:latin typeface="Malgun Gothic" pitchFamily="34" charset="0"/>
+                <a:ea typeface="Malgun Gothic" pitchFamily="34" charset="-122"/>
+                <a:cs typeface="Malgun Gothic" pitchFamily="34" charset="-120"/>
+              </a:rPr>
+              <a:t>VENOM · 대구 달서구 다이어트 상권 분석</a:t>
+            </a:r>
+            <a:endParaRPr lang="en-US" sz="900" dirty="0"/>
+          </a:p>
+        </p:txBody>
+      </p:sp>
+      <p:sp>
+        <p:nvSpPr>
+          <p:cNvPr id="5" name="Shape 3"/>
+          <p:cNvSpPr/>
+          <p:nvPr/>
+        </p:nvSpPr>
+        <p:spPr>
+          <a:xfrm>
+            <a:off x="640080" y="1783080"/>
+            <a:ext cx="822960" cy="822960"/>
+          </a:xfrm>
+          <a:prstGeom prst="ellipse">
+            <a:avLst/>
+          </a:prstGeom>
+          <a:solidFill>
+            <a:srgbClr val="0E7C7B"/>
+          </a:solidFill>
+          <a:ln/>
+        </p:spPr>
+      </p:sp>
+      <p:sp>
+        <p:nvSpPr>
+          <p:cNvPr id="6" name="Text 4"/>
+          <p:cNvSpPr/>
+          <p:nvPr/>
+        </p:nvSpPr>
+        <p:spPr>
+          <a:xfrm>
+            <a:off x="640080" y="1783080"/>
+            <a:ext cx="822960" cy="822960"/>
+          </a:xfrm>
+          <a:prstGeom prst="rect">
+            <a:avLst/>
+          </a:prstGeom>
+          <a:noFill/>
+          <a:ln/>
+        </p:spPr>
+        <p:txBody>
+          <a:bodyPr wrap="square" lIns="0" tIns="0" rIns="0" bIns="0" rtlCol="0" anchor="ctr"/>
+          <a:lstStyle/>
+          <a:p>
+            <a:pPr algn="ctr" indent="0" marL="0">
+              <a:buNone/>
+            </a:pPr>
+            <a:r>
+              <a:rPr lang="en-US" sz="2400" b="1" dirty="0">
+                <a:solidFill>
+                  <a:srgbClr val="FFFFFF"/>
+                </a:solidFill>
+                <a:latin typeface="Cambria" pitchFamily="34" charset="0"/>
+                <a:ea typeface="Cambria" pitchFamily="34" charset="-122"/>
+                <a:cs typeface="Cambria" pitchFamily="34" charset="-120"/>
+              </a:rPr>
+              <a:t>1</a:t>
+            </a:r>
+            <a:endParaRPr lang="en-US" sz="2400" dirty="0"/>
+          </a:p>
+        </p:txBody>
+      </p:sp>
+      <p:sp>
+        <p:nvSpPr>
+          <p:cNvPr id="7" name="Shape 5"/>
+          <p:cNvSpPr/>
+          <p:nvPr/>
+        </p:nvSpPr>
+        <p:spPr>
+          <a:xfrm>
+            <a:off x="1051560" y="2606040"/>
+            <a:ext cx="0" cy="256032"/>
+          </a:xfrm>
+          <a:prstGeom prst="line">
+            <a:avLst/>
+          </a:prstGeom>
+          <a:noFill/>
+          <a:ln w="25400">
+            <a:solidFill>
+              <a:srgbClr val="D9E5E3"/>
+            </a:solidFill>
+            <a:prstDash val="solid"/>
+          </a:ln>
+        </p:spPr>
+      </p:sp>
+      <p:sp>
+        <p:nvSpPr>
+          <p:cNvPr id="8" name="Shape 6"/>
+          <p:cNvSpPr/>
+          <p:nvPr/>
+        </p:nvSpPr>
+        <p:spPr>
+          <a:xfrm>
+            <a:off x="1783080" y="1801368"/>
+            <a:ext cx="9829800" cy="786384"/>
+          </a:xfrm>
+          <a:prstGeom prst="roundRect">
+            <a:avLst>
+              <a:gd name="adj" fmla="val 9302"/>
+            </a:avLst>
+          </a:prstGeom>
+          <a:solidFill>
+            <a:srgbClr val="F1F6F5"/>
+          </a:solidFill>
+          <a:ln w="12700">
+            <a:solidFill>
+              <a:srgbClr val="D9E5E3"/>
+            </a:solidFill>
+            <a:prstDash val="solid"/>
+          </a:ln>
+        </p:spPr>
+      </p:sp>
+      <p:sp>
+        <p:nvSpPr>
+          <p:cNvPr id="9" name="Text 7"/>
+          <p:cNvSpPr/>
+          <p:nvPr/>
+        </p:nvSpPr>
+        <p:spPr>
+          <a:xfrm>
+            <a:off x="2011680" y="1801368"/>
+            <a:ext cx="1371600" cy="786384"/>
+          </a:xfrm>
+          <a:prstGeom prst="rect">
+            <a:avLst/>
+          </a:prstGeom>
+          <a:noFill/>
+          <a:ln/>
+        </p:spPr>
+        <p:txBody>
+          <a:bodyPr wrap="square" lIns="0" tIns="0" rIns="0" bIns="0" rtlCol="0" anchor="ctr"/>
+          <a:lstStyle/>
+          <a:p>
+            <a:pPr indent="0" marL="0">
+              <a:buNone/>
+            </a:pPr>
+            <a:r>
+              <a:rPr lang="en-US" sz="1200" b="1" dirty="0">
+                <a:solidFill>
+                  <a:srgbClr val="0E7C7B"/>
+                </a:solidFill>
+                <a:latin typeface="Malgun Gothic" pitchFamily="34" charset="0"/>
+                <a:ea typeface="Malgun Gothic" pitchFamily="34" charset="-122"/>
+                <a:cs typeface="Malgun Gothic" pitchFamily="34" charset="-120"/>
+              </a:rPr>
+              <a:t>STEP 1</a:t>
+            </a:r>
+            <a:endParaRPr lang="en-US" sz="1200" dirty="0"/>
+          </a:p>
+        </p:txBody>
+      </p:sp>
+      <p:sp>
+        <p:nvSpPr>
+          <p:cNvPr id="10" name="Text 8"/>
+          <p:cNvSpPr/>
+          <p:nvPr/>
+        </p:nvSpPr>
+        <p:spPr>
+          <a:xfrm>
+            <a:off x="3383280" y="1801368"/>
+            <a:ext cx="2468880" cy="786384"/>
+          </a:xfrm>
+          <a:prstGeom prst="rect">
+            <a:avLst/>
+          </a:prstGeom>
+          <a:noFill/>
+          <a:ln/>
+        </p:spPr>
+        <p:txBody>
+          <a:bodyPr wrap="square" lIns="0" tIns="0" rIns="0" bIns="0" rtlCol="0" anchor="ctr"/>
+          <a:lstStyle/>
+          <a:p>
+            <a:pPr indent="0" marL="0">
+              <a:buNone/>
+            </a:pPr>
+            <a:r>
+              <a:rPr lang="en-US" sz="1400" b="1" dirty="0">
+                <a:solidFill>
+                  <a:srgbClr val="16302E"/>
+                </a:solidFill>
+                <a:latin typeface="Malgun Gothic" pitchFamily="34" charset="0"/>
+                <a:ea typeface="Malgun Gothic" pitchFamily="34" charset="-122"/>
+                <a:cs typeface="Malgun Gothic" pitchFamily="34" charset="-120"/>
+              </a:rPr>
+              <a:t>데이터 확정</a:t>
+            </a:r>
+            <a:endParaRPr lang="en-US" sz="1400" dirty="0"/>
+          </a:p>
+        </p:txBody>
+      </p:sp>
+      <p:sp>
+        <p:nvSpPr>
+          <p:cNvPr id="11" name="Text 9"/>
+          <p:cNvSpPr/>
+          <p:nvPr/>
+        </p:nvSpPr>
+        <p:spPr>
+          <a:xfrm>
+            <a:off x="5943600" y="1801368"/>
+            <a:ext cx="5486400" cy="786384"/>
+          </a:xfrm>
+          <a:prstGeom prst="rect">
+            <a:avLst/>
+          </a:prstGeom>
+          <a:noFill/>
+          <a:ln/>
+        </p:spPr>
+        <p:txBody>
+          <a:bodyPr wrap="square" lIns="635" tIns="635" rIns="635" bIns="635" rtlCol="0" anchor="ctr"/>
+          <a:lstStyle/>
+          <a:p>
+            <a:pPr indent="0" marL="0">
+              <a:lnSpc>
+                <a:spcPct val="105000"/>
+              </a:lnSpc>
+              <a:buNone/>
+            </a:pPr>
+            <a:r>
+              <a:rPr lang="en-US" sz="1150" dirty="0">
+                <a:solidFill>
+                  <a:srgbClr val="5B6B6A"/>
+                </a:solidFill>
+                <a:latin typeface="Malgun Gothic" pitchFamily="34" charset="0"/>
+                <a:ea typeface="Malgun Gothic" pitchFamily="34" charset="-122"/>
+                <a:cs typeface="Malgun Gothic" pitchFamily="34" charset="-120"/>
+              </a:rPr>
+              <a:t>행안부 성별인구 + 심평원 의원/한의원 종별 수로 TAM·경쟁 밀도 마감.</a:t>
+            </a:r>
+            <a:endParaRPr lang="en-US" sz="1150" dirty="0"/>
+          </a:p>
+        </p:txBody>
+      </p:sp>
+      <p:sp>
+        <p:nvSpPr>
+          <p:cNvPr id="12" name="Shape 10"/>
+          <p:cNvSpPr/>
+          <p:nvPr/>
+        </p:nvSpPr>
+        <p:spPr>
+          <a:xfrm>
+            <a:off x="640080" y="2862072"/>
+            <a:ext cx="822960" cy="822960"/>
+          </a:xfrm>
+          <a:prstGeom prst="ellipse">
+            <a:avLst/>
+          </a:prstGeom>
+          <a:solidFill>
+            <a:srgbClr val="2BB79A"/>
+          </a:solidFill>
+          <a:ln/>
+        </p:spPr>
+      </p:sp>
+      <p:sp>
+        <p:nvSpPr>
+          <p:cNvPr id="13" name="Text 11"/>
+          <p:cNvSpPr/>
+          <p:nvPr/>
+        </p:nvSpPr>
+        <p:spPr>
+          <a:xfrm>
+            <a:off x="640080" y="2862072"/>
+            <a:ext cx="822960" cy="822960"/>
+          </a:xfrm>
+          <a:prstGeom prst="rect">
+            <a:avLst/>
+          </a:prstGeom>
+          <a:noFill/>
+          <a:ln/>
+        </p:spPr>
+        <p:txBody>
+          <a:bodyPr wrap="square" lIns="0" tIns="0" rIns="0" bIns="0" rtlCol="0" anchor="ctr"/>
+          <a:lstStyle/>
+          <a:p>
+            <a:pPr algn="ctr" indent="0" marL="0">
+              <a:buNone/>
+            </a:pPr>
+            <a:r>
+              <a:rPr lang="en-US" sz="2400" b="1" dirty="0">
+                <a:solidFill>
+                  <a:srgbClr val="FFFFFF"/>
+                </a:solidFill>
+                <a:latin typeface="Cambria" pitchFamily="34" charset="0"/>
+                <a:ea typeface="Cambria" pitchFamily="34" charset="-122"/>
+                <a:cs typeface="Cambria" pitchFamily="34" charset="-120"/>
+              </a:rPr>
+              <a:t>2</a:t>
+            </a:r>
+            <a:endParaRPr lang="en-US" sz="2400" dirty="0"/>
+          </a:p>
+        </p:txBody>
+      </p:sp>
+      <p:sp>
+        <p:nvSpPr>
+          <p:cNvPr id="14" name="Shape 12"/>
+          <p:cNvSpPr/>
+          <p:nvPr/>
+        </p:nvSpPr>
+        <p:spPr>
+          <a:xfrm>
+            <a:off x="1051560" y="3685032"/>
+            <a:ext cx="0" cy="256032"/>
+          </a:xfrm>
+          <a:prstGeom prst="line">
+            <a:avLst/>
+          </a:prstGeom>
+          <a:noFill/>
+          <a:ln w="25400">
+            <a:solidFill>
+              <a:srgbClr val="D9E5E3"/>
+            </a:solidFill>
+            <a:prstDash val="solid"/>
+          </a:ln>
+        </p:spPr>
+      </p:sp>
+      <p:sp>
+        <p:nvSpPr>
+          <p:cNvPr id="15" name="Shape 13"/>
+          <p:cNvSpPr/>
+          <p:nvPr/>
+        </p:nvSpPr>
+        <p:spPr>
+          <a:xfrm>
+            <a:off x="1783080" y="2880360"/>
+            <a:ext cx="9829800" cy="786384"/>
+          </a:xfrm>
+          <a:prstGeom prst="roundRect">
+            <a:avLst>
+              <a:gd name="adj" fmla="val 9302"/>
+            </a:avLst>
+          </a:prstGeom>
+          <a:solidFill>
+            <a:srgbClr val="F1F6F5"/>
+          </a:solidFill>
+          <a:ln w="12700">
+            <a:solidFill>
+              <a:srgbClr val="D9E5E3"/>
+            </a:solidFill>
+            <a:prstDash val="solid"/>
+          </a:ln>
+        </p:spPr>
+      </p:sp>
+      <p:sp>
+        <p:nvSpPr>
+          <p:cNvPr id="16" name="Text 14"/>
+          <p:cNvSpPr/>
+          <p:nvPr/>
+        </p:nvSpPr>
+        <p:spPr>
+          <a:xfrm>
+            <a:off x="2011680" y="2880360"/>
+            <a:ext cx="1371600" cy="786384"/>
+          </a:xfrm>
+          <a:prstGeom prst="rect">
+            <a:avLst/>
+          </a:prstGeom>
+          <a:noFill/>
+          <a:ln/>
+        </p:spPr>
+        <p:txBody>
+          <a:bodyPr wrap="square" lIns="0" tIns="0" rIns="0" bIns="0" rtlCol="0" anchor="ctr"/>
+          <a:lstStyle/>
+          <a:p>
+            <a:pPr indent="0" marL="0">
+              <a:buNone/>
+            </a:pPr>
+            <a:r>
+              <a:rPr lang="en-US" sz="1200" b="1" dirty="0">
+                <a:solidFill>
+                  <a:srgbClr val="2BB79A"/>
+                </a:solidFill>
+                <a:latin typeface="Malgun Gothic" pitchFamily="34" charset="0"/>
+                <a:ea typeface="Malgun Gothic" pitchFamily="34" charset="-122"/>
+                <a:cs typeface="Malgun Gothic" pitchFamily="34" charset="-120"/>
+              </a:rPr>
+              <a:t>STEP 2</a:t>
+            </a:r>
+            <a:endParaRPr lang="en-US" sz="1200" dirty="0"/>
+          </a:p>
+        </p:txBody>
+      </p:sp>
+      <p:sp>
+        <p:nvSpPr>
+          <p:cNvPr id="17" name="Text 15"/>
+          <p:cNvSpPr/>
+          <p:nvPr/>
+        </p:nvSpPr>
+        <p:spPr>
+          <a:xfrm>
+            <a:off x="3383280" y="2880360"/>
+            <a:ext cx="2468880" cy="786384"/>
+          </a:xfrm>
+          <a:prstGeom prst="rect">
+            <a:avLst/>
+          </a:prstGeom>
+          <a:noFill/>
+          <a:ln/>
+        </p:spPr>
+        <p:txBody>
+          <a:bodyPr wrap="square" lIns="0" tIns="0" rIns="0" bIns="0" rtlCol="0" anchor="ctr"/>
+          <a:lstStyle/>
+          <a:p>
+            <a:pPr indent="0" marL="0">
+              <a:buNone/>
+            </a:pPr>
+            <a:r>
+              <a:rPr lang="en-US" sz="1400" b="1" dirty="0">
+                <a:solidFill>
+                  <a:srgbClr val="16302E"/>
+                </a:solidFill>
+                <a:latin typeface="Malgun Gothic" pitchFamily="34" charset="0"/>
+                <a:ea typeface="Malgun Gothic" pitchFamily="34" charset="-122"/>
+                <a:cs typeface="Malgun Gothic" pitchFamily="34" charset="-120"/>
+              </a:rPr>
+              <a:t>포지션·크리에이티브</a:t>
+            </a:r>
+            <a:endParaRPr lang="en-US" sz="1400" dirty="0"/>
+          </a:p>
+        </p:txBody>
+      </p:sp>
+      <p:sp>
+        <p:nvSpPr>
+          <p:cNvPr id="18" name="Text 16"/>
+          <p:cNvSpPr/>
+          <p:nvPr/>
+        </p:nvSpPr>
+        <p:spPr>
+          <a:xfrm>
+            <a:off x="5943600" y="2880360"/>
+            <a:ext cx="5486400" cy="786384"/>
+          </a:xfrm>
+          <a:prstGeom prst="rect">
+            <a:avLst/>
+          </a:prstGeom>
+          <a:noFill/>
+          <a:ln/>
+        </p:spPr>
+        <p:txBody>
+          <a:bodyPr wrap="square" lIns="635" tIns="635" rIns="635" bIns="635" rtlCol="0" anchor="ctr"/>
+          <a:lstStyle/>
+          <a:p>
+            <a:pPr indent="0" marL="0">
+              <a:lnSpc>
+                <a:spcPct val="105000"/>
+              </a:lnSpc>
+              <a:buNone/>
+            </a:pPr>
+            <a:r>
+              <a:rPr lang="en-US" sz="1150" dirty="0">
+                <a:solidFill>
+                  <a:srgbClr val="5B6B6A"/>
+                </a:solidFill>
+                <a:latin typeface="Malgun Gothic" pitchFamily="34" charset="0"/>
+                <a:ea typeface="Malgun Gothic" pitchFamily="34" charset="-122"/>
+                <a:cs typeface="Malgun Gothic" pitchFamily="34" charset="-120"/>
+              </a:rPr>
+              <a:t>양방 의학 비만치료 메시지, 40대 신뢰 소구 카피·비주얼 세트 제작.</a:t>
+            </a:r>
+            <a:endParaRPr lang="en-US" sz="1150" dirty="0"/>
+          </a:p>
+        </p:txBody>
+      </p:sp>
+      <p:sp>
+        <p:nvSpPr>
+          <p:cNvPr id="19" name="Shape 17"/>
+          <p:cNvSpPr/>
+          <p:nvPr/>
+        </p:nvSpPr>
+        <p:spPr>
+          <a:xfrm>
+            <a:off x="640080" y="3941064"/>
+            <a:ext cx="822960" cy="822960"/>
+          </a:xfrm>
+          <a:prstGeom prst="ellipse">
+            <a:avLst/>
+          </a:prstGeom>
+          <a:solidFill>
+            <a:srgbClr val="0E7C7B"/>
+          </a:solidFill>
+          <a:ln/>
+        </p:spPr>
+      </p:sp>
+      <p:sp>
+        <p:nvSpPr>
+          <p:cNvPr id="20" name="Text 18"/>
+          <p:cNvSpPr/>
+          <p:nvPr/>
+        </p:nvSpPr>
+        <p:spPr>
+          <a:xfrm>
+            <a:off x="640080" y="3941064"/>
+            <a:ext cx="822960" cy="822960"/>
+          </a:xfrm>
+          <a:prstGeom prst="rect">
+            <a:avLst/>
+          </a:prstGeom>
+          <a:noFill/>
+          <a:ln/>
+        </p:spPr>
+        <p:txBody>
+          <a:bodyPr wrap="square" lIns="0" tIns="0" rIns="0" bIns="0" rtlCol="0" anchor="ctr"/>
+          <a:lstStyle/>
+          <a:p>
+            <a:pPr algn="ctr" indent="0" marL="0">
+              <a:buNone/>
+            </a:pPr>
+            <a:r>
+              <a:rPr lang="en-US" sz="2400" b="1" dirty="0">
+                <a:solidFill>
+                  <a:srgbClr val="FFFFFF"/>
+                </a:solidFill>
+                <a:latin typeface="Cambria" pitchFamily="34" charset="0"/>
+                <a:ea typeface="Cambria" pitchFamily="34" charset="-122"/>
+                <a:cs typeface="Cambria" pitchFamily="34" charset="-120"/>
+              </a:rPr>
+              <a:t>3</a:t>
+            </a:r>
+            <a:endParaRPr lang="en-US" sz="2400" dirty="0"/>
+          </a:p>
+        </p:txBody>
+      </p:sp>
+      <p:sp>
+        <p:nvSpPr>
+          <p:cNvPr id="21" name="Shape 19"/>
+          <p:cNvSpPr/>
+          <p:nvPr/>
+        </p:nvSpPr>
+        <p:spPr>
+          <a:xfrm>
+            <a:off x="1051560" y="4764024"/>
+            <a:ext cx="0" cy="256032"/>
+          </a:xfrm>
+          <a:prstGeom prst="line">
+            <a:avLst/>
+          </a:prstGeom>
+          <a:noFill/>
+          <a:ln w="25400">
+            <a:solidFill>
+              <a:srgbClr val="D9E5E3"/>
+            </a:solidFill>
+            <a:prstDash val="solid"/>
+          </a:ln>
+        </p:spPr>
+      </p:sp>
+      <p:sp>
+        <p:nvSpPr>
+          <p:cNvPr id="22" name="Shape 20"/>
+          <p:cNvSpPr/>
+          <p:nvPr/>
+        </p:nvSpPr>
+        <p:spPr>
+          <a:xfrm>
+            <a:off x="1783080" y="3959352"/>
+            <a:ext cx="9829800" cy="786384"/>
+          </a:xfrm>
+          <a:prstGeom prst="roundRect">
+            <a:avLst>
+              <a:gd name="adj" fmla="val 9302"/>
+            </a:avLst>
+          </a:prstGeom>
+          <a:solidFill>
+            <a:srgbClr val="F1F6F5"/>
+          </a:solidFill>
+          <a:ln w="12700">
+            <a:solidFill>
+              <a:srgbClr val="D9E5E3"/>
+            </a:solidFill>
+            <a:prstDash val="solid"/>
+          </a:ln>
+        </p:spPr>
+      </p:sp>
+      <p:sp>
+        <p:nvSpPr>
+          <p:cNvPr id="23" name="Text 21"/>
+          <p:cNvSpPr/>
+          <p:nvPr/>
+        </p:nvSpPr>
+        <p:spPr>
+          <a:xfrm>
+            <a:off x="2011680" y="3959352"/>
+            <a:ext cx="1371600" cy="786384"/>
+          </a:xfrm>
+          <a:prstGeom prst="rect">
+            <a:avLst/>
+          </a:prstGeom>
+          <a:noFill/>
+          <a:ln/>
+        </p:spPr>
+        <p:txBody>
+          <a:bodyPr wrap="square" lIns="0" tIns="0" rIns="0" bIns="0" rtlCol="0" anchor="ctr"/>
+          <a:lstStyle/>
+          <a:p>
+            <a:pPr indent="0" marL="0">
+              <a:buNone/>
+            </a:pPr>
+            <a:r>
+              <a:rPr lang="en-US" sz="1200" b="1" dirty="0">
+                <a:solidFill>
+                  <a:srgbClr val="0E7C7B"/>
+                </a:solidFill>
+                <a:latin typeface="Malgun Gothic" pitchFamily="34" charset="0"/>
+                <a:ea typeface="Malgun Gothic" pitchFamily="34" charset="-122"/>
+                <a:cs typeface="Malgun Gothic" pitchFamily="34" charset="-120"/>
+              </a:rPr>
+              <a:t>STEP 3</a:t>
+            </a:r>
+            <a:endParaRPr lang="en-US" sz="1200" dirty="0"/>
+          </a:p>
+        </p:txBody>
+      </p:sp>
+      <p:sp>
+        <p:nvSpPr>
+          <p:cNvPr id="24" name="Text 22"/>
+          <p:cNvSpPr/>
+          <p:nvPr/>
+        </p:nvSpPr>
+        <p:spPr>
+          <a:xfrm>
+            <a:off x="3383280" y="3959352"/>
+            <a:ext cx="2468880" cy="786384"/>
+          </a:xfrm>
+          <a:prstGeom prst="rect">
+            <a:avLst/>
+          </a:prstGeom>
+          <a:noFill/>
+          <a:ln/>
+        </p:spPr>
+        <p:txBody>
+          <a:bodyPr wrap="square" lIns="0" tIns="0" rIns="0" bIns="0" rtlCol="0" anchor="ctr"/>
+          <a:lstStyle/>
+          <a:p>
+            <a:pPr indent="0" marL="0">
+              <a:buNone/>
+            </a:pPr>
+            <a:r>
+              <a:rPr lang="en-US" sz="1400" b="1" dirty="0">
+                <a:solidFill>
+                  <a:srgbClr val="16302E"/>
+                </a:solidFill>
+                <a:latin typeface="Malgun Gothic" pitchFamily="34" charset="0"/>
+                <a:ea typeface="Malgun Gothic" pitchFamily="34" charset="-122"/>
+                <a:cs typeface="Malgun Gothic" pitchFamily="34" charset="-120"/>
+              </a:rPr>
+              <a:t>검색 선점</a:t>
+            </a:r>
+            <a:endParaRPr lang="en-US" sz="1400" dirty="0"/>
+          </a:p>
+        </p:txBody>
+      </p:sp>
+      <p:sp>
+        <p:nvSpPr>
+          <p:cNvPr id="25" name="Text 23"/>
+          <p:cNvSpPr/>
+          <p:nvPr/>
+        </p:nvSpPr>
+        <p:spPr>
+          <a:xfrm>
+            <a:off x="5943600" y="3959352"/>
+            <a:ext cx="5486400" cy="786384"/>
+          </a:xfrm>
+          <a:prstGeom prst="rect">
+            <a:avLst/>
+          </a:prstGeom>
+          <a:noFill/>
+          <a:ln/>
+        </p:spPr>
+        <p:txBody>
+          <a:bodyPr wrap="square" lIns="635" tIns="635" rIns="635" bIns="635" rtlCol="0" anchor="ctr"/>
+          <a:lstStyle/>
+          <a:p>
+            <a:pPr indent="0" marL="0">
+              <a:lnSpc>
+                <a:spcPct val="105000"/>
+              </a:lnSpc>
+              <a:buNone/>
+            </a:pPr>
+            <a:r>
+              <a:rPr lang="en-US" sz="1150" dirty="0">
+                <a:solidFill>
+                  <a:srgbClr val="5B6B6A"/>
+                </a:solidFill>
+                <a:latin typeface="Malgun Gothic" pitchFamily="34" charset="0"/>
+                <a:ea typeface="Malgun Gothic" pitchFamily="34" charset="-122"/>
+                <a:cs typeface="Malgun Gothic" pitchFamily="34" charset="-120"/>
+              </a:rPr>
+              <a:t>시술어 광고 + 대구·랜드마크 롱테일 SEO/GEO(seo-engine)로 노출 장악.</a:t>
+            </a:r>
+            <a:endParaRPr lang="en-US" sz="1150" dirty="0"/>
+          </a:p>
+        </p:txBody>
+      </p:sp>
+      <p:sp>
+        <p:nvSpPr>
+          <p:cNvPr id="26" name="Shape 24"/>
+          <p:cNvSpPr/>
+          <p:nvPr/>
+        </p:nvSpPr>
+        <p:spPr>
+          <a:xfrm>
+            <a:off x="640080" y="5020056"/>
+            <a:ext cx="822960" cy="822960"/>
+          </a:xfrm>
+          <a:prstGeom prst="ellipse">
+            <a:avLst/>
+          </a:prstGeom>
+          <a:solidFill>
+            <a:srgbClr val="2BB79A"/>
+          </a:solidFill>
+          <a:ln/>
+        </p:spPr>
+      </p:sp>
+      <p:sp>
+        <p:nvSpPr>
+          <p:cNvPr id="27" name="Text 25"/>
+          <p:cNvSpPr/>
+          <p:nvPr/>
+        </p:nvSpPr>
+        <p:spPr>
+          <a:xfrm>
+            <a:off x="640080" y="5020056"/>
+            <a:ext cx="822960" cy="822960"/>
+          </a:xfrm>
+          <a:prstGeom prst="rect">
+            <a:avLst/>
+          </a:prstGeom>
+          <a:noFill/>
+          <a:ln/>
+        </p:spPr>
+        <p:txBody>
+          <a:bodyPr wrap="square" lIns="0" tIns="0" rIns="0" bIns="0" rtlCol="0" anchor="ctr"/>
+          <a:lstStyle/>
+          <a:p>
+            <a:pPr algn="ctr" indent="0" marL="0">
+              <a:buNone/>
+            </a:pPr>
+            <a:r>
+              <a:rPr lang="en-US" sz="2400" b="1" dirty="0">
+                <a:solidFill>
+                  <a:srgbClr val="FFFFFF"/>
+                </a:solidFill>
+                <a:latin typeface="Cambria" pitchFamily="34" charset="0"/>
+                <a:ea typeface="Cambria" pitchFamily="34" charset="-122"/>
+                <a:cs typeface="Cambria" pitchFamily="34" charset="-120"/>
+              </a:rPr>
+              <a:t>4</a:t>
+            </a:r>
+            <a:endParaRPr lang="en-US" sz="2400" dirty="0"/>
+          </a:p>
+        </p:txBody>
+      </p:sp>
+      <p:sp>
+        <p:nvSpPr>
+          <p:cNvPr id="28" name="Shape 26"/>
+          <p:cNvSpPr/>
+          <p:nvPr/>
+        </p:nvSpPr>
+        <p:spPr>
+          <a:xfrm>
+            <a:off x="1783080" y="5038344"/>
+            <a:ext cx="9829800" cy="786384"/>
+          </a:xfrm>
+          <a:prstGeom prst="roundRect">
+            <a:avLst>
+              <a:gd name="adj" fmla="val 9302"/>
+            </a:avLst>
+          </a:prstGeom>
+          <a:solidFill>
+            <a:srgbClr val="F1F6F5"/>
+          </a:solidFill>
+          <a:ln w="12700">
+            <a:solidFill>
+              <a:srgbClr val="D9E5E3"/>
+            </a:solidFill>
+            <a:prstDash val="solid"/>
+          </a:ln>
+        </p:spPr>
+      </p:sp>
+      <p:sp>
+        <p:nvSpPr>
+          <p:cNvPr id="29" name="Text 27"/>
+          <p:cNvSpPr/>
+          <p:nvPr/>
+        </p:nvSpPr>
+        <p:spPr>
+          <a:xfrm>
+            <a:off x="2011680" y="5038344"/>
+            <a:ext cx="1371600" cy="786384"/>
+          </a:xfrm>
+          <a:prstGeom prst="rect">
+            <a:avLst/>
+          </a:prstGeom>
+          <a:noFill/>
+          <a:ln/>
+        </p:spPr>
+        <p:txBody>
+          <a:bodyPr wrap="square" lIns="0" tIns="0" rIns="0" bIns="0" rtlCol="0" anchor="ctr"/>
+          <a:lstStyle/>
+          <a:p>
+            <a:pPr indent="0" marL="0">
+              <a:buNone/>
+            </a:pPr>
+            <a:r>
+              <a:rPr lang="en-US" sz="1200" b="1" dirty="0">
+                <a:solidFill>
+                  <a:srgbClr val="2BB79A"/>
+                </a:solidFill>
+                <a:latin typeface="Malgun Gothic" pitchFamily="34" charset="0"/>
+                <a:ea typeface="Malgun Gothic" pitchFamily="34" charset="-122"/>
+                <a:cs typeface="Malgun Gothic" pitchFamily="34" charset="-120"/>
+              </a:rPr>
+              <a:t>STEP 4</a:t>
+            </a:r>
+            <a:endParaRPr lang="en-US" sz="1200" dirty="0"/>
+          </a:p>
+        </p:txBody>
+      </p:sp>
+      <p:sp>
+        <p:nvSpPr>
+          <p:cNvPr id="30" name="Text 28"/>
+          <p:cNvSpPr/>
+          <p:nvPr/>
+        </p:nvSpPr>
+        <p:spPr>
+          <a:xfrm>
+            <a:off x="3383280" y="5038344"/>
+            <a:ext cx="2468880" cy="786384"/>
+          </a:xfrm>
+          <a:prstGeom prst="rect">
+            <a:avLst/>
+          </a:prstGeom>
+          <a:noFill/>
+          <a:ln/>
+        </p:spPr>
+        <p:txBody>
+          <a:bodyPr wrap="square" lIns="0" tIns="0" rIns="0" bIns="0" rtlCol="0" anchor="ctr"/>
+          <a:lstStyle/>
+          <a:p>
+            <a:pPr indent="0" marL="0">
+              <a:buNone/>
+            </a:pPr>
+            <a:r>
+              <a:rPr lang="en-US" sz="1400" b="1" dirty="0">
+                <a:solidFill>
+                  <a:srgbClr val="16302E"/>
+                </a:solidFill>
+                <a:latin typeface="Malgun Gothic" pitchFamily="34" charset="0"/>
+                <a:ea typeface="Malgun Gothic" pitchFamily="34" charset="-122"/>
+                <a:cs typeface="Malgun Gothic" pitchFamily="34" charset="-120"/>
+              </a:rPr>
+              <a:t>제안·집행</a:t>
+            </a:r>
+            <a:endParaRPr lang="en-US" sz="1400" dirty="0"/>
+          </a:p>
+        </p:txBody>
+      </p:sp>
+      <p:sp>
+        <p:nvSpPr>
+          <p:cNvPr id="31" name="Text 29"/>
+          <p:cNvSpPr/>
+          <p:nvPr/>
+        </p:nvSpPr>
+        <p:spPr>
+          <a:xfrm>
+            <a:off x="5943600" y="5038344"/>
+            <a:ext cx="5486400" cy="786384"/>
+          </a:xfrm>
+          <a:prstGeom prst="rect">
+            <a:avLst/>
+          </a:prstGeom>
+          <a:noFill/>
+          <a:ln/>
+        </p:spPr>
+        <p:txBody>
+          <a:bodyPr wrap="square" lIns="635" tIns="635" rIns="635" bIns="635" rtlCol="0" anchor="ctr"/>
+          <a:lstStyle/>
+          <a:p>
+            <a:pPr indent="0" marL="0">
+              <a:lnSpc>
+                <a:spcPct val="105000"/>
+              </a:lnSpc>
+              <a:buNone/>
+            </a:pPr>
+            <a:r>
+              <a:rPr lang="en-US" sz="1150" dirty="0">
+                <a:solidFill>
+                  <a:srgbClr val="5B6B6A"/>
+                </a:solidFill>
+                <a:latin typeface="Malgun Gothic" pitchFamily="34" charset="0"/>
+                <a:ea typeface="Malgun Gothic" pitchFamily="34" charset="-122"/>
+                <a:cs typeface="Malgun Gothic" pitchFamily="34" charset="-120"/>
+              </a:rPr>
+              <a:t>1페이지 클라이언트 제안서 합본, 12~1월 광고 선행 집행으로 봄 피크 수확.</a:t>
+            </a:r>
+            <a:endParaRPr lang="en-US" sz="1150" dirty="0"/>
+          </a:p>
+        </p:txBody>
+      </p:sp>
+      <p:sp>
+        <p:nvSpPr>
+          <p:cNvPr id="32" name="Text 30"/>
+          <p:cNvSpPr/>
+          <p:nvPr/>
+        </p:nvSpPr>
+        <p:spPr>
+          <a:xfrm>
+            <a:off x="548640" y="6446520"/>
+            <a:ext cx="8686800" cy="274320"/>
+          </a:xfrm>
+          <a:prstGeom prst="rect">
+            <a:avLst/>
+          </a:prstGeom>
+          <a:noFill/>
+          <a:ln/>
+        </p:spPr>
+        <p:txBody>
+          <a:bodyPr wrap="square" rtlCol="0" anchor="ctr"/>
+          <a:lstStyle/>
+          <a:p>
+            <a:pPr indent="0" marL="0">
+              <a:buNone/>
+            </a:pPr>
+            <a:r>
+              <a:rPr lang="en-US" sz="800" dirty="0">
+                <a:solidFill>
+                  <a:srgbClr val="5B6B6A"/>
+                </a:solidFill>
+                <a:latin typeface="Malgun Gothic" pitchFamily="34" charset="0"/>
+                <a:ea typeface="Malgun Gothic" pitchFamily="34" charset="-122"/>
+                <a:cs typeface="Malgun Gothic" pitchFamily="34" charset="-120"/>
+              </a:rPr>
+              <a:t>행안부 주민등록(2026.03) · 심평원/공공데이터 · Naver DataLab·지역검색(2026.07)</a:t>
+            </a:r>
+            <a:endParaRPr lang="en-US" sz="800" dirty="0"/>
+          </a:p>
+        </p:txBody>
+      </p:sp>
+      <p:sp>
+        <p:nvSpPr>
+          <p:cNvPr id="33" name="Text 31"/>
+          <p:cNvSpPr/>
+          <p:nvPr/>
+        </p:nvSpPr>
+        <p:spPr>
+          <a:xfrm>
+            <a:off x="11338560" y="6446520"/>
+            <a:ext cx="457200" cy="274320"/>
+          </a:xfrm>
+          <a:prstGeom prst="rect">
+            <a:avLst/>
+          </a:prstGeom>
+          <a:noFill/>
+          <a:ln/>
+        </p:spPr>
+        <p:txBody>
+          <a:bodyPr wrap="square" rtlCol="0" anchor="ctr"/>
+          <a:lstStyle/>
+          <a:p>
+            <a:pPr algn="r" indent="0" marL="0">
+              <a:buNone/>
+            </a:pPr>
+            <a:r>
+              <a:rPr lang="en-US" sz="900" dirty="0">
+                <a:solidFill>
+                  <a:srgbClr val="5B6B6A"/>
+                </a:solidFill>
+                <a:latin typeface="Malgun Gothic" pitchFamily="34" charset="0"/>
+                <a:ea typeface="Malgun Gothic" pitchFamily="34" charset="-122"/>
+                <a:cs typeface="Malgun Gothic" pitchFamily="34" charset="-120"/>
+              </a:rPr>
+              <a:t>10</a:t>
+            </a:r>
+            <a:endParaRPr lang="en-US" sz="900" dirty="0"/>
+          </a:p>
+        </p:txBody>
+      </p:sp>
+    </p:spTree>
+  </p:cSld>
+  <p:clrMapOvr>
+    <a:masterClrMapping/>
+  </p:clrMapOvr>
+</p:sld>
+</file>
+
+<file path=ppt/slides/slide11.xml><?xml version="1.0" encoding="utf-8"?>
+<p:sld xmlns:a="http://schemas.openxmlformats.org/drawingml/2006/main" xmlns:r="http://schemas.openxmlformats.org/officeDocument/2006/relationships" xmlns:p="http://schemas.openxmlformats.org/presentationml/2006/main">
+  <p:cSld name="Slide 11">
+    <p:bg>
+      <p:bgPr>
+        <a:solidFill>
           <a:srgbClr val="0F3B3A"/>
         </a:solidFill>
       </p:bgPr>
@@ -6609,7 +7818,7 @@
                 <a:ea typeface="Malgun Gothic" pitchFamily="34" charset="-122"/>
                 <a:cs typeface="Malgun Gothic" pitchFamily="34" charset="-120"/>
               </a:rPr>
-              <a:t>② 경쟁 지형 (샘플)</a:t>
+              <a:t>② 실측 의료 수요</a:t>
             </a:r>
             <a:endParaRPr lang="en-US" sz="1200" dirty="0"/>
           </a:p>
@@ -6648,7 +7857,7 @@
                 <a:ea typeface="Malgun Gothic" pitchFamily="34" charset="-122"/>
                 <a:cs typeface="Malgun Gothic" pitchFamily="34" charset="-120"/>
               </a:rPr>
-              <a:t>리뷰순 상위 노출 · 달구벌대로 죽전~감삼 클러스터</a:t>
+              <a:t>비만은 아직 '병원 밖' — 의료화 갭이 곧 기회</a:t>
             </a:r>
             <a:endParaRPr lang="en-US" sz="3000" dirty="0"/>
           </a:p>
@@ -6701,12 +7910,518 @@
         </p:nvSpPr>
         <p:spPr>
           <a:xfrm>
-            <a:off x="548640" y="1691640"/>
-            <a:ext cx="5349240" cy="3200400"/>
+            <a:off x="548640" y="1737360"/>
+            <a:ext cx="5074920" cy="1783080"/>
           </a:xfrm>
           <a:prstGeom prst="roundRect">
             <a:avLst>
-              <a:gd name="adj" fmla="val 2857"/>
+              <a:gd name="adj" fmla="val 6154"/>
+            </a:avLst>
+          </a:prstGeom>
+          <a:solidFill>
+            <a:srgbClr val="0F3B3A"/>
+          </a:solidFill>
+          <a:ln/>
+        </p:spPr>
+      </p:sp>
+      <p:sp>
+        <p:nvSpPr>
+          <p:cNvPr id="6" name="Text 4"/>
+          <p:cNvSpPr/>
+          <p:nvPr/>
+        </p:nvSpPr>
+        <p:spPr>
+          <a:xfrm>
+            <a:off x="777240" y="1901952"/>
+            <a:ext cx="4663440" cy="320040"/>
+          </a:xfrm>
+          <a:prstGeom prst="rect">
+            <a:avLst/>
+          </a:prstGeom>
+          <a:noFill/>
+          <a:ln/>
+        </p:spPr>
+        <p:txBody>
+          <a:bodyPr wrap="square" rtlCol="0" anchor="ctr"/>
+          <a:lstStyle/>
+          <a:p>
+            <a:pPr indent="0" marL="0">
+              <a:buNone/>
+            </a:pPr>
+            <a:r>
+              <a:rPr lang="en-US" sz="1200" dirty="0">
+                <a:solidFill>
+                  <a:srgbClr val="2BB79A"/>
+                </a:solidFill>
+                <a:latin typeface="Malgun Gothic" pitchFamily="34" charset="0"/>
+                <a:ea typeface="Malgun Gothic" pitchFamily="34" charset="-122"/>
+                <a:cs typeface="Malgun Gothic" pitchFamily="34" charset="-120"/>
+              </a:rPr>
+              <a:t>비만 (E66) 직접 진료 · 2022 · 달서구 주민</a:t>
+            </a:r>
+            <a:endParaRPr lang="en-US" sz="1200" dirty="0"/>
+          </a:p>
+        </p:txBody>
+      </p:sp>
+      <p:sp>
+        <p:nvSpPr>
+          <p:cNvPr id="7" name="Text 5"/>
+          <p:cNvSpPr/>
+          <p:nvPr/>
+        </p:nvSpPr>
+        <p:spPr>
+          <a:xfrm>
+            <a:off x="777240" y="2286000"/>
+            <a:ext cx="4663440" cy="822960"/>
+          </a:xfrm>
+          <a:prstGeom prst="rect">
+            <a:avLst/>
+          </a:prstGeom>
+          <a:noFill/>
+          <a:ln/>
+        </p:spPr>
+        <p:txBody>
+          <a:bodyPr wrap="square" lIns="0" tIns="0" rIns="0" bIns="0" rtlCol="0" anchor="ctr"/>
+          <a:lstStyle/>
+          <a:p>
+            <a:pPr indent="0" marL="0">
+              <a:buNone/>
+            </a:pPr>
+            <a:r>
+              <a:rPr lang="en-US" sz="5000" b="1" dirty="0">
+                <a:solidFill>
+                  <a:srgbClr val="FFFFFF"/>
+                </a:solidFill>
+                <a:latin typeface="Cambria" pitchFamily="34" charset="0"/>
+                <a:ea typeface="Cambria" pitchFamily="34" charset="-122"/>
+                <a:cs typeface="Cambria" pitchFamily="34" charset="-120"/>
+              </a:rPr>
+              <a:t>174</a:t>
+            </a:r>
+            <a:pPr indent="0" marL="0">
+              <a:buNone/>
+            </a:pPr>
+            <a:r>
+              <a:rPr lang="en-US" sz="1800" dirty="0">
+                <a:solidFill>
+                  <a:srgbClr val="CADCFC"/>
+                </a:solidFill>
+                <a:latin typeface="Malgun Gothic" pitchFamily="34" charset="0"/>
+                <a:ea typeface="Malgun Gothic" pitchFamily="34" charset="-122"/>
+                <a:cs typeface="Malgun Gothic" pitchFamily="34" charset="-120"/>
+              </a:rPr>
+              <a:t>  명</a:t>
+            </a:r>
+            <a:endParaRPr lang="en-US" sz="5000" dirty="0"/>
+          </a:p>
+        </p:txBody>
+      </p:sp>
+      <p:sp>
+        <p:nvSpPr>
+          <p:cNvPr id="8" name="Text 6"/>
+          <p:cNvSpPr/>
+          <p:nvPr/>
+        </p:nvSpPr>
+        <p:spPr>
+          <a:xfrm>
+            <a:off x="777240" y="3127248"/>
+            <a:ext cx="4663440" cy="320040"/>
+          </a:xfrm>
+          <a:prstGeom prst="rect">
+            <a:avLst/>
+          </a:prstGeom>
+          <a:noFill/>
+          <a:ln/>
+        </p:spPr>
+        <p:txBody>
+          <a:bodyPr wrap="square" rtlCol="0" anchor="ctr"/>
+          <a:lstStyle/>
+          <a:p>
+            <a:pPr indent="0" marL="0">
+              <a:buNone/>
+            </a:pPr>
+            <a:r>
+              <a:rPr lang="en-US" sz="1150" i="1" dirty="0">
+                <a:solidFill>
+                  <a:srgbClr val="9FBAB7"/>
+                </a:solidFill>
+                <a:latin typeface="Malgun Gothic" pitchFamily="34" charset="0"/>
+                <a:ea typeface="Malgun Gothic" pitchFamily="34" charset="-122"/>
+                <a:cs typeface="Malgun Gothic" pitchFamily="34" charset="-120"/>
+              </a:rPr>
+              <a:t>비만을 '질병'으로 병원에서 직접 치료받은 인원 — 극소수</a:t>
+            </a:r>
+            <a:endParaRPr lang="en-US" sz="1150" dirty="0"/>
+          </a:p>
+        </p:txBody>
+      </p:sp>
+      <p:sp>
+        <p:nvSpPr>
+          <p:cNvPr id="9" name="Shape 7"/>
+          <p:cNvSpPr/>
+          <p:nvPr/>
+        </p:nvSpPr>
+        <p:spPr>
+          <a:xfrm>
+            <a:off x="548640" y="3703320"/>
+            <a:ext cx="5074920" cy="2286000"/>
+          </a:xfrm>
+          <a:prstGeom prst="roundRect">
+            <a:avLst>
+              <a:gd name="adj" fmla="val 4000"/>
+            </a:avLst>
+          </a:prstGeom>
+          <a:solidFill>
+            <a:srgbClr val="F1F6F5"/>
+          </a:solidFill>
+          <a:ln w="12700">
+            <a:solidFill>
+              <a:srgbClr val="D9E5E3"/>
+            </a:solidFill>
+            <a:prstDash val="solid"/>
+          </a:ln>
+        </p:spPr>
+      </p:sp>
+      <p:sp>
+        <p:nvSpPr>
+          <p:cNvPr id="10" name="Text 8"/>
+          <p:cNvSpPr/>
+          <p:nvPr/>
+        </p:nvSpPr>
+        <p:spPr>
+          <a:xfrm>
+            <a:off x="777240" y="3858768"/>
+            <a:ext cx="4663440" cy="320040"/>
+          </a:xfrm>
+          <a:prstGeom prst="rect">
+            <a:avLst/>
+          </a:prstGeom>
+          <a:noFill/>
+          <a:ln/>
+        </p:spPr>
+        <p:txBody>
+          <a:bodyPr wrap="square" rtlCol="0" anchor="ctr"/>
+          <a:lstStyle/>
+          <a:p>
+            <a:pPr indent="0" marL="0">
+              <a:buNone/>
+            </a:pPr>
+            <a:r>
+              <a:rPr lang="en-US" sz="1300" b="1" dirty="0">
+                <a:solidFill>
+                  <a:srgbClr val="0E7C7B"/>
+                </a:solidFill>
+                <a:latin typeface="Malgun Gothic" pitchFamily="34" charset="0"/>
+                <a:ea typeface="Malgun Gothic" pitchFamily="34" charset="-122"/>
+                <a:cs typeface="Malgun Gothic" pitchFamily="34" charset="-120"/>
+              </a:rPr>
+              <a:t>대사질환 진료 배후 (주상병 기준)</a:t>
+            </a:r>
+            <a:endParaRPr lang="en-US" sz="1300" dirty="0"/>
+          </a:p>
+        </p:txBody>
+      </p:sp>
+      <p:sp>
+        <p:nvSpPr>
+          <p:cNvPr id="11" name="Text 9"/>
+          <p:cNvSpPr/>
+          <p:nvPr/>
+        </p:nvSpPr>
+        <p:spPr>
+          <a:xfrm>
+            <a:off x="777240" y="4206240"/>
+            <a:ext cx="4663440" cy="502920"/>
+          </a:xfrm>
+          <a:prstGeom prst="rect">
+            <a:avLst/>
+          </a:prstGeom>
+          <a:noFill/>
+          <a:ln/>
+        </p:spPr>
+        <p:txBody>
+          <a:bodyPr wrap="square" lIns="0" tIns="0" rIns="0" bIns="0" rtlCol="0" anchor="ctr"/>
+          <a:lstStyle/>
+          <a:p>
+            <a:pPr indent="0" marL="0">
+              <a:buNone/>
+            </a:pPr>
+            <a:r>
+              <a:rPr lang="en-US" sz="3000" b="1" dirty="0">
+                <a:solidFill>
+                  <a:srgbClr val="16302E"/>
+                </a:solidFill>
+                <a:latin typeface="Cambria" pitchFamily="34" charset="0"/>
+                <a:ea typeface="Cambria" pitchFamily="34" charset="-122"/>
+                <a:cs typeface="Cambria" pitchFamily="34" charset="-120"/>
+              </a:rPr>
+              <a:t>≈ 135,000</a:t>
+            </a:r>
+            <a:pPr indent="0" marL="0">
+              <a:buNone/>
+            </a:pPr>
+            <a:r>
+              <a:rPr lang="en-US" sz="1400" dirty="0">
+                <a:solidFill>
+                  <a:srgbClr val="5B6B6A"/>
+                </a:solidFill>
+                <a:latin typeface="Malgun Gothic" pitchFamily="34" charset="0"/>
+                <a:ea typeface="Malgun Gothic" pitchFamily="34" charset="-122"/>
+                <a:cs typeface="Malgun Gothic" pitchFamily="34" charset="-120"/>
+              </a:rPr>
+              <a:t> 명</a:t>
+            </a:r>
+            <a:endParaRPr lang="en-US" sz="3000" dirty="0"/>
+          </a:p>
+        </p:txBody>
+      </p:sp>
+      <p:sp>
+        <p:nvSpPr>
+          <p:cNvPr id="12" name="Text 10"/>
+          <p:cNvSpPr/>
+          <p:nvPr/>
+        </p:nvSpPr>
+        <p:spPr>
+          <a:xfrm>
+            <a:off x="777240" y="4864608"/>
+            <a:ext cx="3108960" cy="329184"/>
+          </a:xfrm>
+          <a:prstGeom prst="rect">
+            <a:avLst/>
+          </a:prstGeom>
+          <a:noFill/>
+          <a:ln/>
+        </p:spPr>
+        <p:txBody>
+          <a:bodyPr wrap="square" lIns="0" tIns="0" rIns="0" bIns="0" rtlCol="0" anchor="ctr"/>
+          <a:lstStyle/>
+          <a:p>
+            <a:pPr indent="0" marL="0">
+              <a:buNone/>
+            </a:pPr>
+            <a:r>
+              <a:rPr lang="en-US" sz="1200" dirty="0">
+                <a:solidFill>
+                  <a:srgbClr val="16302E"/>
+                </a:solidFill>
+                <a:latin typeface="Malgun Gothic" pitchFamily="34" charset="0"/>
+                <a:ea typeface="Malgun Gothic" pitchFamily="34" charset="-122"/>
+                <a:cs typeface="Malgun Gothic" pitchFamily="34" charset="-120"/>
+              </a:rPr>
+              <a:t>본태성고혈압 (I10)</a:t>
+            </a:r>
+            <a:endParaRPr lang="en-US" sz="1200" dirty="0"/>
+          </a:p>
+        </p:txBody>
+      </p:sp>
+      <p:sp>
+        <p:nvSpPr>
+          <p:cNvPr id="13" name="Text 11"/>
+          <p:cNvSpPr/>
+          <p:nvPr/>
+        </p:nvSpPr>
+        <p:spPr>
+          <a:xfrm>
+            <a:off x="3703320" y="4864608"/>
+            <a:ext cx="1828800" cy="329184"/>
+          </a:xfrm>
+          <a:prstGeom prst="rect">
+            <a:avLst/>
+          </a:prstGeom>
+          <a:noFill/>
+          <a:ln/>
+        </p:spPr>
+        <p:txBody>
+          <a:bodyPr wrap="square" lIns="0" tIns="0" rIns="0" bIns="0" rtlCol="0" anchor="ctr"/>
+          <a:lstStyle/>
+          <a:p>
+            <a:pPr algn="r" indent="0" marL="0">
+              <a:buNone/>
+            </a:pPr>
+            <a:r>
+              <a:rPr lang="en-US" sz="1200" b="1" dirty="0">
+                <a:solidFill>
+                  <a:srgbClr val="0E7C7B"/>
+                </a:solidFill>
+                <a:latin typeface="Malgun Gothic" pitchFamily="34" charset="0"/>
+                <a:ea typeface="Malgun Gothic" pitchFamily="34" charset="-122"/>
+                <a:cs typeface="Malgun Gothic" pitchFamily="34" charset="-120"/>
+              </a:rPr>
+              <a:t>67,929 명</a:t>
+            </a:r>
+            <a:endParaRPr lang="en-US" sz="1200" dirty="0"/>
+          </a:p>
+        </p:txBody>
+      </p:sp>
+      <p:sp>
+        <p:nvSpPr>
+          <p:cNvPr id="14" name="Text 12"/>
+          <p:cNvSpPr/>
+          <p:nvPr/>
+        </p:nvSpPr>
+        <p:spPr>
+          <a:xfrm>
+            <a:off x="777240" y="5230368"/>
+            <a:ext cx="3108960" cy="329184"/>
+          </a:xfrm>
+          <a:prstGeom prst="rect">
+            <a:avLst/>
+          </a:prstGeom>
+          <a:noFill/>
+          <a:ln/>
+        </p:spPr>
+        <p:txBody>
+          <a:bodyPr wrap="square" lIns="0" tIns="0" rIns="0" bIns="0" rtlCol="0" anchor="ctr"/>
+          <a:lstStyle/>
+          <a:p>
+            <a:pPr indent="0" marL="0">
+              <a:buNone/>
+            </a:pPr>
+            <a:r>
+              <a:rPr lang="en-US" sz="1200" dirty="0">
+                <a:solidFill>
+                  <a:srgbClr val="16302E"/>
+                </a:solidFill>
+                <a:latin typeface="Malgun Gothic" pitchFamily="34" charset="0"/>
+                <a:ea typeface="Malgun Gothic" pitchFamily="34" charset="-122"/>
+                <a:cs typeface="Malgun Gothic" pitchFamily="34" charset="-120"/>
+              </a:rPr>
+              <a:t>2형당뇨 (E11)</a:t>
+            </a:r>
+            <a:endParaRPr lang="en-US" sz="1200" dirty="0"/>
+          </a:p>
+        </p:txBody>
+      </p:sp>
+      <p:sp>
+        <p:nvSpPr>
+          <p:cNvPr id="15" name="Text 13"/>
+          <p:cNvSpPr/>
+          <p:nvPr/>
+        </p:nvSpPr>
+        <p:spPr>
+          <a:xfrm>
+            <a:off x="3703320" y="5230368"/>
+            <a:ext cx="1828800" cy="329184"/>
+          </a:xfrm>
+          <a:prstGeom prst="rect">
+            <a:avLst/>
+          </a:prstGeom>
+          <a:noFill/>
+          <a:ln/>
+        </p:spPr>
+        <p:txBody>
+          <a:bodyPr wrap="square" lIns="0" tIns="0" rIns="0" bIns="0" rtlCol="0" anchor="ctr"/>
+          <a:lstStyle/>
+          <a:p>
+            <a:pPr algn="r" indent="0" marL="0">
+              <a:buNone/>
+            </a:pPr>
+            <a:r>
+              <a:rPr lang="en-US" sz="1200" b="1" dirty="0">
+                <a:solidFill>
+                  <a:srgbClr val="0E7C7B"/>
+                </a:solidFill>
+                <a:latin typeface="Malgun Gothic" pitchFamily="34" charset="0"/>
+                <a:ea typeface="Malgun Gothic" pitchFamily="34" charset="-122"/>
+                <a:cs typeface="Malgun Gothic" pitchFamily="34" charset="-120"/>
+              </a:rPr>
+              <a:t>34,443 명</a:t>
+            </a:r>
+            <a:endParaRPr lang="en-US" sz="1200" dirty="0"/>
+          </a:p>
+        </p:txBody>
+      </p:sp>
+      <p:sp>
+        <p:nvSpPr>
+          <p:cNvPr id="16" name="Text 14"/>
+          <p:cNvSpPr/>
+          <p:nvPr/>
+        </p:nvSpPr>
+        <p:spPr>
+          <a:xfrm>
+            <a:off x="777240" y="5596128"/>
+            <a:ext cx="3108960" cy="329184"/>
+          </a:xfrm>
+          <a:prstGeom prst="rect">
+            <a:avLst/>
+          </a:prstGeom>
+          <a:noFill/>
+          <a:ln/>
+        </p:spPr>
+        <p:txBody>
+          <a:bodyPr wrap="square" lIns="0" tIns="0" rIns="0" bIns="0" rtlCol="0" anchor="ctr"/>
+          <a:lstStyle/>
+          <a:p>
+            <a:pPr indent="0" marL="0">
+              <a:buNone/>
+            </a:pPr>
+            <a:r>
+              <a:rPr lang="en-US" sz="1200" dirty="0">
+                <a:solidFill>
+                  <a:srgbClr val="16302E"/>
+                </a:solidFill>
+                <a:latin typeface="Malgun Gothic" pitchFamily="34" charset="0"/>
+                <a:ea typeface="Malgun Gothic" pitchFamily="34" charset="-122"/>
+                <a:cs typeface="Malgun Gothic" pitchFamily="34" charset="-120"/>
+              </a:rPr>
+              <a:t>지질대사·고지혈 (E78)</a:t>
+            </a:r>
+            <a:endParaRPr lang="en-US" sz="1200" dirty="0"/>
+          </a:p>
+        </p:txBody>
+      </p:sp>
+      <p:sp>
+        <p:nvSpPr>
+          <p:cNvPr id="17" name="Text 15"/>
+          <p:cNvSpPr/>
+          <p:nvPr/>
+        </p:nvSpPr>
+        <p:spPr>
+          <a:xfrm>
+            <a:off x="3703320" y="5596128"/>
+            <a:ext cx="1828800" cy="329184"/>
+          </a:xfrm>
+          <a:prstGeom prst="rect">
+            <a:avLst/>
+          </a:prstGeom>
+          <a:noFill/>
+          <a:ln/>
+        </p:spPr>
+        <p:txBody>
+          <a:bodyPr wrap="square" lIns="0" tIns="0" rIns="0" bIns="0" rtlCol="0" anchor="ctr"/>
+          <a:lstStyle/>
+          <a:p>
+            <a:pPr algn="r" indent="0" marL="0">
+              <a:buNone/>
+            </a:pPr>
+            <a:r>
+              <a:rPr lang="en-US" sz="1200" b="1" dirty="0">
+                <a:solidFill>
+                  <a:srgbClr val="0E7C7B"/>
+                </a:solidFill>
+                <a:latin typeface="Malgun Gothic" pitchFamily="34" charset="0"/>
+                <a:ea typeface="Malgun Gothic" pitchFamily="34" charset="-122"/>
+                <a:cs typeface="Malgun Gothic" pitchFamily="34" charset="-120"/>
+              </a:rPr>
+              <a:t>32,723 명</a:t>
+            </a:r>
+            <a:endParaRPr lang="en-US" sz="1200" dirty="0"/>
+          </a:p>
+        </p:txBody>
+      </p:sp>
+      <p:sp>
+        <p:nvSpPr>
+          <p:cNvPr id="18" name="Shape 16"/>
+          <p:cNvSpPr/>
+          <p:nvPr/>
+        </p:nvSpPr>
+        <p:spPr>
+          <a:xfrm>
+            <a:off x="5852160" y="1737360"/>
+            <a:ext cx="5760720" cy="4251960"/>
+          </a:xfrm>
+          <a:prstGeom prst="roundRect">
+            <a:avLst>
+              <a:gd name="adj" fmla="val 2151"/>
             </a:avLst>
           </a:prstGeom>
           <a:solidFill>
@@ -6722,99 +8437,170 @@
       </p:sp>
       <p:sp>
         <p:nvSpPr>
-          <p:cNvPr id="6" name="Shape 4"/>
-          <p:cNvSpPr/>
-          <p:nvPr/>
-        </p:nvSpPr>
-        <p:spPr>
-          <a:xfrm>
-            <a:off x="548640" y="1691640"/>
-            <a:ext cx="5349240" cy="566928"/>
-          </a:xfrm>
-          <a:prstGeom prst="roundRect">
-            <a:avLst>
-              <a:gd name="adj" fmla="val 16129"/>
-            </a:avLst>
-          </a:prstGeom>
-          <a:solidFill>
-            <a:srgbClr val="0E7C7B"/>
-          </a:solidFill>
-          <a:ln/>
-        </p:spPr>
-      </p:sp>
-      <p:sp>
-        <p:nvSpPr>
-          <p:cNvPr id="7" name="Text 5"/>
-          <p:cNvSpPr/>
-          <p:nvPr/>
-        </p:nvSpPr>
-        <p:spPr>
-          <a:xfrm>
-            <a:off x="777240" y="1691640"/>
-            <a:ext cx="4937760" cy="566928"/>
-          </a:xfrm>
-          <a:prstGeom prst="rect">
-            <a:avLst/>
-          </a:prstGeom>
-          <a:noFill/>
-          <a:ln/>
-        </p:spPr>
-        <p:txBody>
-          <a:bodyPr wrap="square" lIns="0" tIns="0" rIns="0" bIns="0" rtlCol="0" anchor="ctr"/>
-          <a:lstStyle/>
-          <a:p>
-            <a:pPr indent="0" marL="0">
+          <p:cNvPr id="19" name="Text 17"/>
+          <p:cNvSpPr/>
+          <p:nvPr/>
+        </p:nvSpPr>
+        <p:spPr>
+          <a:xfrm>
+            <a:off x="6080760" y="1920240"/>
+            <a:ext cx="5303520" cy="365760"/>
+          </a:xfrm>
+          <a:prstGeom prst="rect">
+            <a:avLst/>
+          </a:prstGeom>
+          <a:noFill/>
+          <a:ln/>
+        </p:spPr>
+        <p:txBody>
+          <a:bodyPr wrap="square" rtlCol="0" anchor="ctr"/>
+          <a:lstStyle/>
+          <a:p>
+            <a:pPr indent="0" marL="0">
+              <a:buNone/>
+            </a:pPr>
+            <a:r>
+              <a:rPr lang="en-US" sz="1600" b="1" dirty="0">
+                <a:solidFill>
+                  <a:srgbClr val="0E7C7B"/>
+                </a:solidFill>
+                <a:latin typeface="Malgun Gothic" pitchFamily="34" charset="0"/>
+                <a:ea typeface="Malgun Gothic" pitchFamily="34" charset="-122"/>
+                <a:cs typeface="Malgun Gothic" pitchFamily="34" charset="-120"/>
+              </a:rPr>
+              <a:t>무엇을 뜻하나 — 갭 = 기회</a:t>
+            </a:r>
+            <a:endParaRPr lang="en-US" sz="1600" dirty="0"/>
+          </a:p>
+        </p:txBody>
+      </p:sp>
+      <p:sp>
+        <p:nvSpPr>
+          <p:cNvPr id="20" name="Text 18"/>
+          <p:cNvSpPr/>
+          <p:nvPr/>
+        </p:nvSpPr>
+        <p:spPr>
+          <a:xfrm>
+            <a:off x="6080760" y="2331720"/>
+            <a:ext cx="5303520" cy="3246120"/>
+          </a:xfrm>
+          <a:prstGeom prst="rect">
+            <a:avLst/>
+          </a:prstGeom>
+          <a:noFill/>
+          <a:ln/>
+        </p:spPr>
+        <p:txBody>
+          <a:bodyPr wrap="square" rtlCol="0" anchor="t"/>
+          <a:lstStyle/>
+          <a:p>
+            <a:pPr indent="0" marL="0">
+              <a:lnSpc>
+                <a:spcPct val="112000"/>
+              </a:lnSpc>
               <a:buNone/>
             </a:pPr>
             <a:r>
               <a:rPr lang="en-US" sz="1400" b="1" dirty="0">
                 <a:solidFill>
-                  <a:srgbClr val="FFFFFF"/>
-                </a:solidFill>
-                <a:latin typeface="Malgun Gothic" pitchFamily="34" charset="0"/>
-                <a:ea typeface="Malgun Gothic" pitchFamily="34" charset="-122"/>
-                <a:cs typeface="Malgun Gothic" pitchFamily="34" charset="-120"/>
-              </a:rPr>
-              <a:t>한방 다이어트 (강세)</a:t>
-            </a:r>
-            <a:endParaRPr lang="en-US" sz="1400" dirty="0"/>
-          </a:p>
-        </p:txBody>
-      </p:sp>
-      <p:sp>
-        <p:nvSpPr>
-          <p:cNvPr id="8" name="Text 6"/>
-          <p:cNvSpPr/>
-          <p:nvPr/>
-        </p:nvSpPr>
-        <p:spPr>
-          <a:xfrm>
-            <a:off x="777240" y="2450592"/>
-            <a:ext cx="3200400" cy="411480"/>
-          </a:xfrm>
-          <a:prstGeom prst="rect">
-            <a:avLst/>
-          </a:prstGeom>
-          <a:noFill/>
-          <a:ln/>
-        </p:spPr>
-        <p:txBody>
-          <a:bodyPr wrap="square" lIns="0" tIns="0" rIns="0" bIns="0" rtlCol="0" anchor="ctr"/>
-          <a:lstStyle/>
-          <a:p>
-            <a:pPr indent="0" marL="0">
-              <a:buNone/>
-            </a:pPr>
-            <a:r>
-              <a:rPr lang="en-US" sz="1250" b="1" dirty="0">
-                <a:solidFill>
                   <a:srgbClr val="16302E"/>
                 </a:solidFill>
                 <a:latin typeface="Malgun Gothic" pitchFamily="34" charset="0"/>
                 <a:ea typeface="Malgun Gothic" pitchFamily="34" charset="-122"/>
                 <a:cs typeface="Malgun Gothic" pitchFamily="34" charset="-120"/>
               </a:rPr>
-              <a:t>더편한한의원</a:t>
+              <a:t>검색 수요 ↔ 의료 전환의 갭
+</a:t>
+            </a:r>
+            <a:pPr indent="0" marL="0">
+              <a:lnSpc>
+                <a:spcPct val="112000"/>
+              </a:lnSpc>
+              <a:buNone/>
+            </a:pPr>
+            <a:r>
+              <a:rPr lang="en-US" sz="1250" dirty="0">
+                <a:solidFill>
+                  <a:srgbClr val="5B6B6A"/>
+                </a:solidFill>
+                <a:latin typeface="Malgun Gothic" pitchFamily="34" charset="0"/>
+                <a:ea typeface="Malgun Gothic" pitchFamily="34" charset="-122"/>
+                <a:cs typeface="Malgun Gothic" pitchFamily="34" charset="-120"/>
+              </a:rPr>
+              <a:t>위고비·삭센다 검색은 폭증하는데 비만 직접 진료는 174명뿐. 미개척 의료화 시장을 선점할 여지.
+</a:t>
+            </a:r>
+            <a:pPr indent="0" marL="0">
+              <a:lnSpc>
+                <a:spcPct val="112000"/>
+              </a:lnSpc>
+              <a:buNone/>
+            </a:pPr>
+            <a:r>
+              <a:rPr lang="en-US" sz="1400" b="1" dirty="0">
+                <a:solidFill>
+                  <a:srgbClr val="16302E"/>
+                </a:solidFill>
+                <a:latin typeface="Malgun Gothic" pitchFamily="34" charset="0"/>
+                <a:ea typeface="Malgun Gothic" pitchFamily="34" charset="-122"/>
+                <a:cs typeface="Malgun Gothic" pitchFamily="34" charset="-120"/>
+              </a:rPr>
+              <a:t>거대 대사질환 배후
+</a:t>
+            </a:r>
+            <a:pPr indent="0" marL="0">
+              <a:lnSpc>
+                <a:spcPct val="112000"/>
+              </a:lnSpc>
+              <a:buNone/>
+            </a:pPr>
+            <a:r>
+              <a:rPr lang="en-US" sz="1250" dirty="0">
+                <a:solidFill>
+                  <a:srgbClr val="5B6B6A"/>
+                </a:solidFill>
+                <a:latin typeface="Malgun Gothic" pitchFamily="34" charset="0"/>
+                <a:ea typeface="Malgun Gothic" pitchFamily="34" charset="-122"/>
+                <a:cs typeface="Malgun Gothic" pitchFamily="34" charset="-120"/>
+              </a:rPr>
+              <a:t>고혈압·당뇨·고지혈 13만+ = 체중감량으로 대사개선이 필요한 모수. 남성 40~50대 대사 세그먼트의 실측 근거.
+</a:t>
+            </a:r>
+            <a:pPr indent="0" marL="0">
+              <a:lnSpc>
+                <a:spcPct val="112000"/>
+              </a:lnSpc>
+              <a:buNone/>
+            </a:pPr>
+            <a:r>
+              <a:rPr lang="en-US" sz="1400" b="1" dirty="0">
+                <a:solidFill>
+                  <a:srgbClr val="16302E"/>
+                </a:solidFill>
+                <a:latin typeface="Malgun Gothic" pitchFamily="34" charset="0"/>
+                <a:ea typeface="Malgun Gothic" pitchFamily="34" charset="-122"/>
+                <a:cs typeface="Malgun Gothic" pitchFamily="34" charset="-120"/>
+              </a:rPr>
+              <a:t>연령 분포
+</a:t>
+            </a:r>
+            <a:pPr indent="0" marL="0">
+              <a:lnSpc>
+                <a:spcPct val="112000"/>
+              </a:lnSpc>
+              <a:buNone/>
+            </a:pPr>
+            <a:r>
+              <a:rPr lang="en-US" sz="1250" dirty="0">
+                <a:solidFill>
+                  <a:srgbClr val="5B6B6A"/>
+                </a:solidFill>
+                <a:latin typeface="Malgun Gothic" pitchFamily="34" charset="0"/>
+                <a:ea typeface="Malgun Gothic" pitchFamily="34" charset="-122"/>
+                <a:cs typeface="Malgun Gothic" pitchFamily="34" charset="-120"/>
+              </a:rPr>
+              <a:t>비만 진료는 30~34세 정점, 20~59세 고루 분포 — 미용 목적 연령대와 일치.</a:t>
             </a:r>
             <a:endParaRPr lang="en-US" sz="1250" dirty="0"/>
           </a:p>
@@ -6822,30 +8608,30 @@
       </p:sp>
       <p:sp>
         <p:nvSpPr>
-          <p:cNvPr id="9" name="Text 7"/>
-          <p:cNvSpPr/>
-          <p:nvPr/>
-        </p:nvSpPr>
-        <p:spPr>
-          <a:xfrm>
-            <a:off x="3931920" y="2450592"/>
-            <a:ext cx="1783080" cy="411480"/>
-          </a:xfrm>
-          <a:prstGeom prst="rect">
-            <a:avLst/>
-          </a:prstGeom>
-          <a:noFill/>
-          <a:ln/>
-        </p:spPr>
-        <p:txBody>
-          <a:bodyPr wrap="square" lIns="0" tIns="0" rIns="0" bIns="0" rtlCol="0" anchor="ctr"/>
-          <a:lstStyle/>
-          <a:p>
-            <a:pPr algn="r" indent="0" marL="0">
-              <a:buNone/>
-            </a:pPr>
-            <a:r>
-              <a:rPr lang="en-US" sz="1100" dirty="0">
+          <p:cNvPr id="21" name="Text 19"/>
+          <p:cNvSpPr/>
+          <p:nvPr/>
+        </p:nvSpPr>
+        <p:spPr>
+          <a:xfrm>
+            <a:off x="6080760" y="5623560"/>
+            <a:ext cx="5349240" cy="274320"/>
+          </a:xfrm>
+          <a:prstGeom prst="rect">
+            <a:avLst/>
+          </a:prstGeom>
+          <a:noFill/>
+          <a:ln/>
+        </p:spPr>
+        <p:txBody>
+          <a:bodyPr wrap="square" rtlCol="0" anchor="ctr"/>
+          <a:lstStyle/>
+          <a:p>
+            <a:pPr indent="0" marL="0">
+              <a:buNone/>
+            </a:pPr>
+            <a:r>
+              <a:rPr lang="en-US" sz="850" i="1" dirty="0">
                 <a:solidFill>
                   <a:srgbClr val="5B6B6A"/>
                 </a:solidFill>
@@ -6853,886 +8639,15 @@
                 <a:ea typeface="Malgun Gothic" pitchFamily="34" charset="-122"/>
                 <a:cs typeface="Malgun Gothic" pitchFamily="34" charset="-120"/>
               </a:rPr>
-              <a:t>용산동</a:t>
-            </a:r>
-            <a:endParaRPr lang="en-US" sz="1100" dirty="0"/>
-          </a:p>
-        </p:txBody>
-      </p:sp>
-      <p:sp>
-        <p:nvSpPr>
-          <p:cNvPr id="10" name="Text 8"/>
-          <p:cNvSpPr/>
-          <p:nvPr/>
-        </p:nvSpPr>
-        <p:spPr>
-          <a:xfrm>
-            <a:off x="777240" y="2935224"/>
-            <a:ext cx="3200400" cy="411480"/>
-          </a:xfrm>
-          <a:prstGeom prst="rect">
-            <a:avLst/>
-          </a:prstGeom>
-          <a:noFill/>
-          <a:ln/>
-        </p:spPr>
-        <p:txBody>
-          <a:bodyPr wrap="square" lIns="0" tIns="0" rIns="0" bIns="0" rtlCol="0" anchor="ctr"/>
-          <a:lstStyle/>
-          <a:p>
-            <a:pPr indent="0" marL="0">
-              <a:buNone/>
-            </a:pPr>
-            <a:r>
-              <a:rPr lang="en-US" sz="1250" b="1" dirty="0">
-                <a:solidFill>
-                  <a:srgbClr val="16302E"/>
-                </a:solidFill>
-                <a:latin typeface="Malgun Gothic" pitchFamily="34" charset="0"/>
-                <a:ea typeface="Malgun Gothic" pitchFamily="34" charset="-122"/>
-                <a:cs typeface="Malgun Gothic" pitchFamily="34" charset="-120"/>
-              </a:rPr>
-              <a:t>손모아한의원</a:t>
-            </a:r>
-            <a:endParaRPr lang="en-US" sz="1250" dirty="0"/>
-          </a:p>
-        </p:txBody>
-      </p:sp>
-      <p:sp>
-        <p:nvSpPr>
-          <p:cNvPr id="11" name="Text 9"/>
-          <p:cNvSpPr/>
-          <p:nvPr/>
-        </p:nvSpPr>
-        <p:spPr>
-          <a:xfrm>
-            <a:off x="3931920" y="2935224"/>
-            <a:ext cx="1783080" cy="411480"/>
-          </a:xfrm>
-          <a:prstGeom prst="rect">
-            <a:avLst/>
-          </a:prstGeom>
-          <a:noFill/>
-          <a:ln/>
-        </p:spPr>
-        <p:txBody>
-          <a:bodyPr wrap="square" lIns="0" tIns="0" rIns="0" bIns="0" rtlCol="0" anchor="ctr"/>
-          <a:lstStyle/>
-          <a:p>
-            <a:pPr algn="r" indent="0" marL="0">
-              <a:buNone/>
-            </a:pPr>
-            <a:r>
-              <a:rPr lang="en-US" sz="1100" dirty="0">
-                <a:solidFill>
-                  <a:srgbClr val="5B6B6A"/>
-                </a:solidFill>
-                <a:latin typeface="Malgun Gothic" pitchFamily="34" charset="0"/>
-                <a:ea typeface="Malgun Gothic" pitchFamily="34" charset="-122"/>
-                <a:cs typeface="Malgun Gothic" pitchFamily="34" charset="-120"/>
-              </a:rPr>
-              <a:t>진천동</a:t>
-            </a:r>
-            <a:endParaRPr lang="en-US" sz="1100" dirty="0"/>
-          </a:p>
-        </p:txBody>
-      </p:sp>
-      <p:sp>
-        <p:nvSpPr>
-          <p:cNvPr id="12" name="Text 10"/>
-          <p:cNvSpPr/>
-          <p:nvPr/>
-        </p:nvSpPr>
-        <p:spPr>
-          <a:xfrm>
-            <a:off x="777240" y="3419856"/>
-            <a:ext cx="3200400" cy="411480"/>
-          </a:xfrm>
-          <a:prstGeom prst="rect">
-            <a:avLst/>
-          </a:prstGeom>
-          <a:noFill/>
-          <a:ln/>
-        </p:spPr>
-        <p:txBody>
-          <a:bodyPr wrap="square" lIns="0" tIns="0" rIns="0" bIns="0" rtlCol="0" anchor="ctr"/>
-          <a:lstStyle/>
-          <a:p>
-            <a:pPr indent="0" marL="0">
-              <a:buNone/>
-            </a:pPr>
-            <a:r>
-              <a:rPr lang="en-US" sz="1250" b="1" dirty="0">
-                <a:solidFill>
-                  <a:srgbClr val="16302E"/>
-                </a:solidFill>
-                <a:latin typeface="Malgun Gothic" pitchFamily="34" charset="0"/>
-                <a:ea typeface="Malgun Gothic" pitchFamily="34" charset="-122"/>
-                <a:cs typeface="Malgun Gothic" pitchFamily="34" charset="-120"/>
-              </a:rPr>
-              <a:t>미올한의원</a:t>
-            </a:r>
-            <a:endParaRPr lang="en-US" sz="1250" dirty="0"/>
-          </a:p>
-        </p:txBody>
-      </p:sp>
-      <p:sp>
-        <p:nvSpPr>
-          <p:cNvPr id="13" name="Text 11"/>
-          <p:cNvSpPr/>
-          <p:nvPr/>
-        </p:nvSpPr>
-        <p:spPr>
-          <a:xfrm>
-            <a:off x="3931920" y="3419856"/>
-            <a:ext cx="1783080" cy="411480"/>
-          </a:xfrm>
-          <a:prstGeom prst="rect">
-            <a:avLst/>
-          </a:prstGeom>
-          <a:noFill/>
-          <a:ln/>
-        </p:spPr>
-        <p:txBody>
-          <a:bodyPr wrap="square" lIns="0" tIns="0" rIns="0" bIns="0" rtlCol="0" anchor="ctr"/>
-          <a:lstStyle/>
-          <a:p>
-            <a:pPr algn="r" indent="0" marL="0">
-              <a:buNone/>
-            </a:pPr>
-            <a:r>
-              <a:rPr lang="en-US" sz="1100" dirty="0">
-                <a:solidFill>
-                  <a:srgbClr val="5B6B6A"/>
-                </a:solidFill>
-                <a:latin typeface="Malgun Gothic" pitchFamily="34" charset="0"/>
-                <a:ea typeface="Malgun Gothic" pitchFamily="34" charset="-122"/>
-                <a:cs typeface="Malgun Gothic" pitchFamily="34" charset="-120"/>
-              </a:rPr>
-              <a:t>상인동</a:t>
-            </a:r>
-            <a:endParaRPr lang="en-US" sz="1100" dirty="0"/>
-          </a:p>
-        </p:txBody>
-      </p:sp>
-      <p:sp>
-        <p:nvSpPr>
-          <p:cNvPr id="14" name="Text 12"/>
-          <p:cNvSpPr/>
-          <p:nvPr/>
-        </p:nvSpPr>
-        <p:spPr>
-          <a:xfrm>
-            <a:off x="777240" y="3904488"/>
-            <a:ext cx="3200400" cy="411480"/>
-          </a:xfrm>
-          <a:prstGeom prst="rect">
-            <a:avLst/>
-          </a:prstGeom>
-          <a:noFill/>
-          <a:ln/>
-        </p:spPr>
-        <p:txBody>
-          <a:bodyPr wrap="square" lIns="0" tIns="0" rIns="0" bIns="0" rtlCol="0" anchor="ctr"/>
-          <a:lstStyle/>
-          <a:p>
-            <a:pPr indent="0" marL="0">
-              <a:buNone/>
-            </a:pPr>
-            <a:r>
-              <a:rPr lang="en-US" sz="1250" b="1" dirty="0">
-                <a:solidFill>
-                  <a:srgbClr val="16302E"/>
-                </a:solidFill>
-                <a:latin typeface="Malgun Gothic" pitchFamily="34" charset="0"/>
-                <a:ea typeface="Malgun Gothic" pitchFamily="34" charset="-122"/>
-                <a:cs typeface="Malgun Gothic" pitchFamily="34" charset="-120"/>
-              </a:rPr>
-              <a:t>창한방병원</a:t>
-            </a:r>
-            <a:endParaRPr lang="en-US" sz="1250" dirty="0"/>
-          </a:p>
-        </p:txBody>
-      </p:sp>
-      <p:sp>
-        <p:nvSpPr>
-          <p:cNvPr id="15" name="Text 13"/>
-          <p:cNvSpPr/>
-          <p:nvPr/>
-        </p:nvSpPr>
-        <p:spPr>
-          <a:xfrm>
-            <a:off x="3931920" y="3904488"/>
-            <a:ext cx="1783080" cy="411480"/>
-          </a:xfrm>
-          <a:prstGeom prst="rect">
-            <a:avLst/>
-          </a:prstGeom>
-          <a:noFill/>
-          <a:ln/>
-        </p:spPr>
-        <p:txBody>
-          <a:bodyPr wrap="square" lIns="0" tIns="0" rIns="0" bIns="0" rtlCol="0" anchor="ctr"/>
-          <a:lstStyle/>
-          <a:p>
-            <a:pPr algn="r" indent="0" marL="0">
-              <a:buNone/>
-            </a:pPr>
-            <a:r>
-              <a:rPr lang="en-US" sz="1100" dirty="0">
-                <a:solidFill>
-                  <a:srgbClr val="5B6B6A"/>
-                </a:solidFill>
-                <a:latin typeface="Malgun Gothic" pitchFamily="34" charset="0"/>
-                <a:ea typeface="Malgun Gothic" pitchFamily="34" charset="-122"/>
-                <a:cs typeface="Malgun Gothic" pitchFamily="34" charset="-120"/>
-              </a:rPr>
-              <a:t>감삼동</a:t>
-            </a:r>
-            <a:endParaRPr lang="en-US" sz="1100" dirty="0"/>
-          </a:p>
-        </p:txBody>
-      </p:sp>
-      <p:sp>
-        <p:nvSpPr>
-          <p:cNvPr id="16" name="Text 14"/>
-          <p:cNvSpPr/>
-          <p:nvPr/>
-        </p:nvSpPr>
-        <p:spPr>
-          <a:xfrm>
-            <a:off x="777240" y="4389120"/>
-            <a:ext cx="3200400" cy="411480"/>
-          </a:xfrm>
-          <a:prstGeom prst="rect">
-            <a:avLst/>
-          </a:prstGeom>
-          <a:noFill/>
-          <a:ln/>
-        </p:spPr>
-        <p:txBody>
-          <a:bodyPr wrap="square" lIns="0" tIns="0" rIns="0" bIns="0" rtlCol="0" anchor="ctr"/>
-          <a:lstStyle/>
-          <a:p>
-            <a:pPr indent="0" marL="0">
-              <a:buNone/>
-            </a:pPr>
-            <a:r>
-              <a:rPr lang="en-US" sz="1250" b="1" dirty="0">
-                <a:solidFill>
-                  <a:srgbClr val="16302E"/>
-                </a:solidFill>
-                <a:latin typeface="Malgun Gothic" pitchFamily="34" charset="0"/>
-                <a:ea typeface="Malgun Gothic" pitchFamily="34" charset="-122"/>
-                <a:cs typeface="Malgun Gothic" pitchFamily="34" charset="-120"/>
-              </a:rPr>
-              <a:t>잘보는한의원</a:t>
-            </a:r>
-            <a:endParaRPr lang="en-US" sz="1250" dirty="0"/>
-          </a:p>
-        </p:txBody>
-      </p:sp>
-      <p:sp>
-        <p:nvSpPr>
-          <p:cNvPr id="17" name="Text 15"/>
-          <p:cNvSpPr/>
-          <p:nvPr/>
-        </p:nvSpPr>
-        <p:spPr>
-          <a:xfrm>
-            <a:off x="3931920" y="4389120"/>
-            <a:ext cx="1783080" cy="411480"/>
-          </a:xfrm>
-          <a:prstGeom prst="rect">
-            <a:avLst/>
-          </a:prstGeom>
-          <a:noFill/>
-          <a:ln/>
-        </p:spPr>
-        <p:txBody>
-          <a:bodyPr wrap="square" lIns="0" tIns="0" rIns="0" bIns="0" rtlCol="0" anchor="ctr"/>
-          <a:lstStyle/>
-          <a:p>
-            <a:pPr algn="r" indent="0" marL="0">
-              <a:buNone/>
-            </a:pPr>
-            <a:r>
-              <a:rPr lang="en-US" sz="1100" dirty="0">
-                <a:solidFill>
-                  <a:srgbClr val="5B6B6A"/>
-                </a:solidFill>
-                <a:latin typeface="Malgun Gothic" pitchFamily="34" charset="0"/>
-                <a:ea typeface="Malgun Gothic" pitchFamily="34" charset="-122"/>
-                <a:cs typeface="Malgun Gothic" pitchFamily="34" charset="-120"/>
-              </a:rPr>
-              <a:t>진천동</a:t>
-            </a:r>
-            <a:endParaRPr lang="en-US" sz="1100" dirty="0"/>
-          </a:p>
-        </p:txBody>
-      </p:sp>
-      <p:sp>
-        <p:nvSpPr>
-          <p:cNvPr id="18" name="Shape 16"/>
-          <p:cNvSpPr/>
-          <p:nvPr/>
-        </p:nvSpPr>
-        <p:spPr>
-          <a:xfrm>
-            <a:off x="6263640" y="1691640"/>
-            <a:ext cx="5349240" cy="3200400"/>
-          </a:xfrm>
-          <a:prstGeom prst="roundRect">
-            <a:avLst>
-              <a:gd name="adj" fmla="val 2857"/>
-            </a:avLst>
-          </a:prstGeom>
-          <a:solidFill>
-            <a:srgbClr val="FFFFFF"/>
-          </a:solidFill>
-          <a:ln w="12700">
-            <a:solidFill>
-              <a:srgbClr val="D9E5E3"/>
-            </a:solidFill>
-            <a:prstDash val="solid"/>
-          </a:ln>
-        </p:spPr>
-      </p:sp>
-      <p:sp>
-        <p:nvSpPr>
-          <p:cNvPr id="19" name="Shape 17"/>
-          <p:cNvSpPr/>
-          <p:nvPr/>
-        </p:nvSpPr>
-        <p:spPr>
-          <a:xfrm>
-            <a:off x="6263640" y="1691640"/>
-            <a:ext cx="5349240" cy="566928"/>
-          </a:xfrm>
-          <a:prstGeom prst="roundRect">
-            <a:avLst>
-              <a:gd name="adj" fmla="val 16129"/>
-            </a:avLst>
-          </a:prstGeom>
-          <a:solidFill>
-            <a:srgbClr val="FF6B5B"/>
-          </a:solidFill>
-          <a:ln/>
-        </p:spPr>
-      </p:sp>
-      <p:sp>
-        <p:nvSpPr>
-          <p:cNvPr id="20" name="Text 18"/>
-          <p:cNvSpPr/>
-          <p:nvPr/>
-        </p:nvSpPr>
-        <p:spPr>
-          <a:xfrm>
-            <a:off x="6492240" y="1691640"/>
-            <a:ext cx="4937760" cy="566928"/>
-          </a:xfrm>
-          <a:prstGeom prst="rect">
-            <a:avLst/>
-          </a:prstGeom>
-          <a:noFill/>
-          <a:ln/>
-        </p:spPr>
-        <p:txBody>
-          <a:bodyPr wrap="square" lIns="0" tIns="0" rIns="0" bIns="0" rtlCol="0" anchor="ctr"/>
-          <a:lstStyle/>
-          <a:p>
-            <a:pPr indent="0" marL="0">
-              <a:buNone/>
-            </a:pPr>
-            <a:r>
-              <a:rPr lang="en-US" sz="1400" b="1" dirty="0">
-                <a:solidFill>
-                  <a:srgbClr val="FFFFFF"/>
-                </a:solidFill>
-                <a:latin typeface="Malgun Gothic" pitchFamily="34" charset="0"/>
-                <a:ea typeface="Malgun Gothic" pitchFamily="34" charset="-122"/>
-                <a:cs typeface="Malgun Gothic" pitchFamily="34" charset="-120"/>
-              </a:rPr>
-              <a:t>양방 의원 (상대적으로 얇음)</a:t>
-            </a:r>
-            <a:endParaRPr lang="en-US" sz="1400" dirty="0"/>
-          </a:p>
-        </p:txBody>
-      </p:sp>
-      <p:sp>
-        <p:nvSpPr>
-          <p:cNvPr id="21" name="Text 19"/>
-          <p:cNvSpPr/>
-          <p:nvPr/>
-        </p:nvSpPr>
-        <p:spPr>
-          <a:xfrm>
-            <a:off x="6492240" y="2450592"/>
-            <a:ext cx="3200400" cy="411480"/>
-          </a:xfrm>
-          <a:prstGeom prst="rect">
-            <a:avLst/>
-          </a:prstGeom>
-          <a:noFill/>
-          <a:ln/>
-        </p:spPr>
-        <p:txBody>
-          <a:bodyPr wrap="square" lIns="0" tIns="0" rIns="0" bIns="0" rtlCol="0" anchor="ctr"/>
-          <a:lstStyle/>
-          <a:p>
-            <a:pPr indent="0" marL="0">
-              <a:buNone/>
-            </a:pPr>
-            <a:r>
-              <a:rPr lang="en-US" sz="1250" b="1" dirty="0">
-                <a:solidFill>
-                  <a:srgbClr val="16302E"/>
-                </a:solidFill>
-                <a:latin typeface="Malgun Gothic" pitchFamily="34" charset="0"/>
-                <a:ea typeface="Malgun Gothic" pitchFamily="34" charset="-122"/>
-                <a:cs typeface="Malgun Gothic" pitchFamily="34" charset="-120"/>
-              </a:rPr>
-              <a:t>대곡연세의원·가정의학과</a:t>
-            </a:r>
-            <a:endParaRPr lang="en-US" sz="1250" dirty="0"/>
+              <a:t>* 주상병 기준 진료인원(코드 중복 가능) · 소수 셀 마스킹 → 174명은 하한 · 2022년 · 출처 심평원</a:t>
+            </a:r>
+            <a:endParaRPr lang="en-US" sz="850" dirty="0"/>
           </a:p>
         </p:txBody>
       </p:sp>
       <p:sp>
         <p:nvSpPr>
           <p:cNvPr id="22" name="Text 20"/>
-          <p:cNvSpPr/>
-          <p:nvPr/>
-        </p:nvSpPr>
-        <p:spPr>
-          <a:xfrm>
-            <a:off x="9646920" y="2450592"/>
-            <a:ext cx="1783080" cy="411480"/>
-          </a:xfrm>
-          <a:prstGeom prst="rect">
-            <a:avLst/>
-          </a:prstGeom>
-          <a:noFill/>
-          <a:ln/>
-        </p:spPr>
-        <p:txBody>
-          <a:bodyPr wrap="square" lIns="0" tIns="0" rIns="0" bIns="0" rtlCol="0" anchor="ctr"/>
-          <a:lstStyle/>
-          <a:p>
-            <a:pPr algn="r" indent="0" marL="0">
-              <a:buNone/>
-            </a:pPr>
-            <a:r>
-              <a:rPr lang="en-US" sz="1100" dirty="0">
-                <a:solidFill>
-                  <a:srgbClr val="5B6B6A"/>
-                </a:solidFill>
-                <a:latin typeface="Malgun Gothic" pitchFamily="34" charset="0"/>
-                <a:ea typeface="Malgun Gothic" pitchFamily="34" charset="-122"/>
-                <a:cs typeface="Malgun Gothic" pitchFamily="34" charset="-120"/>
-              </a:rPr>
-              <a:t>두류동</a:t>
-            </a:r>
-            <a:endParaRPr lang="en-US" sz="1100" dirty="0"/>
-          </a:p>
-        </p:txBody>
-      </p:sp>
-      <p:sp>
-        <p:nvSpPr>
-          <p:cNvPr id="23" name="Text 21"/>
-          <p:cNvSpPr/>
-          <p:nvPr/>
-        </p:nvSpPr>
-        <p:spPr>
-          <a:xfrm>
-            <a:off x="6492240" y="2935224"/>
-            <a:ext cx="3200400" cy="411480"/>
-          </a:xfrm>
-          <a:prstGeom prst="rect">
-            <a:avLst/>
-          </a:prstGeom>
-          <a:noFill/>
-          <a:ln/>
-        </p:spPr>
-        <p:txBody>
-          <a:bodyPr wrap="square" lIns="0" tIns="0" rIns="0" bIns="0" rtlCol="0" anchor="ctr"/>
-          <a:lstStyle/>
-          <a:p>
-            <a:pPr indent="0" marL="0">
-              <a:buNone/>
-            </a:pPr>
-            <a:r>
-              <a:rPr lang="en-US" sz="1250" b="1" dirty="0">
-                <a:solidFill>
-                  <a:srgbClr val="16302E"/>
-                </a:solidFill>
-                <a:latin typeface="Malgun Gothic" pitchFamily="34" charset="0"/>
-                <a:ea typeface="Malgun Gothic" pitchFamily="34" charset="-122"/>
-                <a:cs typeface="Malgun Gothic" pitchFamily="34" charset="-120"/>
-              </a:rPr>
-              <a:t>웰리브의원</a:t>
-            </a:r>
-            <a:endParaRPr lang="en-US" sz="1250" dirty="0"/>
-          </a:p>
-        </p:txBody>
-      </p:sp>
-      <p:sp>
-        <p:nvSpPr>
-          <p:cNvPr id="24" name="Text 22"/>
-          <p:cNvSpPr/>
-          <p:nvPr/>
-        </p:nvSpPr>
-        <p:spPr>
-          <a:xfrm>
-            <a:off x="9646920" y="2935224"/>
-            <a:ext cx="1783080" cy="411480"/>
-          </a:xfrm>
-          <a:prstGeom prst="rect">
-            <a:avLst/>
-          </a:prstGeom>
-          <a:noFill/>
-          <a:ln/>
-        </p:spPr>
-        <p:txBody>
-          <a:bodyPr wrap="square" lIns="0" tIns="0" rIns="0" bIns="0" rtlCol="0" anchor="ctr"/>
-          <a:lstStyle/>
-          <a:p>
-            <a:pPr algn="r" indent="0" marL="0">
-              <a:buNone/>
-            </a:pPr>
-            <a:r>
-              <a:rPr lang="en-US" sz="1100" dirty="0">
-                <a:solidFill>
-                  <a:srgbClr val="5B6B6A"/>
-                </a:solidFill>
-                <a:latin typeface="Malgun Gothic" pitchFamily="34" charset="0"/>
-                <a:ea typeface="Malgun Gothic" pitchFamily="34" charset="-122"/>
-                <a:cs typeface="Malgun Gothic" pitchFamily="34" charset="-120"/>
-              </a:rPr>
-              <a:t>대곡동</a:t>
-            </a:r>
-            <a:endParaRPr lang="en-US" sz="1100" dirty="0"/>
-          </a:p>
-        </p:txBody>
-      </p:sp>
-      <p:sp>
-        <p:nvSpPr>
-          <p:cNvPr id="25" name="Text 23"/>
-          <p:cNvSpPr/>
-          <p:nvPr/>
-        </p:nvSpPr>
-        <p:spPr>
-          <a:xfrm>
-            <a:off x="6492240" y="3419856"/>
-            <a:ext cx="3200400" cy="411480"/>
-          </a:xfrm>
-          <a:prstGeom prst="rect">
-            <a:avLst/>
-          </a:prstGeom>
-          <a:noFill/>
-          <a:ln/>
-        </p:spPr>
-        <p:txBody>
-          <a:bodyPr wrap="square" lIns="0" tIns="0" rIns="0" bIns="0" rtlCol="0" anchor="ctr"/>
-          <a:lstStyle/>
-          <a:p>
-            <a:pPr indent="0" marL="0">
-              <a:buNone/>
-            </a:pPr>
-            <a:r>
-              <a:rPr lang="en-US" sz="1250" b="1" dirty="0">
-                <a:solidFill>
-                  <a:srgbClr val="16302E"/>
-                </a:solidFill>
-                <a:latin typeface="Malgun Gothic" pitchFamily="34" charset="0"/>
-                <a:ea typeface="Malgun Gothic" pitchFamily="34" charset="-122"/>
-                <a:cs typeface="Malgun Gothic" pitchFamily="34" charset="-120"/>
-              </a:rPr>
-              <a:t>아트너의원</a:t>
-            </a:r>
-            <a:endParaRPr lang="en-US" sz="1250" dirty="0"/>
-          </a:p>
-        </p:txBody>
-      </p:sp>
-      <p:sp>
-        <p:nvSpPr>
-          <p:cNvPr id="26" name="Text 24"/>
-          <p:cNvSpPr/>
-          <p:nvPr/>
-        </p:nvSpPr>
-        <p:spPr>
-          <a:xfrm>
-            <a:off x="9646920" y="3419856"/>
-            <a:ext cx="1783080" cy="411480"/>
-          </a:xfrm>
-          <a:prstGeom prst="rect">
-            <a:avLst/>
-          </a:prstGeom>
-          <a:noFill/>
-          <a:ln/>
-        </p:spPr>
-        <p:txBody>
-          <a:bodyPr wrap="square" lIns="0" tIns="0" rIns="0" bIns="0" rtlCol="0" anchor="ctr"/>
-          <a:lstStyle/>
-          <a:p>
-            <a:pPr algn="r" indent="0" marL="0">
-              <a:buNone/>
-            </a:pPr>
-            <a:r>
-              <a:rPr lang="en-US" sz="1100" dirty="0">
-                <a:solidFill>
-                  <a:srgbClr val="5B6B6A"/>
-                </a:solidFill>
-                <a:latin typeface="Malgun Gothic" pitchFamily="34" charset="0"/>
-                <a:ea typeface="Malgun Gothic" pitchFamily="34" charset="-122"/>
-                <a:cs typeface="Malgun Gothic" pitchFamily="34" charset="-120"/>
-              </a:rPr>
-              <a:t>죽전동</a:t>
-            </a:r>
-            <a:endParaRPr lang="en-US" sz="1100" dirty="0"/>
-          </a:p>
-        </p:txBody>
-      </p:sp>
-      <p:sp>
-        <p:nvSpPr>
-          <p:cNvPr id="27" name="Text 25"/>
-          <p:cNvSpPr/>
-          <p:nvPr/>
-        </p:nvSpPr>
-        <p:spPr>
-          <a:xfrm>
-            <a:off x="6492240" y="3904488"/>
-            <a:ext cx="3200400" cy="411480"/>
-          </a:xfrm>
-          <a:prstGeom prst="rect">
-            <a:avLst/>
-          </a:prstGeom>
-          <a:noFill/>
-          <a:ln/>
-        </p:spPr>
-        <p:txBody>
-          <a:bodyPr wrap="square" lIns="0" tIns="0" rIns="0" bIns="0" rtlCol="0" anchor="ctr"/>
-          <a:lstStyle/>
-          <a:p>
-            <a:pPr indent="0" marL="0">
-              <a:buNone/>
-            </a:pPr>
-            <a:r>
-              <a:rPr lang="en-US" sz="1250" b="1" dirty="0">
-                <a:solidFill>
-                  <a:srgbClr val="16302E"/>
-                </a:solidFill>
-                <a:latin typeface="Malgun Gothic" pitchFamily="34" charset="0"/>
-                <a:ea typeface="Malgun Gothic" pitchFamily="34" charset="-122"/>
-                <a:cs typeface="Malgun Gothic" pitchFamily="34" charset="-120"/>
-              </a:rPr>
-              <a:t>더데이의원</a:t>
-            </a:r>
-            <a:endParaRPr lang="en-US" sz="1250" dirty="0"/>
-          </a:p>
-        </p:txBody>
-      </p:sp>
-      <p:sp>
-        <p:nvSpPr>
-          <p:cNvPr id="28" name="Text 26"/>
-          <p:cNvSpPr/>
-          <p:nvPr/>
-        </p:nvSpPr>
-        <p:spPr>
-          <a:xfrm>
-            <a:off x="9646920" y="3904488"/>
-            <a:ext cx="1783080" cy="411480"/>
-          </a:xfrm>
-          <a:prstGeom prst="rect">
-            <a:avLst/>
-          </a:prstGeom>
-          <a:noFill/>
-          <a:ln/>
-        </p:spPr>
-        <p:txBody>
-          <a:bodyPr wrap="square" lIns="0" tIns="0" rIns="0" bIns="0" rtlCol="0" anchor="ctr"/>
-          <a:lstStyle/>
-          <a:p>
-            <a:pPr algn="r" indent="0" marL="0">
-              <a:buNone/>
-            </a:pPr>
-            <a:r>
-              <a:rPr lang="en-US" sz="1100" dirty="0">
-                <a:solidFill>
-                  <a:srgbClr val="5B6B6A"/>
-                </a:solidFill>
-                <a:latin typeface="Malgun Gothic" pitchFamily="34" charset="0"/>
-                <a:ea typeface="Malgun Gothic" pitchFamily="34" charset="-122"/>
-                <a:cs typeface="Malgun Gothic" pitchFamily="34" charset="-120"/>
-              </a:rPr>
-              <a:t>월성동</a:t>
-            </a:r>
-            <a:endParaRPr lang="en-US" sz="1100" dirty="0"/>
-          </a:p>
-        </p:txBody>
-      </p:sp>
-      <p:sp>
-        <p:nvSpPr>
-          <p:cNvPr id="29" name="Text 27"/>
-          <p:cNvSpPr/>
-          <p:nvPr/>
-        </p:nvSpPr>
-        <p:spPr>
-          <a:xfrm>
-            <a:off x="6492240" y="4389120"/>
-            <a:ext cx="3200400" cy="411480"/>
-          </a:xfrm>
-          <a:prstGeom prst="rect">
-            <a:avLst/>
-          </a:prstGeom>
-          <a:noFill/>
-          <a:ln/>
-        </p:spPr>
-        <p:txBody>
-          <a:bodyPr wrap="square" lIns="0" tIns="0" rIns="0" bIns="0" rtlCol="0" anchor="ctr"/>
-          <a:lstStyle/>
-          <a:p>
-            <a:pPr indent="0" marL="0">
-              <a:buNone/>
-            </a:pPr>
-            <a:r>
-              <a:rPr lang="en-US" sz="1250" b="1" dirty="0">
-                <a:solidFill>
-                  <a:srgbClr val="16302E"/>
-                </a:solidFill>
-                <a:latin typeface="Malgun Gothic" pitchFamily="34" charset="0"/>
-                <a:ea typeface="Malgun Gothic" pitchFamily="34" charset="-122"/>
-                <a:cs typeface="Malgun Gothic" pitchFamily="34" charset="-120"/>
-              </a:rPr>
-              <a:t>더차오름의원·피부과</a:t>
-            </a:r>
-            <a:endParaRPr lang="en-US" sz="1250" dirty="0"/>
-          </a:p>
-        </p:txBody>
-      </p:sp>
-      <p:sp>
-        <p:nvSpPr>
-          <p:cNvPr id="30" name="Text 28"/>
-          <p:cNvSpPr/>
-          <p:nvPr/>
-        </p:nvSpPr>
-        <p:spPr>
-          <a:xfrm>
-            <a:off x="9646920" y="4389120"/>
-            <a:ext cx="1783080" cy="411480"/>
-          </a:xfrm>
-          <a:prstGeom prst="rect">
-            <a:avLst/>
-          </a:prstGeom>
-          <a:noFill/>
-          <a:ln/>
-        </p:spPr>
-        <p:txBody>
-          <a:bodyPr wrap="square" lIns="0" tIns="0" rIns="0" bIns="0" rtlCol="0" anchor="ctr"/>
-          <a:lstStyle/>
-          <a:p>
-            <a:pPr algn="r" indent="0" marL="0">
-              <a:buNone/>
-            </a:pPr>
-            <a:r>
-              <a:rPr lang="en-US" sz="1100" dirty="0">
-                <a:solidFill>
-                  <a:srgbClr val="5B6B6A"/>
-                </a:solidFill>
-                <a:latin typeface="Malgun Gothic" pitchFamily="34" charset="0"/>
-                <a:ea typeface="Malgun Gothic" pitchFamily="34" charset="-122"/>
-                <a:cs typeface="Malgun Gothic" pitchFamily="34" charset="-120"/>
-              </a:rPr>
-              <a:t>죽전동</a:t>
-            </a:r>
-            <a:endParaRPr lang="en-US" sz="1100" dirty="0"/>
-          </a:p>
-        </p:txBody>
-      </p:sp>
-      <p:sp>
-        <p:nvSpPr>
-          <p:cNvPr id="31" name="Shape 29"/>
-          <p:cNvSpPr/>
-          <p:nvPr/>
-        </p:nvSpPr>
-        <p:spPr>
-          <a:xfrm>
-            <a:off x="548640" y="5074920"/>
-            <a:ext cx="11064240" cy="914400"/>
-          </a:xfrm>
-          <a:prstGeom prst="roundRect">
-            <a:avLst>
-              <a:gd name="adj" fmla="val 10000"/>
-            </a:avLst>
-          </a:prstGeom>
-          <a:solidFill>
-            <a:srgbClr val="0F3B3A"/>
-          </a:solidFill>
-          <a:ln/>
-        </p:spPr>
-      </p:sp>
-      <p:sp>
-        <p:nvSpPr>
-          <p:cNvPr id="32" name="Text 30"/>
-          <p:cNvSpPr/>
-          <p:nvPr/>
-        </p:nvSpPr>
-        <p:spPr>
-          <a:xfrm>
-            <a:off x="822960" y="5074920"/>
-            <a:ext cx="10515600" cy="914400"/>
-          </a:xfrm>
-          <a:prstGeom prst="rect">
-            <a:avLst/>
-          </a:prstGeom>
-          <a:noFill/>
-          <a:ln/>
-        </p:spPr>
-        <p:txBody>
-          <a:bodyPr wrap="square" lIns="0" tIns="0" rIns="0" bIns="0" rtlCol="0" anchor="ctr"/>
-          <a:lstStyle/>
-          <a:p>
-            <a:pPr indent="0" marL="0">
-              <a:lnSpc>
-                <a:spcPct val="110000"/>
-              </a:lnSpc>
-              <a:buNone/>
-            </a:pPr>
-            <a:r>
-              <a:rPr lang="en-US" sz="1250" b="1" dirty="0">
-                <a:solidFill>
-                  <a:srgbClr val="2BB79A"/>
-                </a:solidFill>
-                <a:latin typeface="Malgun Gothic" pitchFamily="34" charset="0"/>
-                <a:ea typeface="Malgun Gothic" pitchFamily="34" charset="-122"/>
-                <a:cs typeface="Malgun Gothic" pitchFamily="34" charset="-120"/>
-              </a:rPr>
-              <a:t>입지 인사이트  </a:t>
-            </a:r>
-            <a:pPr indent="0" marL="0">
-              <a:lnSpc>
-                <a:spcPct val="110000"/>
-              </a:lnSpc>
-              <a:buNone/>
-            </a:pPr>
-            <a:r>
-              <a:rPr lang="en-US" sz="1250" dirty="0">
-                <a:solidFill>
-                  <a:srgbClr val="FFFFFF"/>
-                </a:solidFill>
-                <a:latin typeface="Malgun Gothic" pitchFamily="34" charset="0"/>
-                <a:ea typeface="Malgun Gothic" pitchFamily="34" charset="-122"/>
-                <a:cs typeface="Malgun Gothic" pitchFamily="34" charset="-120"/>
-              </a:rPr>
-              <a:t>달구벌대로변 죽전~감삼이 미용·의원 밀집축, 월배권(상인·진천·월성)은 생활밀착 한의원 중심. 전문 비만 브랜드가 얇아 검색·브랜딩 선점 이익이 큼.</a:t>
-            </a:r>
-            <a:endParaRPr lang="en-US" sz="1250" dirty="0"/>
-          </a:p>
-        </p:txBody>
-      </p:sp>
-      <p:sp>
-        <p:nvSpPr>
-          <p:cNvPr id="33" name="Text 31"/>
           <p:cNvSpPr/>
           <p:nvPr/>
         </p:nvSpPr>
@@ -7771,7 +8686,7 @@
       </p:sp>
       <p:sp>
         <p:nvSpPr>
-          <p:cNvPr id="34" name="Text 32"/>
+          <p:cNvPr id="23" name="Text 21"/>
           <p:cNvSpPr/>
           <p:nvPr/>
         </p:nvSpPr>
@@ -7873,7 +8788,7 @@
                 <a:ea typeface="Malgun Gothic" pitchFamily="34" charset="-122"/>
                 <a:cs typeface="Malgun Gothic" pitchFamily="34" charset="-120"/>
               </a:rPr>
-              <a:t>③ 남녀·연령 구조</a:t>
+              <a:t>② 경쟁 지형 (샘플)</a:t>
             </a:r>
             <a:endParaRPr lang="en-US" sz="1200" dirty="0"/>
           </a:p>
@@ -7912,7 +8827,7 @@
                 <a:ea typeface="Malgun Gothic" pitchFamily="34" charset="-122"/>
                 <a:cs typeface="Malgun Gothic" pitchFamily="34" charset="-120"/>
               </a:rPr>
-              <a:t>다이어트 소비 코어는 30~50대, 40대 피크</a:t>
+              <a:t>리뷰순 상위 노출 · 달구벌대로 죽전~감삼 클러스터</a:t>
             </a:r>
             <a:endParaRPr lang="en-US" sz="3000" dirty="0"/>
           </a:p>
@@ -7957,79 +8872,24 @@
           </a:p>
         </p:txBody>
       </p:sp>
-      <p:graphicFrame>
-        <p:nvGraphicFramePr>
-          <p:cNvPr id="5" name="Chart 0" descr=""/>
-          <p:cNvGraphicFramePr/>
-          <p:nvPr/>
-        </p:nvGraphicFramePr>
-        <p:xfrm>
-          <a:off x="548640" y="1737360"/>
-          <a:ext cx="6675120" cy="4206240"/>
-        </p:xfrm>
-        <a:graphic xmlns:a="http://schemas.openxmlformats.org/drawingml/2006/main">
-          <a:graphicData uri="http://schemas.openxmlformats.org/drawingml/2006/chart">
-            <c:chart xmlns:c="http://schemas.openxmlformats.org/drawingml/2006/chart" r:id="rId1"/>
-          </a:graphicData>
-        </a:graphic>
-      </p:graphicFrame>
-      <p:sp>
-        <p:nvSpPr>
-          <p:cNvPr id="6" name="Text 3"/>
-          <p:cNvSpPr/>
-          <p:nvPr/>
-        </p:nvSpPr>
-        <p:spPr>
-          <a:xfrm>
-            <a:off x="548640" y="5806440"/>
-            <a:ext cx="6675120" cy="274320"/>
-          </a:xfrm>
-          <a:prstGeom prst="rect">
-            <a:avLst/>
-          </a:prstGeom>
-          <a:noFill/>
-          <a:ln/>
-        </p:spPr>
-        <p:txBody>
-          <a:bodyPr wrap="square" rtlCol="0" anchor="ctr"/>
-          <a:lstStyle/>
-          <a:p>
-            <a:pPr indent="0" marL="0">
-              <a:buNone/>
-            </a:pPr>
-            <a:r>
-              <a:rPr lang="en-US" sz="900" i="1" dirty="0">
-                <a:solidFill>
-                  <a:srgbClr val="5B6B6A"/>
-                </a:solidFill>
-                <a:latin typeface="Malgun Gothic" pitchFamily="34" charset="0"/>
-                <a:ea typeface="Malgun Gothic" pitchFamily="34" charset="-122"/>
-                <a:cs typeface="Malgun Gothic" pitchFamily="34" charset="-120"/>
-              </a:rPr>
-              <a:t>Naver DataLab 쇼핑 '다이어트식품' 지수 (2025.7, 피크=100)</a:t>
-            </a:r>
-            <a:endParaRPr lang="en-US" sz="900" dirty="0"/>
-          </a:p>
-        </p:txBody>
-      </p:sp>
-      <p:sp>
-        <p:nvSpPr>
-          <p:cNvPr id="7" name="Shape 4"/>
-          <p:cNvSpPr/>
-          <p:nvPr/>
-        </p:nvSpPr>
-        <p:spPr>
-          <a:xfrm>
-            <a:off x="7498080" y="1737360"/>
-            <a:ext cx="4114800" cy="4206240"/>
+      <p:sp>
+        <p:nvSpPr>
+          <p:cNvPr id="5" name="Shape 3"/>
+          <p:cNvSpPr/>
+          <p:nvPr/>
+        </p:nvSpPr>
+        <p:spPr>
+          <a:xfrm>
+            <a:off x="548640" y="1691640"/>
+            <a:ext cx="5349240" cy="3200400"/>
           </a:xfrm>
           <a:prstGeom prst="roundRect">
             <a:avLst>
-              <a:gd name="adj" fmla="val 2222"/>
+              <a:gd name="adj" fmla="val 2857"/>
             </a:avLst>
           </a:prstGeom>
           <a:solidFill>
-            <a:srgbClr val="F1F6F5"/>
+            <a:srgbClr val="FFFFFF"/>
           </a:solidFill>
           <a:ln w="12700">
             <a:solidFill>
@@ -8041,167 +8901,1009 @@
       </p:sp>
       <p:sp>
         <p:nvSpPr>
-          <p:cNvPr id="8" name="Text 5"/>
-          <p:cNvSpPr/>
-          <p:nvPr/>
-        </p:nvSpPr>
-        <p:spPr>
-          <a:xfrm>
-            <a:off x="7726680" y="1965960"/>
-            <a:ext cx="3657600" cy="365760"/>
-          </a:xfrm>
-          <a:prstGeom prst="rect">
-            <a:avLst/>
-          </a:prstGeom>
-          <a:noFill/>
-          <a:ln/>
-        </p:spPr>
-        <p:txBody>
-          <a:bodyPr wrap="square" rtlCol="0" anchor="ctr"/>
-          <a:lstStyle/>
-          <a:p>
-            <a:pPr indent="0" marL="0">
-              <a:buNone/>
-            </a:pPr>
-            <a:r>
-              <a:rPr lang="en-US" sz="1500" b="1" dirty="0">
-                <a:solidFill>
-                  <a:srgbClr val="0E7C7B"/>
-                </a:solidFill>
-                <a:latin typeface="Malgun Gothic" pitchFamily="34" charset="0"/>
-                <a:ea typeface="Malgun Gothic" pitchFamily="34" charset="-122"/>
-                <a:cs typeface="Malgun Gothic" pitchFamily="34" charset="-120"/>
-              </a:rPr>
-              <a:t>무엇을 뜻하나</a:t>
-            </a:r>
-            <a:endParaRPr lang="en-US" sz="1500" dirty="0"/>
-          </a:p>
-        </p:txBody>
-      </p:sp>
-      <p:sp>
-        <p:nvSpPr>
-          <p:cNvPr id="9" name="Text 6"/>
-          <p:cNvSpPr/>
-          <p:nvPr/>
-        </p:nvSpPr>
-        <p:spPr>
-          <a:xfrm>
-            <a:off x="7726680" y="2377440"/>
-            <a:ext cx="3703320" cy="3383280"/>
-          </a:xfrm>
-          <a:prstGeom prst="rect">
-            <a:avLst/>
-          </a:prstGeom>
-          <a:noFill/>
-          <a:ln/>
-        </p:spPr>
-        <p:txBody>
-          <a:bodyPr wrap="square" rtlCol="0" anchor="t"/>
+          <p:cNvPr id="6" name="Shape 4"/>
+          <p:cNvSpPr/>
+          <p:nvPr/>
+        </p:nvSpPr>
+        <p:spPr>
+          <a:xfrm>
+            <a:off x="548640" y="1691640"/>
+            <a:ext cx="5349240" cy="566928"/>
+          </a:xfrm>
+          <a:prstGeom prst="roundRect">
+            <a:avLst>
+              <a:gd name="adj" fmla="val 16129"/>
+            </a:avLst>
+          </a:prstGeom>
+          <a:solidFill>
+            <a:srgbClr val="0E7C7B"/>
+          </a:solidFill>
+          <a:ln/>
+        </p:spPr>
+      </p:sp>
+      <p:sp>
+        <p:nvSpPr>
+          <p:cNvPr id="7" name="Text 5"/>
+          <p:cNvSpPr/>
+          <p:nvPr/>
+        </p:nvSpPr>
+        <p:spPr>
+          <a:xfrm>
+            <a:off x="777240" y="1691640"/>
+            <a:ext cx="4937760" cy="566928"/>
+          </a:xfrm>
+          <a:prstGeom prst="rect">
+            <a:avLst/>
+          </a:prstGeom>
+          <a:noFill/>
+          <a:ln/>
+        </p:spPr>
+        <p:txBody>
+          <a:bodyPr wrap="square" lIns="0" tIns="0" rIns="0" bIns="0" rtlCol="0" anchor="ctr"/>
+          <a:lstStyle/>
+          <a:p>
+            <a:pPr indent="0" marL="0">
+              <a:buNone/>
+            </a:pPr>
+            <a:r>
+              <a:rPr lang="en-US" sz="1400" b="1" dirty="0">
+                <a:solidFill>
+                  <a:srgbClr val="FFFFFF"/>
+                </a:solidFill>
+                <a:latin typeface="Malgun Gothic" pitchFamily="34" charset="0"/>
+                <a:ea typeface="Malgun Gothic" pitchFamily="34" charset="-122"/>
+                <a:cs typeface="Malgun Gothic" pitchFamily="34" charset="-120"/>
+              </a:rPr>
+              <a:t>한방 다이어트 (강세)</a:t>
+            </a:r>
+            <a:endParaRPr lang="en-US" sz="1400" dirty="0"/>
+          </a:p>
+        </p:txBody>
+      </p:sp>
+      <p:sp>
+        <p:nvSpPr>
+          <p:cNvPr id="8" name="Text 6"/>
+          <p:cNvSpPr/>
+          <p:nvPr/>
+        </p:nvSpPr>
+        <p:spPr>
+          <a:xfrm>
+            <a:off x="777240" y="2450592"/>
+            <a:ext cx="3200400" cy="411480"/>
+          </a:xfrm>
+          <a:prstGeom prst="rect">
+            <a:avLst/>
+          </a:prstGeom>
+          <a:noFill/>
+          <a:ln/>
+        </p:spPr>
+        <p:txBody>
+          <a:bodyPr wrap="square" lIns="0" tIns="0" rIns="0" bIns="0" rtlCol="0" anchor="ctr"/>
+          <a:lstStyle/>
+          <a:p>
+            <a:pPr indent="0" marL="0">
+              <a:buNone/>
+            </a:pPr>
+            <a:r>
+              <a:rPr lang="en-US" sz="1250" b="1" dirty="0">
+                <a:solidFill>
+                  <a:srgbClr val="16302E"/>
+                </a:solidFill>
+                <a:latin typeface="Malgun Gothic" pitchFamily="34" charset="0"/>
+                <a:ea typeface="Malgun Gothic" pitchFamily="34" charset="-122"/>
+                <a:cs typeface="Malgun Gothic" pitchFamily="34" charset="-120"/>
+              </a:rPr>
+              <a:t>더편한한의원</a:t>
+            </a:r>
+            <a:endParaRPr lang="en-US" sz="1250" dirty="0"/>
+          </a:p>
+        </p:txBody>
+      </p:sp>
+      <p:sp>
+        <p:nvSpPr>
+          <p:cNvPr id="9" name="Text 7"/>
+          <p:cNvSpPr/>
+          <p:nvPr/>
+        </p:nvSpPr>
+        <p:spPr>
+          <a:xfrm>
+            <a:off x="3931920" y="2450592"/>
+            <a:ext cx="1783080" cy="411480"/>
+          </a:xfrm>
+          <a:prstGeom prst="rect">
+            <a:avLst/>
+          </a:prstGeom>
+          <a:noFill/>
+          <a:ln/>
+        </p:spPr>
+        <p:txBody>
+          <a:bodyPr wrap="square" lIns="0" tIns="0" rIns="0" bIns="0" rtlCol="0" anchor="ctr"/>
+          <a:lstStyle/>
+          <a:p>
+            <a:pPr algn="r" indent="0" marL="0">
+              <a:buNone/>
+            </a:pPr>
+            <a:r>
+              <a:rPr lang="en-US" sz="1100" dirty="0">
+                <a:solidFill>
+                  <a:srgbClr val="5B6B6A"/>
+                </a:solidFill>
+                <a:latin typeface="Malgun Gothic" pitchFamily="34" charset="0"/>
+                <a:ea typeface="Malgun Gothic" pitchFamily="34" charset="-122"/>
+                <a:cs typeface="Malgun Gothic" pitchFamily="34" charset="-120"/>
+              </a:rPr>
+              <a:t>용산동</a:t>
+            </a:r>
+            <a:endParaRPr lang="en-US" sz="1100" dirty="0"/>
+          </a:p>
+        </p:txBody>
+      </p:sp>
+      <p:sp>
+        <p:nvSpPr>
+          <p:cNvPr id="10" name="Text 8"/>
+          <p:cNvSpPr/>
+          <p:nvPr/>
+        </p:nvSpPr>
+        <p:spPr>
+          <a:xfrm>
+            <a:off x="777240" y="2935224"/>
+            <a:ext cx="3200400" cy="411480"/>
+          </a:xfrm>
+          <a:prstGeom prst="rect">
+            <a:avLst/>
+          </a:prstGeom>
+          <a:noFill/>
+          <a:ln/>
+        </p:spPr>
+        <p:txBody>
+          <a:bodyPr wrap="square" lIns="0" tIns="0" rIns="0" bIns="0" rtlCol="0" anchor="ctr"/>
+          <a:lstStyle/>
+          <a:p>
+            <a:pPr indent="0" marL="0">
+              <a:buNone/>
+            </a:pPr>
+            <a:r>
+              <a:rPr lang="en-US" sz="1250" b="1" dirty="0">
+                <a:solidFill>
+                  <a:srgbClr val="16302E"/>
+                </a:solidFill>
+                <a:latin typeface="Malgun Gothic" pitchFamily="34" charset="0"/>
+                <a:ea typeface="Malgun Gothic" pitchFamily="34" charset="-122"/>
+                <a:cs typeface="Malgun Gothic" pitchFamily="34" charset="-120"/>
+              </a:rPr>
+              <a:t>손모아한의원</a:t>
+            </a:r>
+            <a:endParaRPr lang="en-US" sz="1250" dirty="0"/>
+          </a:p>
+        </p:txBody>
+      </p:sp>
+      <p:sp>
+        <p:nvSpPr>
+          <p:cNvPr id="11" name="Text 9"/>
+          <p:cNvSpPr/>
+          <p:nvPr/>
+        </p:nvSpPr>
+        <p:spPr>
+          <a:xfrm>
+            <a:off x="3931920" y="2935224"/>
+            <a:ext cx="1783080" cy="411480"/>
+          </a:xfrm>
+          <a:prstGeom prst="rect">
+            <a:avLst/>
+          </a:prstGeom>
+          <a:noFill/>
+          <a:ln/>
+        </p:spPr>
+        <p:txBody>
+          <a:bodyPr wrap="square" lIns="0" tIns="0" rIns="0" bIns="0" rtlCol="0" anchor="ctr"/>
+          <a:lstStyle/>
+          <a:p>
+            <a:pPr algn="r" indent="0" marL="0">
+              <a:buNone/>
+            </a:pPr>
+            <a:r>
+              <a:rPr lang="en-US" sz="1100" dirty="0">
+                <a:solidFill>
+                  <a:srgbClr val="5B6B6A"/>
+                </a:solidFill>
+                <a:latin typeface="Malgun Gothic" pitchFamily="34" charset="0"/>
+                <a:ea typeface="Malgun Gothic" pitchFamily="34" charset="-122"/>
+                <a:cs typeface="Malgun Gothic" pitchFamily="34" charset="-120"/>
+              </a:rPr>
+              <a:t>진천동</a:t>
+            </a:r>
+            <a:endParaRPr lang="en-US" sz="1100" dirty="0"/>
+          </a:p>
+        </p:txBody>
+      </p:sp>
+      <p:sp>
+        <p:nvSpPr>
+          <p:cNvPr id="12" name="Text 10"/>
+          <p:cNvSpPr/>
+          <p:nvPr/>
+        </p:nvSpPr>
+        <p:spPr>
+          <a:xfrm>
+            <a:off x="777240" y="3419856"/>
+            <a:ext cx="3200400" cy="411480"/>
+          </a:xfrm>
+          <a:prstGeom prst="rect">
+            <a:avLst/>
+          </a:prstGeom>
+          <a:noFill/>
+          <a:ln/>
+        </p:spPr>
+        <p:txBody>
+          <a:bodyPr wrap="square" lIns="0" tIns="0" rIns="0" bIns="0" rtlCol="0" anchor="ctr"/>
+          <a:lstStyle/>
+          <a:p>
+            <a:pPr indent="0" marL="0">
+              <a:buNone/>
+            </a:pPr>
+            <a:r>
+              <a:rPr lang="en-US" sz="1250" b="1" dirty="0">
+                <a:solidFill>
+                  <a:srgbClr val="16302E"/>
+                </a:solidFill>
+                <a:latin typeface="Malgun Gothic" pitchFamily="34" charset="0"/>
+                <a:ea typeface="Malgun Gothic" pitchFamily="34" charset="-122"/>
+                <a:cs typeface="Malgun Gothic" pitchFamily="34" charset="-120"/>
+              </a:rPr>
+              <a:t>미올한의원</a:t>
+            </a:r>
+            <a:endParaRPr lang="en-US" sz="1250" dirty="0"/>
+          </a:p>
+        </p:txBody>
+      </p:sp>
+      <p:sp>
+        <p:nvSpPr>
+          <p:cNvPr id="13" name="Text 11"/>
+          <p:cNvSpPr/>
+          <p:nvPr/>
+        </p:nvSpPr>
+        <p:spPr>
+          <a:xfrm>
+            <a:off x="3931920" y="3419856"/>
+            <a:ext cx="1783080" cy="411480"/>
+          </a:xfrm>
+          <a:prstGeom prst="rect">
+            <a:avLst/>
+          </a:prstGeom>
+          <a:noFill/>
+          <a:ln/>
+        </p:spPr>
+        <p:txBody>
+          <a:bodyPr wrap="square" lIns="0" tIns="0" rIns="0" bIns="0" rtlCol="0" anchor="ctr"/>
+          <a:lstStyle/>
+          <a:p>
+            <a:pPr algn="r" indent="0" marL="0">
+              <a:buNone/>
+            </a:pPr>
+            <a:r>
+              <a:rPr lang="en-US" sz="1100" dirty="0">
+                <a:solidFill>
+                  <a:srgbClr val="5B6B6A"/>
+                </a:solidFill>
+                <a:latin typeface="Malgun Gothic" pitchFamily="34" charset="0"/>
+                <a:ea typeface="Malgun Gothic" pitchFamily="34" charset="-122"/>
+                <a:cs typeface="Malgun Gothic" pitchFamily="34" charset="-120"/>
+              </a:rPr>
+              <a:t>상인동</a:t>
+            </a:r>
+            <a:endParaRPr lang="en-US" sz="1100" dirty="0"/>
+          </a:p>
+        </p:txBody>
+      </p:sp>
+      <p:sp>
+        <p:nvSpPr>
+          <p:cNvPr id="14" name="Text 12"/>
+          <p:cNvSpPr/>
+          <p:nvPr/>
+        </p:nvSpPr>
+        <p:spPr>
+          <a:xfrm>
+            <a:off x="777240" y="3904488"/>
+            <a:ext cx="3200400" cy="411480"/>
+          </a:xfrm>
+          <a:prstGeom prst="rect">
+            <a:avLst/>
+          </a:prstGeom>
+          <a:noFill/>
+          <a:ln/>
+        </p:spPr>
+        <p:txBody>
+          <a:bodyPr wrap="square" lIns="0" tIns="0" rIns="0" bIns="0" rtlCol="0" anchor="ctr"/>
+          <a:lstStyle/>
+          <a:p>
+            <a:pPr indent="0" marL="0">
+              <a:buNone/>
+            </a:pPr>
+            <a:r>
+              <a:rPr lang="en-US" sz="1250" b="1" dirty="0">
+                <a:solidFill>
+                  <a:srgbClr val="16302E"/>
+                </a:solidFill>
+                <a:latin typeface="Malgun Gothic" pitchFamily="34" charset="0"/>
+                <a:ea typeface="Malgun Gothic" pitchFamily="34" charset="-122"/>
+                <a:cs typeface="Malgun Gothic" pitchFamily="34" charset="-120"/>
+              </a:rPr>
+              <a:t>창한방병원</a:t>
+            </a:r>
+            <a:endParaRPr lang="en-US" sz="1250" dirty="0"/>
+          </a:p>
+        </p:txBody>
+      </p:sp>
+      <p:sp>
+        <p:nvSpPr>
+          <p:cNvPr id="15" name="Text 13"/>
+          <p:cNvSpPr/>
+          <p:nvPr/>
+        </p:nvSpPr>
+        <p:spPr>
+          <a:xfrm>
+            <a:off x="3931920" y="3904488"/>
+            <a:ext cx="1783080" cy="411480"/>
+          </a:xfrm>
+          <a:prstGeom prst="rect">
+            <a:avLst/>
+          </a:prstGeom>
+          <a:noFill/>
+          <a:ln/>
+        </p:spPr>
+        <p:txBody>
+          <a:bodyPr wrap="square" lIns="0" tIns="0" rIns="0" bIns="0" rtlCol="0" anchor="ctr"/>
+          <a:lstStyle/>
+          <a:p>
+            <a:pPr algn="r" indent="0" marL="0">
+              <a:buNone/>
+            </a:pPr>
+            <a:r>
+              <a:rPr lang="en-US" sz="1100" dirty="0">
+                <a:solidFill>
+                  <a:srgbClr val="5B6B6A"/>
+                </a:solidFill>
+                <a:latin typeface="Malgun Gothic" pitchFamily="34" charset="0"/>
+                <a:ea typeface="Malgun Gothic" pitchFamily="34" charset="-122"/>
+                <a:cs typeface="Malgun Gothic" pitchFamily="34" charset="-120"/>
+              </a:rPr>
+              <a:t>감삼동</a:t>
+            </a:r>
+            <a:endParaRPr lang="en-US" sz="1100" dirty="0"/>
+          </a:p>
+        </p:txBody>
+      </p:sp>
+      <p:sp>
+        <p:nvSpPr>
+          <p:cNvPr id="16" name="Text 14"/>
+          <p:cNvSpPr/>
+          <p:nvPr/>
+        </p:nvSpPr>
+        <p:spPr>
+          <a:xfrm>
+            <a:off x="777240" y="4389120"/>
+            <a:ext cx="3200400" cy="411480"/>
+          </a:xfrm>
+          <a:prstGeom prst="rect">
+            <a:avLst/>
+          </a:prstGeom>
+          <a:noFill/>
+          <a:ln/>
+        </p:spPr>
+        <p:txBody>
+          <a:bodyPr wrap="square" lIns="0" tIns="0" rIns="0" bIns="0" rtlCol="0" anchor="ctr"/>
+          <a:lstStyle/>
+          <a:p>
+            <a:pPr indent="0" marL="0">
+              <a:buNone/>
+            </a:pPr>
+            <a:r>
+              <a:rPr lang="en-US" sz="1250" b="1" dirty="0">
+                <a:solidFill>
+                  <a:srgbClr val="16302E"/>
+                </a:solidFill>
+                <a:latin typeface="Malgun Gothic" pitchFamily="34" charset="0"/>
+                <a:ea typeface="Malgun Gothic" pitchFamily="34" charset="-122"/>
+                <a:cs typeface="Malgun Gothic" pitchFamily="34" charset="-120"/>
+              </a:rPr>
+              <a:t>잘보는한의원</a:t>
+            </a:r>
+            <a:endParaRPr lang="en-US" sz="1250" dirty="0"/>
+          </a:p>
+        </p:txBody>
+      </p:sp>
+      <p:sp>
+        <p:nvSpPr>
+          <p:cNvPr id="17" name="Text 15"/>
+          <p:cNvSpPr/>
+          <p:nvPr/>
+        </p:nvSpPr>
+        <p:spPr>
+          <a:xfrm>
+            <a:off x="3931920" y="4389120"/>
+            <a:ext cx="1783080" cy="411480"/>
+          </a:xfrm>
+          <a:prstGeom prst="rect">
+            <a:avLst/>
+          </a:prstGeom>
+          <a:noFill/>
+          <a:ln/>
+        </p:spPr>
+        <p:txBody>
+          <a:bodyPr wrap="square" lIns="0" tIns="0" rIns="0" bIns="0" rtlCol="0" anchor="ctr"/>
+          <a:lstStyle/>
+          <a:p>
+            <a:pPr algn="r" indent="0" marL="0">
+              <a:buNone/>
+            </a:pPr>
+            <a:r>
+              <a:rPr lang="en-US" sz="1100" dirty="0">
+                <a:solidFill>
+                  <a:srgbClr val="5B6B6A"/>
+                </a:solidFill>
+                <a:latin typeface="Malgun Gothic" pitchFamily="34" charset="0"/>
+                <a:ea typeface="Malgun Gothic" pitchFamily="34" charset="-122"/>
+                <a:cs typeface="Malgun Gothic" pitchFamily="34" charset="-120"/>
+              </a:rPr>
+              <a:t>진천동</a:t>
+            </a:r>
+            <a:endParaRPr lang="en-US" sz="1100" dirty="0"/>
+          </a:p>
+        </p:txBody>
+      </p:sp>
+      <p:sp>
+        <p:nvSpPr>
+          <p:cNvPr id="18" name="Shape 16"/>
+          <p:cNvSpPr/>
+          <p:nvPr/>
+        </p:nvSpPr>
+        <p:spPr>
+          <a:xfrm>
+            <a:off x="6263640" y="1691640"/>
+            <a:ext cx="5349240" cy="3200400"/>
+          </a:xfrm>
+          <a:prstGeom prst="roundRect">
+            <a:avLst>
+              <a:gd name="adj" fmla="val 2857"/>
+            </a:avLst>
+          </a:prstGeom>
+          <a:solidFill>
+            <a:srgbClr val="FFFFFF"/>
+          </a:solidFill>
+          <a:ln w="12700">
+            <a:solidFill>
+              <a:srgbClr val="D9E5E3"/>
+            </a:solidFill>
+            <a:prstDash val="solid"/>
+          </a:ln>
+        </p:spPr>
+      </p:sp>
+      <p:sp>
+        <p:nvSpPr>
+          <p:cNvPr id="19" name="Shape 17"/>
+          <p:cNvSpPr/>
+          <p:nvPr/>
+        </p:nvSpPr>
+        <p:spPr>
+          <a:xfrm>
+            <a:off x="6263640" y="1691640"/>
+            <a:ext cx="5349240" cy="566928"/>
+          </a:xfrm>
+          <a:prstGeom prst="roundRect">
+            <a:avLst>
+              <a:gd name="adj" fmla="val 16129"/>
+            </a:avLst>
+          </a:prstGeom>
+          <a:solidFill>
+            <a:srgbClr val="FF6B5B"/>
+          </a:solidFill>
+          <a:ln/>
+        </p:spPr>
+      </p:sp>
+      <p:sp>
+        <p:nvSpPr>
+          <p:cNvPr id="20" name="Text 18"/>
+          <p:cNvSpPr/>
+          <p:nvPr/>
+        </p:nvSpPr>
+        <p:spPr>
+          <a:xfrm>
+            <a:off x="6492240" y="1691640"/>
+            <a:ext cx="4937760" cy="566928"/>
+          </a:xfrm>
+          <a:prstGeom prst="rect">
+            <a:avLst/>
+          </a:prstGeom>
+          <a:noFill/>
+          <a:ln/>
+        </p:spPr>
+        <p:txBody>
+          <a:bodyPr wrap="square" lIns="0" tIns="0" rIns="0" bIns="0" rtlCol="0" anchor="ctr"/>
+          <a:lstStyle/>
+          <a:p>
+            <a:pPr indent="0" marL="0">
+              <a:buNone/>
+            </a:pPr>
+            <a:r>
+              <a:rPr lang="en-US" sz="1400" b="1" dirty="0">
+                <a:solidFill>
+                  <a:srgbClr val="FFFFFF"/>
+                </a:solidFill>
+                <a:latin typeface="Malgun Gothic" pitchFamily="34" charset="0"/>
+                <a:ea typeface="Malgun Gothic" pitchFamily="34" charset="-122"/>
+                <a:cs typeface="Malgun Gothic" pitchFamily="34" charset="-120"/>
+              </a:rPr>
+              <a:t>양방 의원 (상대적으로 얇음)</a:t>
+            </a:r>
+            <a:endParaRPr lang="en-US" sz="1400" dirty="0"/>
+          </a:p>
+        </p:txBody>
+      </p:sp>
+      <p:sp>
+        <p:nvSpPr>
+          <p:cNvPr id="21" name="Text 19"/>
+          <p:cNvSpPr/>
+          <p:nvPr/>
+        </p:nvSpPr>
+        <p:spPr>
+          <a:xfrm>
+            <a:off x="6492240" y="2450592"/>
+            <a:ext cx="3200400" cy="411480"/>
+          </a:xfrm>
+          <a:prstGeom prst="rect">
+            <a:avLst/>
+          </a:prstGeom>
+          <a:noFill/>
+          <a:ln/>
+        </p:spPr>
+        <p:txBody>
+          <a:bodyPr wrap="square" lIns="0" tIns="0" rIns="0" bIns="0" rtlCol="0" anchor="ctr"/>
+          <a:lstStyle/>
+          <a:p>
+            <a:pPr indent="0" marL="0">
+              <a:buNone/>
+            </a:pPr>
+            <a:r>
+              <a:rPr lang="en-US" sz="1250" b="1" dirty="0">
+                <a:solidFill>
+                  <a:srgbClr val="16302E"/>
+                </a:solidFill>
+                <a:latin typeface="Malgun Gothic" pitchFamily="34" charset="0"/>
+                <a:ea typeface="Malgun Gothic" pitchFamily="34" charset="-122"/>
+                <a:cs typeface="Malgun Gothic" pitchFamily="34" charset="-120"/>
+              </a:rPr>
+              <a:t>대곡연세의원·가정의학과</a:t>
+            </a:r>
+            <a:endParaRPr lang="en-US" sz="1250" dirty="0"/>
+          </a:p>
+        </p:txBody>
+      </p:sp>
+      <p:sp>
+        <p:nvSpPr>
+          <p:cNvPr id="22" name="Text 20"/>
+          <p:cNvSpPr/>
+          <p:nvPr/>
+        </p:nvSpPr>
+        <p:spPr>
+          <a:xfrm>
+            <a:off x="9646920" y="2450592"/>
+            <a:ext cx="1783080" cy="411480"/>
+          </a:xfrm>
+          <a:prstGeom prst="rect">
+            <a:avLst/>
+          </a:prstGeom>
+          <a:noFill/>
+          <a:ln/>
+        </p:spPr>
+        <p:txBody>
+          <a:bodyPr wrap="square" lIns="0" tIns="0" rIns="0" bIns="0" rtlCol="0" anchor="ctr"/>
+          <a:lstStyle/>
+          <a:p>
+            <a:pPr algn="r" indent="0" marL="0">
+              <a:buNone/>
+            </a:pPr>
+            <a:r>
+              <a:rPr lang="en-US" sz="1100" dirty="0">
+                <a:solidFill>
+                  <a:srgbClr val="5B6B6A"/>
+                </a:solidFill>
+                <a:latin typeface="Malgun Gothic" pitchFamily="34" charset="0"/>
+                <a:ea typeface="Malgun Gothic" pitchFamily="34" charset="-122"/>
+                <a:cs typeface="Malgun Gothic" pitchFamily="34" charset="-120"/>
+              </a:rPr>
+              <a:t>두류동</a:t>
+            </a:r>
+            <a:endParaRPr lang="en-US" sz="1100" dirty="0"/>
+          </a:p>
+        </p:txBody>
+      </p:sp>
+      <p:sp>
+        <p:nvSpPr>
+          <p:cNvPr id="23" name="Text 21"/>
+          <p:cNvSpPr/>
+          <p:nvPr/>
+        </p:nvSpPr>
+        <p:spPr>
+          <a:xfrm>
+            <a:off x="6492240" y="2935224"/>
+            <a:ext cx="3200400" cy="411480"/>
+          </a:xfrm>
+          <a:prstGeom prst="rect">
+            <a:avLst/>
+          </a:prstGeom>
+          <a:noFill/>
+          <a:ln/>
+        </p:spPr>
+        <p:txBody>
+          <a:bodyPr wrap="square" lIns="0" tIns="0" rIns="0" bIns="0" rtlCol="0" anchor="ctr"/>
+          <a:lstStyle/>
+          <a:p>
+            <a:pPr indent="0" marL="0">
+              <a:buNone/>
+            </a:pPr>
+            <a:r>
+              <a:rPr lang="en-US" sz="1250" b="1" dirty="0">
+                <a:solidFill>
+                  <a:srgbClr val="16302E"/>
+                </a:solidFill>
+                <a:latin typeface="Malgun Gothic" pitchFamily="34" charset="0"/>
+                <a:ea typeface="Malgun Gothic" pitchFamily="34" charset="-122"/>
+                <a:cs typeface="Malgun Gothic" pitchFamily="34" charset="-120"/>
+              </a:rPr>
+              <a:t>웰리브의원</a:t>
+            </a:r>
+            <a:endParaRPr lang="en-US" sz="1250" dirty="0"/>
+          </a:p>
+        </p:txBody>
+      </p:sp>
+      <p:sp>
+        <p:nvSpPr>
+          <p:cNvPr id="24" name="Text 22"/>
+          <p:cNvSpPr/>
+          <p:nvPr/>
+        </p:nvSpPr>
+        <p:spPr>
+          <a:xfrm>
+            <a:off x="9646920" y="2935224"/>
+            <a:ext cx="1783080" cy="411480"/>
+          </a:xfrm>
+          <a:prstGeom prst="rect">
+            <a:avLst/>
+          </a:prstGeom>
+          <a:noFill/>
+          <a:ln/>
+        </p:spPr>
+        <p:txBody>
+          <a:bodyPr wrap="square" lIns="0" tIns="0" rIns="0" bIns="0" rtlCol="0" anchor="ctr"/>
+          <a:lstStyle/>
+          <a:p>
+            <a:pPr algn="r" indent="0" marL="0">
+              <a:buNone/>
+            </a:pPr>
+            <a:r>
+              <a:rPr lang="en-US" sz="1100" dirty="0">
+                <a:solidFill>
+                  <a:srgbClr val="5B6B6A"/>
+                </a:solidFill>
+                <a:latin typeface="Malgun Gothic" pitchFamily="34" charset="0"/>
+                <a:ea typeface="Malgun Gothic" pitchFamily="34" charset="-122"/>
+                <a:cs typeface="Malgun Gothic" pitchFamily="34" charset="-120"/>
+              </a:rPr>
+              <a:t>대곡동</a:t>
+            </a:r>
+            <a:endParaRPr lang="en-US" sz="1100" dirty="0"/>
+          </a:p>
+        </p:txBody>
+      </p:sp>
+      <p:sp>
+        <p:nvSpPr>
+          <p:cNvPr id="25" name="Text 23"/>
+          <p:cNvSpPr/>
+          <p:nvPr/>
+        </p:nvSpPr>
+        <p:spPr>
+          <a:xfrm>
+            <a:off x="6492240" y="3419856"/>
+            <a:ext cx="3200400" cy="411480"/>
+          </a:xfrm>
+          <a:prstGeom prst="rect">
+            <a:avLst/>
+          </a:prstGeom>
+          <a:noFill/>
+          <a:ln/>
+        </p:spPr>
+        <p:txBody>
+          <a:bodyPr wrap="square" lIns="0" tIns="0" rIns="0" bIns="0" rtlCol="0" anchor="ctr"/>
+          <a:lstStyle/>
+          <a:p>
+            <a:pPr indent="0" marL="0">
+              <a:buNone/>
+            </a:pPr>
+            <a:r>
+              <a:rPr lang="en-US" sz="1250" b="1" dirty="0">
+                <a:solidFill>
+                  <a:srgbClr val="16302E"/>
+                </a:solidFill>
+                <a:latin typeface="Malgun Gothic" pitchFamily="34" charset="0"/>
+                <a:ea typeface="Malgun Gothic" pitchFamily="34" charset="-122"/>
+                <a:cs typeface="Malgun Gothic" pitchFamily="34" charset="-120"/>
+              </a:rPr>
+              <a:t>아트너의원</a:t>
+            </a:r>
+            <a:endParaRPr lang="en-US" sz="1250" dirty="0"/>
+          </a:p>
+        </p:txBody>
+      </p:sp>
+      <p:sp>
+        <p:nvSpPr>
+          <p:cNvPr id="26" name="Text 24"/>
+          <p:cNvSpPr/>
+          <p:nvPr/>
+        </p:nvSpPr>
+        <p:spPr>
+          <a:xfrm>
+            <a:off x="9646920" y="3419856"/>
+            <a:ext cx="1783080" cy="411480"/>
+          </a:xfrm>
+          <a:prstGeom prst="rect">
+            <a:avLst/>
+          </a:prstGeom>
+          <a:noFill/>
+          <a:ln/>
+        </p:spPr>
+        <p:txBody>
+          <a:bodyPr wrap="square" lIns="0" tIns="0" rIns="0" bIns="0" rtlCol="0" anchor="ctr"/>
+          <a:lstStyle/>
+          <a:p>
+            <a:pPr algn="r" indent="0" marL="0">
+              <a:buNone/>
+            </a:pPr>
+            <a:r>
+              <a:rPr lang="en-US" sz="1100" dirty="0">
+                <a:solidFill>
+                  <a:srgbClr val="5B6B6A"/>
+                </a:solidFill>
+                <a:latin typeface="Malgun Gothic" pitchFamily="34" charset="0"/>
+                <a:ea typeface="Malgun Gothic" pitchFamily="34" charset="-122"/>
+                <a:cs typeface="Malgun Gothic" pitchFamily="34" charset="-120"/>
+              </a:rPr>
+              <a:t>죽전동</a:t>
+            </a:r>
+            <a:endParaRPr lang="en-US" sz="1100" dirty="0"/>
+          </a:p>
+        </p:txBody>
+      </p:sp>
+      <p:sp>
+        <p:nvSpPr>
+          <p:cNvPr id="27" name="Text 25"/>
+          <p:cNvSpPr/>
+          <p:nvPr/>
+        </p:nvSpPr>
+        <p:spPr>
+          <a:xfrm>
+            <a:off x="6492240" y="3904488"/>
+            <a:ext cx="3200400" cy="411480"/>
+          </a:xfrm>
+          <a:prstGeom prst="rect">
+            <a:avLst/>
+          </a:prstGeom>
+          <a:noFill/>
+          <a:ln/>
+        </p:spPr>
+        <p:txBody>
+          <a:bodyPr wrap="square" lIns="0" tIns="0" rIns="0" bIns="0" rtlCol="0" anchor="ctr"/>
+          <a:lstStyle/>
+          <a:p>
+            <a:pPr indent="0" marL="0">
+              <a:buNone/>
+            </a:pPr>
+            <a:r>
+              <a:rPr lang="en-US" sz="1250" b="1" dirty="0">
+                <a:solidFill>
+                  <a:srgbClr val="16302E"/>
+                </a:solidFill>
+                <a:latin typeface="Malgun Gothic" pitchFamily="34" charset="0"/>
+                <a:ea typeface="Malgun Gothic" pitchFamily="34" charset="-122"/>
+                <a:cs typeface="Malgun Gothic" pitchFamily="34" charset="-120"/>
+              </a:rPr>
+              <a:t>더데이의원</a:t>
+            </a:r>
+            <a:endParaRPr lang="en-US" sz="1250" dirty="0"/>
+          </a:p>
+        </p:txBody>
+      </p:sp>
+      <p:sp>
+        <p:nvSpPr>
+          <p:cNvPr id="28" name="Text 26"/>
+          <p:cNvSpPr/>
+          <p:nvPr/>
+        </p:nvSpPr>
+        <p:spPr>
+          <a:xfrm>
+            <a:off x="9646920" y="3904488"/>
+            <a:ext cx="1783080" cy="411480"/>
+          </a:xfrm>
+          <a:prstGeom prst="rect">
+            <a:avLst/>
+          </a:prstGeom>
+          <a:noFill/>
+          <a:ln/>
+        </p:spPr>
+        <p:txBody>
+          <a:bodyPr wrap="square" lIns="0" tIns="0" rIns="0" bIns="0" rtlCol="0" anchor="ctr"/>
+          <a:lstStyle/>
+          <a:p>
+            <a:pPr algn="r" indent="0" marL="0">
+              <a:buNone/>
+            </a:pPr>
+            <a:r>
+              <a:rPr lang="en-US" sz="1100" dirty="0">
+                <a:solidFill>
+                  <a:srgbClr val="5B6B6A"/>
+                </a:solidFill>
+                <a:latin typeface="Malgun Gothic" pitchFamily="34" charset="0"/>
+                <a:ea typeface="Malgun Gothic" pitchFamily="34" charset="-122"/>
+                <a:cs typeface="Malgun Gothic" pitchFamily="34" charset="-120"/>
+              </a:rPr>
+              <a:t>월성동</a:t>
+            </a:r>
+            <a:endParaRPr lang="en-US" sz="1100" dirty="0"/>
+          </a:p>
+        </p:txBody>
+      </p:sp>
+      <p:sp>
+        <p:nvSpPr>
+          <p:cNvPr id="29" name="Text 27"/>
+          <p:cNvSpPr/>
+          <p:nvPr/>
+        </p:nvSpPr>
+        <p:spPr>
+          <a:xfrm>
+            <a:off x="6492240" y="4389120"/>
+            <a:ext cx="3200400" cy="411480"/>
+          </a:xfrm>
+          <a:prstGeom prst="rect">
+            <a:avLst/>
+          </a:prstGeom>
+          <a:noFill/>
+          <a:ln/>
+        </p:spPr>
+        <p:txBody>
+          <a:bodyPr wrap="square" lIns="0" tIns="0" rIns="0" bIns="0" rtlCol="0" anchor="ctr"/>
+          <a:lstStyle/>
+          <a:p>
+            <a:pPr indent="0" marL="0">
+              <a:buNone/>
+            </a:pPr>
+            <a:r>
+              <a:rPr lang="en-US" sz="1250" b="1" dirty="0">
+                <a:solidFill>
+                  <a:srgbClr val="16302E"/>
+                </a:solidFill>
+                <a:latin typeface="Malgun Gothic" pitchFamily="34" charset="0"/>
+                <a:ea typeface="Malgun Gothic" pitchFamily="34" charset="-122"/>
+                <a:cs typeface="Malgun Gothic" pitchFamily="34" charset="-120"/>
+              </a:rPr>
+              <a:t>더차오름의원·피부과</a:t>
+            </a:r>
+            <a:endParaRPr lang="en-US" sz="1250" dirty="0"/>
+          </a:p>
+        </p:txBody>
+      </p:sp>
+      <p:sp>
+        <p:nvSpPr>
+          <p:cNvPr id="30" name="Text 28"/>
+          <p:cNvSpPr/>
+          <p:nvPr/>
+        </p:nvSpPr>
+        <p:spPr>
+          <a:xfrm>
+            <a:off x="9646920" y="4389120"/>
+            <a:ext cx="1783080" cy="411480"/>
+          </a:xfrm>
+          <a:prstGeom prst="rect">
+            <a:avLst/>
+          </a:prstGeom>
+          <a:noFill/>
+          <a:ln/>
+        </p:spPr>
+        <p:txBody>
+          <a:bodyPr wrap="square" lIns="0" tIns="0" rIns="0" bIns="0" rtlCol="0" anchor="ctr"/>
+          <a:lstStyle/>
+          <a:p>
+            <a:pPr algn="r" indent="0" marL="0">
+              <a:buNone/>
+            </a:pPr>
+            <a:r>
+              <a:rPr lang="en-US" sz="1100" dirty="0">
+                <a:solidFill>
+                  <a:srgbClr val="5B6B6A"/>
+                </a:solidFill>
+                <a:latin typeface="Malgun Gothic" pitchFamily="34" charset="0"/>
+                <a:ea typeface="Malgun Gothic" pitchFamily="34" charset="-122"/>
+                <a:cs typeface="Malgun Gothic" pitchFamily="34" charset="-120"/>
+              </a:rPr>
+              <a:t>죽전동</a:t>
+            </a:r>
+            <a:endParaRPr lang="en-US" sz="1100" dirty="0"/>
+          </a:p>
+        </p:txBody>
+      </p:sp>
+      <p:sp>
+        <p:nvSpPr>
+          <p:cNvPr id="31" name="Shape 29"/>
+          <p:cNvSpPr/>
+          <p:nvPr/>
+        </p:nvSpPr>
+        <p:spPr>
+          <a:xfrm>
+            <a:off x="548640" y="5074920"/>
+            <a:ext cx="11064240" cy="914400"/>
+          </a:xfrm>
+          <a:prstGeom prst="roundRect">
+            <a:avLst>
+              <a:gd name="adj" fmla="val 10000"/>
+            </a:avLst>
+          </a:prstGeom>
+          <a:solidFill>
+            <a:srgbClr val="0F3B3A"/>
+          </a:solidFill>
+          <a:ln/>
+        </p:spPr>
+      </p:sp>
+      <p:sp>
+        <p:nvSpPr>
+          <p:cNvPr id="32" name="Text 30"/>
+          <p:cNvSpPr/>
+          <p:nvPr/>
+        </p:nvSpPr>
+        <p:spPr>
+          <a:xfrm>
+            <a:off x="822960" y="5074920"/>
+            <a:ext cx="10515600" cy="914400"/>
+          </a:xfrm>
+          <a:prstGeom prst="rect">
+            <a:avLst/>
+          </a:prstGeom>
+          <a:noFill/>
+          <a:ln/>
+        </p:spPr>
+        <p:txBody>
+          <a:bodyPr wrap="square" lIns="0" tIns="0" rIns="0" bIns="0" rtlCol="0" anchor="ctr"/>
           <a:lstStyle/>
           <a:p>
             <a:pPr indent="0" marL="0">
               <a:lnSpc>
-                <a:spcPct val="115000"/>
+                <a:spcPct val="110000"/>
               </a:lnSpc>
               <a:buNone/>
             </a:pPr>
             <a:r>
               <a:rPr lang="en-US" sz="1250" b="1" dirty="0">
                 <a:solidFill>
-                  <a:srgbClr val="16302E"/>
-                </a:solidFill>
-                <a:latin typeface="Malgun Gothic" pitchFamily="34" charset="0"/>
-                <a:ea typeface="Malgun Gothic" pitchFamily="34" charset="-122"/>
-                <a:cs typeface="Malgun Gothic" pitchFamily="34" charset="-120"/>
-              </a:rPr>
-              <a:t>코어 = 40대 (±30·50대).  </a:t>
+                  <a:srgbClr val="2BB79A"/>
+                </a:solidFill>
+                <a:latin typeface="Malgun Gothic" pitchFamily="34" charset="0"/>
+                <a:ea typeface="Malgun Gothic" pitchFamily="34" charset="-122"/>
+                <a:cs typeface="Malgun Gothic" pitchFamily="34" charset="-120"/>
+              </a:rPr>
+              <a:t>입지 인사이트  </a:t>
             </a:r>
             <a:pPr indent="0" marL="0">
               <a:lnSpc>
-                <a:spcPct val="115000"/>
+                <a:spcPct val="110000"/>
               </a:lnSpc>
               <a:buNone/>
             </a:pPr>
             <a:r>
               <a:rPr lang="en-US" sz="1250" dirty="0">
                 <a:solidFill>
-                  <a:srgbClr val="5B6B6A"/>
-                </a:solidFill>
-                <a:latin typeface="Malgun Gothic" pitchFamily="34" charset="0"/>
-                <a:ea typeface="Malgun Gothic" pitchFamily="34" charset="-122"/>
-                <a:cs typeface="Malgun Gothic" pitchFamily="34" charset="-120"/>
-              </a:rPr>
-              <a:t>구매력 있는 세대가 중심.
-</a:t>
-            </a:r>
-            <a:pPr indent="0" marL="0">
-              <a:lnSpc>
-                <a:spcPct val="115000"/>
-              </a:lnSpc>
-              <a:buNone/>
-            </a:pPr>
-            <a:r>
-              <a:rPr lang="en-US" sz="1250" b="1" dirty="0">
-                <a:solidFill>
-                  <a:srgbClr val="16302E"/>
-                </a:solidFill>
-                <a:latin typeface="Malgun Gothic" pitchFamily="34" charset="0"/>
-                <a:ea typeface="Malgun Gothic" pitchFamily="34" charset="-122"/>
-                <a:cs typeface="Malgun Gothic" pitchFamily="34" charset="-120"/>
-              </a:rPr>
-              <a:t>크리에이티브 축:  </a:t>
-            </a:r>
-            <a:pPr indent="0" marL="0">
-              <a:lnSpc>
-                <a:spcPct val="115000"/>
-              </a:lnSpc>
-              <a:buNone/>
-            </a:pPr>
-            <a:r>
-              <a:rPr lang="en-US" sz="1250" dirty="0">
-                <a:solidFill>
-                  <a:srgbClr val="5B6B6A"/>
-                </a:solidFill>
-                <a:latin typeface="Malgun Gothic" pitchFamily="34" charset="0"/>
-                <a:ea typeface="Malgun Gothic" pitchFamily="34" charset="-122"/>
-                <a:cs typeface="Malgun Gothic" pitchFamily="34" charset="-120"/>
-              </a:rPr>
-              <a:t>체형·이벤트 감성보다 건강·대사·리바운드 방지 등 의학적 신뢰 소구가 적중.
-</a:t>
-            </a:r>
-            <a:pPr indent="0" marL="0">
-              <a:lnSpc>
-                <a:spcPct val="115000"/>
-              </a:lnSpc>
-              <a:buNone/>
-            </a:pPr>
-            <a:r>
-              <a:rPr lang="en-US" sz="1250" b="1" dirty="0">
-                <a:solidFill>
-                  <a:srgbClr val="16302E"/>
-                </a:solidFill>
-                <a:latin typeface="Malgun Gothic" pitchFamily="34" charset="0"/>
-                <a:ea typeface="Malgun Gothic" pitchFamily="34" charset="-122"/>
-                <a:cs typeface="Malgun Gothic" pitchFamily="34" charset="-120"/>
-              </a:rPr>
-              <a:t>성별(실측):  </a:t>
-            </a:r>
-            <a:pPr indent="0" marL="0">
-              <a:lnSpc>
-                <a:spcPct val="115000"/>
-              </a:lnSpc>
-              <a:buNone/>
-            </a:pPr>
-            <a:r>
-              <a:rPr lang="en-US" sz="1250" dirty="0">
-                <a:solidFill>
-                  <a:srgbClr val="5B6B6A"/>
-                </a:solidFill>
-                <a:latin typeface="Malgun Gothic" pitchFamily="34" charset="0"/>
-                <a:ea typeface="Malgun Gothic" pitchFamily="34" charset="-122"/>
-                <a:cs typeface="Malgun Gothic" pitchFamily="34" charset="-120"/>
-              </a:rPr>
-              <a:t>여 263,101 &gt; 남 252,041 (여초). 여성 코어 + 남성 40~50대 대사 세그먼트 이원화.</a:t>
+                  <a:srgbClr val="FFFFFF"/>
+                </a:solidFill>
+                <a:latin typeface="Malgun Gothic" pitchFamily="34" charset="0"/>
+                <a:ea typeface="Malgun Gothic" pitchFamily="34" charset="-122"/>
+                <a:cs typeface="Malgun Gothic" pitchFamily="34" charset="-120"/>
+              </a:rPr>
+              <a:t>달구벌대로변 죽전~감삼이 미용·의원 밀집축, 월배권(상인·진천·월성)은 생활밀착 한의원 중심. 전문 비만 브랜드가 얇아 검색·브랜딩 선점 이익이 큼.</a:t>
             </a:r>
             <a:endParaRPr lang="en-US" sz="1250" dirty="0"/>
           </a:p>
@@ -8209,7 +9911,7 @@
       </p:sp>
       <p:sp>
         <p:nvSpPr>
-          <p:cNvPr id="10" name="Text 7"/>
+          <p:cNvPr id="33" name="Text 31"/>
           <p:cNvSpPr/>
           <p:nvPr/>
         </p:nvSpPr>
@@ -8248,7 +9950,7 @@
       </p:sp>
       <p:sp>
         <p:nvSpPr>
-          <p:cNvPr id="11" name="Text 8"/>
+          <p:cNvPr id="34" name="Text 32"/>
           <p:cNvSpPr/>
           <p:nvPr/>
         </p:nvSpPr>
@@ -8350,7 +10052,7 @@
                 <a:ea typeface="Malgun Gothic" pitchFamily="34" charset="-122"/>
                 <a:cs typeface="Malgun Gothic" pitchFamily="34" charset="-120"/>
               </a:rPr>
-              <a:t>④ 다이어트 키워드</a:t>
+              <a:t>③ 남녀·연령 구조</a:t>
             </a:r>
             <a:endParaRPr lang="en-US" sz="1200" dirty="0"/>
           </a:p>
@@ -8389,7 +10091,7 @@
                 <a:ea typeface="Malgun Gothic" pitchFamily="34" charset="-122"/>
                 <a:cs typeface="Malgun Gothic" pitchFamily="34" charset="-120"/>
               </a:rPr>
-              <a:t>위고비·삭센다 주사가 시장을 재편했다</a:t>
+              <a:t>다이어트 소비 코어는 30~50대, 40대 피크</a:t>
             </a:r>
             <a:endParaRPr lang="en-US" sz="3000" dirty="0"/>
           </a:p>
@@ -8441,8 +10143,8 @@
           <p:nvPr/>
         </p:nvGraphicFramePr>
         <p:xfrm>
-          <a:off x="548640" y="1783080"/>
-          <a:ext cx="7680960" cy="4023360"/>
+          <a:off x="548640" y="1737360"/>
+          <a:ext cx="6675120" cy="4206240"/>
         </p:xfrm>
         <a:graphic xmlns:a="http://schemas.openxmlformats.org/drawingml/2006/main">
           <a:graphicData uri="http://schemas.openxmlformats.org/drawingml/2006/chart">
@@ -8459,7 +10161,7 @@
         <p:spPr>
           <a:xfrm>
             <a:off x="548640" y="5806440"/>
-            <a:ext cx="7680960" cy="274320"/>
+            <a:ext cx="6675120" cy="274320"/>
           </a:xfrm>
           <a:prstGeom prst="rect">
             <a:avLst/>
@@ -8483,7 +10185,7 @@
                 <a:ea typeface="Malgun Gothic" pitchFamily="34" charset="-122"/>
                 <a:cs typeface="Malgun Gothic" pitchFamily="34" charset="-120"/>
               </a:rPr>
-              <a:t>Naver DataLab 검색어 지수 (분기 평균, 2023.1~2026.6 · 최대값=100 정규화)</a:t>
+              <a:t>Naver DataLab 쇼핑 '다이어트식품' 지수 (2025.7, 피크=100)</a:t>
             </a:r>
             <a:endParaRPr lang="en-US" sz="900" dirty="0"/>
           </a:p>
@@ -8497,94 +10199,12 @@
         </p:nvSpPr>
         <p:spPr>
           <a:xfrm>
-            <a:off x="8458200" y="1783080"/>
-            <a:ext cx="3154680" cy="1234440"/>
+            <a:off x="7498080" y="1737360"/>
+            <a:ext cx="4114800" cy="4206240"/>
           </a:xfrm>
           <a:prstGeom prst="roundRect">
             <a:avLst>
-              <a:gd name="adj" fmla="val 7407"/>
-            </a:avLst>
-          </a:prstGeom>
-          <a:solidFill>
-            <a:srgbClr val="0F3B3A"/>
-          </a:solidFill>
-          <a:ln/>
-        </p:spPr>
-      </p:sp>
-      <p:sp>
-        <p:nvSpPr>
-          <p:cNvPr id="8" name="Text 5"/>
-          <p:cNvSpPr/>
-          <p:nvPr/>
-        </p:nvSpPr>
-        <p:spPr>
-          <a:xfrm>
-            <a:off x="8641080" y="1920240"/>
-            <a:ext cx="2834640" cy="960120"/>
-          </a:xfrm>
-          <a:prstGeom prst="rect">
-            <a:avLst/>
-          </a:prstGeom>
-          <a:noFill/>
-          <a:ln/>
-        </p:spPr>
-        <p:txBody>
-          <a:bodyPr wrap="square" lIns="0" tIns="0" rIns="0" bIns="0" rtlCol="0" anchor="ctr"/>
-          <a:lstStyle/>
-          <a:p>
-            <a:pPr indent="0" marL="0">
-              <a:lnSpc>
-                <a:spcPct val="105000"/>
-              </a:lnSpc>
-              <a:buNone/>
-            </a:pPr>
-            <a:r>
-              <a:rPr lang="en-US" sz="1800" b="1" dirty="0">
-                <a:solidFill>
-                  <a:srgbClr val="FF6B5B"/>
-                </a:solidFill>
-                <a:latin typeface="Cambria" pitchFamily="34" charset="0"/>
-                <a:ea typeface="Cambria" pitchFamily="34" charset="-122"/>
-                <a:cs typeface="Cambria" pitchFamily="34" charset="-120"/>
-              </a:rPr>
-              <a:t>2024.10
-</a:t>
-            </a:r>
-            <a:pPr indent="0" marL="0">
-              <a:lnSpc>
-                <a:spcPct val="105000"/>
-              </a:lnSpc>
-              <a:buNone/>
-            </a:pPr>
-            <a:r>
-              <a:rPr lang="en-US" sz="1100" dirty="0">
-                <a:solidFill>
-                  <a:srgbClr val="FFFFFF"/>
-                </a:solidFill>
-                <a:latin typeface="Malgun Gothic" pitchFamily="34" charset="0"/>
-                <a:ea typeface="Malgun Gothic" pitchFamily="34" charset="-122"/>
-                <a:cs typeface="Malgun Gothic" pitchFamily="34" charset="-120"/>
-              </a:rPr>
-              <a:t>위고비 국내 상용화 → 주사 검색 폭증</a:t>
-            </a:r>
-            <a:endParaRPr lang="en-US" sz="1800" dirty="0"/>
-          </a:p>
-        </p:txBody>
-      </p:sp>
-      <p:sp>
-        <p:nvSpPr>
-          <p:cNvPr id="9" name="Shape 6"/>
-          <p:cNvSpPr/>
-          <p:nvPr/>
-        </p:nvSpPr>
-        <p:spPr>
-          <a:xfrm>
-            <a:off x="8458200" y="3154680"/>
-            <a:ext cx="3154680" cy="1234440"/>
-          </a:xfrm>
-          <a:prstGeom prst="roundRect">
-            <a:avLst>
-              <a:gd name="adj" fmla="val 7407"/>
+              <a:gd name="adj" fmla="val 2222"/>
             </a:avLst>
           </a:prstGeom>
           <a:solidFill>
@@ -8600,154 +10220,175 @@
       </p:sp>
       <p:sp>
         <p:nvSpPr>
+          <p:cNvPr id="8" name="Text 5"/>
+          <p:cNvSpPr/>
+          <p:nvPr/>
+        </p:nvSpPr>
+        <p:spPr>
+          <a:xfrm>
+            <a:off x="7726680" y="1965960"/>
+            <a:ext cx="3657600" cy="365760"/>
+          </a:xfrm>
+          <a:prstGeom prst="rect">
+            <a:avLst/>
+          </a:prstGeom>
+          <a:noFill/>
+          <a:ln/>
+        </p:spPr>
+        <p:txBody>
+          <a:bodyPr wrap="square" rtlCol="0" anchor="ctr"/>
+          <a:lstStyle/>
+          <a:p>
+            <a:pPr indent="0" marL="0">
+              <a:buNone/>
+            </a:pPr>
+            <a:r>
+              <a:rPr lang="en-US" sz="1500" b="1" dirty="0">
+                <a:solidFill>
+                  <a:srgbClr val="0E7C7B"/>
+                </a:solidFill>
+                <a:latin typeface="Malgun Gothic" pitchFamily="34" charset="0"/>
+                <a:ea typeface="Malgun Gothic" pitchFamily="34" charset="-122"/>
+                <a:cs typeface="Malgun Gothic" pitchFamily="34" charset="-120"/>
+              </a:rPr>
+              <a:t>무엇을 뜻하나</a:t>
+            </a:r>
+            <a:endParaRPr lang="en-US" sz="1500" dirty="0"/>
+          </a:p>
+        </p:txBody>
+      </p:sp>
+      <p:sp>
+        <p:nvSpPr>
+          <p:cNvPr id="9" name="Text 6"/>
+          <p:cNvSpPr/>
+          <p:nvPr/>
+        </p:nvSpPr>
+        <p:spPr>
+          <a:xfrm>
+            <a:off x="7726680" y="2377440"/>
+            <a:ext cx="3703320" cy="3383280"/>
+          </a:xfrm>
+          <a:prstGeom prst="rect">
+            <a:avLst/>
+          </a:prstGeom>
+          <a:noFill/>
+          <a:ln/>
+        </p:spPr>
+        <p:txBody>
+          <a:bodyPr wrap="square" rtlCol="0" anchor="t"/>
+          <a:lstStyle/>
+          <a:p>
+            <a:pPr indent="0" marL="0">
+              <a:lnSpc>
+                <a:spcPct val="115000"/>
+              </a:lnSpc>
+              <a:buNone/>
+            </a:pPr>
+            <a:r>
+              <a:rPr lang="en-US" sz="1250" b="1" dirty="0">
+                <a:solidFill>
+                  <a:srgbClr val="16302E"/>
+                </a:solidFill>
+                <a:latin typeface="Malgun Gothic" pitchFamily="34" charset="0"/>
+                <a:ea typeface="Malgun Gothic" pitchFamily="34" charset="-122"/>
+                <a:cs typeface="Malgun Gothic" pitchFamily="34" charset="-120"/>
+              </a:rPr>
+              <a:t>코어 = 40대 (±30·50대).  </a:t>
+            </a:r>
+            <a:pPr indent="0" marL="0">
+              <a:lnSpc>
+                <a:spcPct val="115000"/>
+              </a:lnSpc>
+              <a:buNone/>
+            </a:pPr>
+            <a:r>
+              <a:rPr lang="en-US" sz="1250" dirty="0">
+                <a:solidFill>
+                  <a:srgbClr val="5B6B6A"/>
+                </a:solidFill>
+                <a:latin typeface="Malgun Gothic" pitchFamily="34" charset="0"/>
+                <a:ea typeface="Malgun Gothic" pitchFamily="34" charset="-122"/>
+                <a:cs typeface="Malgun Gothic" pitchFamily="34" charset="-120"/>
+              </a:rPr>
+              <a:t>구매력 있는 세대가 중심.
+</a:t>
+            </a:r>
+            <a:pPr indent="0" marL="0">
+              <a:lnSpc>
+                <a:spcPct val="115000"/>
+              </a:lnSpc>
+              <a:buNone/>
+            </a:pPr>
+            <a:r>
+              <a:rPr lang="en-US" sz="1250" b="1" dirty="0">
+                <a:solidFill>
+                  <a:srgbClr val="16302E"/>
+                </a:solidFill>
+                <a:latin typeface="Malgun Gothic" pitchFamily="34" charset="0"/>
+                <a:ea typeface="Malgun Gothic" pitchFamily="34" charset="-122"/>
+                <a:cs typeface="Malgun Gothic" pitchFamily="34" charset="-120"/>
+              </a:rPr>
+              <a:t>크리에이티브 축:  </a:t>
+            </a:r>
+            <a:pPr indent="0" marL="0">
+              <a:lnSpc>
+                <a:spcPct val="115000"/>
+              </a:lnSpc>
+              <a:buNone/>
+            </a:pPr>
+            <a:r>
+              <a:rPr lang="en-US" sz="1250" dirty="0">
+                <a:solidFill>
+                  <a:srgbClr val="5B6B6A"/>
+                </a:solidFill>
+                <a:latin typeface="Malgun Gothic" pitchFamily="34" charset="0"/>
+                <a:ea typeface="Malgun Gothic" pitchFamily="34" charset="-122"/>
+                <a:cs typeface="Malgun Gothic" pitchFamily="34" charset="-120"/>
+              </a:rPr>
+              <a:t>체형·이벤트 감성보다 건강·대사·리바운드 방지 등 의학적 신뢰 소구가 적중.
+</a:t>
+            </a:r>
+            <a:pPr indent="0" marL="0">
+              <a:lnSpc>
+                <a:spcPct val="115000"/>
+              </a:lnSpc>
+              <a:buNone/>
+            </a:pPr>
+            <a:r>
+              <a:rPr lang="en-US" sz="1250" b="1" dirty="0">
+                <a:solidFill>
+                  <a:srgbClr val="16302E"/>
+                </a:solidFill>
+                <a:latin typeface="Malgun Gothic" pitchFamily="34" charset="0"/>
+                <a:ea typeface="Malgun Gothic" pitchFamily="34" charset="-122"/>
+                <a:cs typeface="Malgun Gothic" pitchFamily="34" charset="-120"/>
+              </a:rPr>
+              <a:t>성별(실측):  </a:t>
+            </a:r>
+            <a:pPr indent="0" marL="0">
+              <a:lnSpc>
+                <a:spcPct val="115000"/>
+              </a:lnSpc>
+              <a:buNone/>
+            </a:pPr>
+            <a:r>
+              <a:rPr lang="en-US" sz="1250" dirty="0">
+                <a:solidFill>
+                  <a:srgbClr val="5B6B6A"/>
+                </a:solidFill>
+                <a:latin typeface="Malgun Gothic" pitchFamily="34" charset="0"/>
+                <a:ea typeface="Malgun Gothic" pitchFamily="34" charset="-122"/>
+                <a:cs typeface="Malgun Gothic" pitchFamily="34" charset="-120"/>
+              </a:rPr>
+              <a:t>여 263,101 &gt; 남 252,041 (여초). 여성 코어 + 남성 40~50대 대사 세그먼트 이원화.</a:t>
+            </a:r>
+            <a:endParaRPr lang="en-US" sz="1250" dirty="0"/>
+          </a:p>
+        </p:txBody>
+      </p:sp>
+      <p:sp>
+        <p:nvSpPr>
           <p:cNvPr id="10" name="Text 7"/>
-          <p:cNvSpPr/>
-          <p:nvPr/>
-        </p:nvSpPr>
-        <p:spPr>
-          <a:xfrm>
-            <a:off x="8641080" y="3291840"/>
-            <a:ext cx="2834640" cy="960120"/>
-          </a:xfrm>
-          <a:prstGeom prst="rect">
-            <a:avLst/>
-          </a:prstGeom>
-          <a:noFill/>
-          <a:ln/>
-        </p:spPr>
-        <p:txBody>
-          <a:bodyPr wrap="square" lIns="0" tIns="0" rIns="0" bIns="0" rtlCol="0" anchor="ctr"/>
-          <a:lstStyle/>
-          <a:p>
-            <a:pPr indent="0" marL="0">
-              <a:lnSpc>
-                <a:spcPct val="105000"/>
-              </a:lnSpc>
-              <a:buNone/>
-            </a:pPr>
-            <a:r>
-              <a:rPr lang="en-US" sz="1300" b="1" dirty="0">
-                <a:solidFill>
-                  <a:srgbClr val="0E7C7B"/>
-                </a:solidFill>
-                <a:latin typeface="Malgun Gothic" pitchFamily="34" charset="0"/>
-                <a:ea typeface="Malgun Gothic" pitchFamily="34" charset="-122"/>
-                <a:cs typeface="Malgun Gothic" pitchFamily="34" charset="-120"/>
-              </a:rPr>
-              <a:t>↘ 다이어트(일반)
-</a:t>
-            </a:r>
-            <a:pPr indent="0" marL="0">
-              <a:lnSpc>
-                <a:spcPct val="105000"/>
-              </a:lnSpc>
-              <a:buNone/>
-            </a:pPr>
-            <a:r>
-              <a:rPr lang="en-US" sz="1100" dirty="0">
-                <a:solidFill>
-                  <a:srgbClr val="5B6B6A"/>
-                </a:solidFill>
-                <a:latin typeface="Malgun Gothic" pitchFamily="34" charset="0"/>
-                <a:ea typeface="Malgun Gothic" pitchFamily="34" charset="-122"/>
-                <a:cs typeface="Malgun Gothic" pitchFamily="34" charset="-120"/>
-              </a:rPr>
-              <a:t>13.3 → 4.6 지속 하락. 제네릭어 → 의학 시술어로 이동</a:t>
-            </a:r>
-            <a:endParaRPr lang="en-US" sz="1300" dirty="0"/>
-          </a:p>
-        </p:txBody>
-      </p:sp>
-      <p:sp>
-        <p:nvSpPr>
-          <p:cNvPr id="11" name="Shape 8"/>
-          <p:cNvSpPr/>
-          <p:nvPr/>
-        </p:nvSpPr>
-        <p:spPr>
-          <a:xfrm>
-            <a:off x="8458200" y="4526280"/>
-            <a:ext cx="3154680" cy="1280160"/>
-          </a:xfrm>
-          <a:prstGeom prst="roundRect">
-            <a:avLst>
-              <a:gd name="adj" fmla="val 7143"/>
-            </a:avLst>
-          </a:prstGeom>
-          <a:solidFill>
-            <a:srgbClr val="F1F6F5"/>
-          </a:solidFill>
-          <a:ln w="12700">
-            <a:solidFill>
-              <a:srgbClr val="D9E5E3"/>
-            </a:solidFill>
-            <a:prstDash val="solid"/>
-          </a:ln>
-        </p:spPr>
-      </p:sp>
-      <p:sp>
-        <p:nvSpPr>
-          <p:cNvPr id="12" name="Text 9"/>
-          <p:cNvSpPr/>
-          <p:nvPr/>
-        </p:nvSpPr>
-        <p:spPr>
-          <a:xfrm>
-            <a:off x="8641080" y="4663440"/>
-            <a:ext cx="2834640" cy="1005840"/>
-          </a:xfrm>
-          <a:prstGeom prst="rect">
-            <a:avLst/>
-          </a:prstGeom>
-          <a:noFill/>
-          <a:ln/>
-        </p:spPr>
-        <p:txBody>
-          <a:bodyPr wrap="square" lIns="0" tIns="0" rIns="0" bIns="0" rtlCol="0" anchor="ctr"/>
-          <a:lstStyle/>
-          <a:p>
-            <a:pPr indent="0" marL="0">
-              <a:lnSpc>
-                <a:spcPct val="105000"/>
-              </a:lnSpc>
-              <a:buNone/>
-            </a:pPr>
-            <a:r>
-              <a:rPr lang="en-US" sz="1300" b="1" dirty="0">
-                <a:solidFill>
-                  <a:srgbClr val="FF6B5B"/>
-                </a:solidFill>
-                <a:latin typeface="Malgun Gothic" pitchFamily="34" charset="0"/>
-                <a:ea typeface="Malgun Gothic" pitchFamily="34" charset="-122"/>
-                <a:cs typeface="Malgun Gothic" pitchFamily="34" charset="-120"/>
-              </a:rPr>
-              <a:t>계절성
-</a:t>
-            </a:r>
-            <a:pPr indent="0" marL="0">
-              <a:lnSpc>
-                <a:spcPct val="105000"/>
-              </a:lnSpc>
-              <a:buNone/>
-            </a:pPr>
-            <a:r>
-              <a:rPr lang="en-US" sz="1100" dirty="0">
-                <a:solidFill>
-                  <a:srgbClr val="5B6B6A"/>
-                </a:solidFill>
-                <a:latin typeface="Malgun Gothic" pitchFamily="34" charset="0"/>
-                <a:ea typeface="Malgun Gothic" pitchFamily="34" charset="-122"/>
-                <a:cs typeface="Malgun Gothic" pitchFamily="34" charset="-120"/>
-              </a:rPr>
-              <a:t>1~5월 강세, 11~12월 저점 → 광고는 12~1월 선행 배치</a:t>
-            </a:r>
-            <a:endParaRPr lang="en-US" sz="1300" dirty="0"/>
-          </a:p>
-        </p:txBody>
-      </p:sp>
-      <p:sp>
-        <p:nvSpPr>
-          <p:cNvPr id="13" name="Text 10"/>
           <p:cNvSpPr/>
           <p:nvPr/>
         </p:nvSpPr>
@@ -8786,7 +10427,7 @@
       </p:sp>
       <p:sp>
         <p:nvSpPr>
-          <p:cNvPr id="14" name="Text 11"/>
+          <p:cNvPr id="11" name="Text 8"/>
           <p:cNvSpPr/>
           <p:nvPr/>
         </p:nvSpPr>
@@ -8888,7 +10529,7 @@
                 <a:ea typeface="Malgun Gothic" pitchFamily="34" charset="-122"/>
                 <a:cs typeface="Malgun Gothic" pitchFamily="34" charset="-120"/>
               </a:rPr>
-              <a:t>전략 · 포지셔닝</a:t>
+              <a:t>④ 다이어트 키워드</a:t>
             </a:r>
             <a:endParaRPr lang="en-US" sz="1200" dirty="0"/>
           </a:p>
@@ -8927,7 +10568,7 @@
                 <a:ea typeface="Malgun Gothic" pitchFamily="34" charset="-122"/>
                 <a:cs typeface="Malgun Gothic" pitchFamily="34" charset="-120"/>
               </a:rPr>
-              <a:t>빈틈을 파고드는 4개 축</a:t>
+              <a:t>위고비·삭센다 주사가 시장을 재편했다</a:t>
             </a:r>
             <a:endParaRPr lang="en-US" sz="3000" dirty="0"/>
           </a:p>
@@ -8972,20 +10613,157 @@
           </a:p>
         </p:txBody>
       </p:sp>
-      <p:sp>
-        <p:nvSpPr>
-          <p:cNvPr id="5" name="Shape 3"/>
-          <p:cNvSpPr/>
-          <p:nvPr/>
-        </p:nvSpPr>
-        <p:spPr>
-          <a:xfrm>
-            <a:off x="548640" y="1737360"/>
-            <a:ext cx="2606040" cy="4114800"/>
+      <p:graphicFrame>
+        <p:nvGraphicFramePr>
+          <p:cNvPr id="5" name="Chart 0" descr=""/>
+          <p:cNvGraphicFramePr/>
+          <p:nvPr/>
+        </p:nvGraphicFramePr>
+        <p:xfrm>
+          <a:off x="548640" y="1783080"/>
+          <a:ext cx="7680960" cy="4023360"/>
+        </p:xfrm>
+        <a:graphic xmlns:a="http://schemas.openxmlformats.org/drawingml/2006/main">
+          <a:graphicData uri="http://schemas.openxmlformats.org/drawingml/2006/chart">
+            <c:chart xmlns:c="http://schemas.openxmlformats.org/drawingml/2006/chart" r:id="rId1"/>
+          </a:graphicData>
+        </a:graphic>
+      </p:graphicFrame>
+      <p:sp>
+        <p:nvSpPr>
+          <p:cNvPr id="6" name="Text 3"/>
+          <p:cNvSpPr/>
+          <p:nvPr/>
+        </p:nvSpPr>
+        <p:spPr>
+          <a:xfrm>
+            <a:off x="548640" y="5806440"/>
+            <a:ext cx="7680960" cy="274320"/>
+          </a:xfrm>
+          <a:prstGeom prst="rect">
+            <a:avLst/>
+          </a:prstGeom>
+          <a:noFill/>
+          <a:ln/>
+        </p:spPr>
+        <p:txBody>
+          <a:bodyPr wrap="square" rtlCol="0" anchor="ctr"/>
+          <a:lstStyle/>
+          <a:p>
+            <a:pPr indent="0" marL="0">
+              <a:buNone/>
+            </a:pPr>
+            <a:r>
+              <a:rPr lang="en-US" sz="900" i="1" dirty="0">
+                <a:solidFill>
+                  <a:srgbClr val="5B6B6A"/>
+                </a:solidFill>
+                <a:latin typeface="Malgun Gothic" pitchFamily="34" charset="0"/>
+                <a:ea typeface="Malgun Gothic" pitchFamily="34" charset="-122"/>
+                <a:cs typeface="Malgun Gothic" pitchFamily="34" charset="-120"/>
+              </a:rPr>
+              <a:t>Naver DataLab 검색어 지수 (분기 평균, 2023.1~2026.6 · 최대값=100 정규화)</a:t>
+            </a:r>
+            <a:endParaRPr lang="en-US" sz="900" dirty="0"/>
+          </a:p>
+        </p:txBody>
+      </p:sp>
+      <p:sp>
+        <p:nvSpPr>
+          <p:cNvPr id="7" name="Shape 4"/>
+          <p:cNvSpPr/>
+          <p:nvPr/>
+        </p:nvSpPr>
+        <p:spPr>
+          <a:xfrm>
+            <a:off x="8458200" y="1783080"/>
+            <a:ext cx="3154680" cy="1234440"/>
           </a:xfrm>
           <a:prstGeom prst="roundRect">
             <a:avLst>
-              <a:gd name="adj" fmla="val 3509"/>
+              <a:gd name="adj" fmla="val 7407"/>
+            </a:avLst>
+          </a:prstGeom>
+          <a:solidFill>
+            <a:srgbClr val="0F3B3A"/>
+          </a:solidFill>
+          <a:ln/>
+        </p:spPr>
+      </p:sp>
+      <p:sp>
+        <p:nvSpPr>
+          <p:cNvPr id="8" name="Text 5"/>
+          <p:cNvSpPr/>
+          <p:nvPr/>
+        </p:nvSpPr>
+        <p:spPr>
+          <a:xfrm>
+            <a:off x="8641080" y="1920240"/>
+            <a:ext cx="2834640" cy="960120"/>
+          </a:xfrm>
+          <a:prstGeom prst="rect">
+            <a:avLst/>
+          </a:prstGeom>
+          <a:noFill/>
+          <a:ln/>
+        </p:spPr>
+        <p:txBody>
+          <a:bodyPr wrap="square" lIns="0" tIns="0" rIns="0" bIns="0" rtlCol="0" anchor="ctr"/>
+          <a:lstStyle/>
+          <a:p>
+            <a:pPr indent="0" marL="0">
+              <a:lnSpc>
+                <a:spcPct val="105000"/>
+              </a:lnSpc>
+              <a:buNone/>
+            </a:pPr>
+            <a:r>
+              <a:rPr lang="en-US" sz="1800" b="1" dirty="0">
+                <a:solidFill>
+                  <a:srgbClr val="FF6B5B"/>
+                </a:solidFill>
+                <a:latin typeface="Cambria" pitchFamily="34" charset="0"/>
+                <a:ea typeface="Cambria" pitchFamily="34" charset="-122"/>
+                <a:cs typeface="Cambria" pitchFamily="34" charset="-120"/>
+              </a:rPr>
+              <a:t>2024.10
+</a:t>
+            </a:r>
+            <a:pPr indent="0" marL="0">
+              <a:lnSpc>
+                <a:spcPct val="105000"/>
+              </a:lnSpc>
+              <a:buNone/>
+            </a:pPr>
+            <a:r>
+              <a:rPr lang="en-US" sz="1100" dirty="0">
+                <a:solidFill>
+                  <a:srgbClr val="FFFFFF"/>
+                </a:solidFill>
+                <a:latin typeface="Malgun Gothic" pitchFamily="34" charset="0"/>
+                <a:ea typeface="Malgun Gothic" pitchFamily="34" charset="-122"/>
+                <a:cs typeface="Malgun Gothic" pitchFamily="34" charset="-120"/>
+              </a:rPr>
+              <a:t>위고비 국내 상용화 → 주사 검색 폭증</a:t>
+            </a:r>
+            <a:endParaRPr lang="en-US" sz="1800" dirty="0"/>
+          </a:p>
+        </p:txBody>
+      </p:sp>
+      <p:sp>
+        <p:nvSpPr>
+          <p:cNvPr id="9" name="Shape 6"/>
+          <p:cNvSpPr/>
+          <p:nvPr/>
+        </p:nvSpPr>
+        <p:spPr>
+          <a:xfrm>
+            <a:off x="8458200" y="3154680"/>
+            <a:ext cx="3154680" cy="1234440"/>
+          </a:xfrm>
+          <a:prstGeom prst="roundRect">
+            <a:avLst>
+              <a:gd name="adj" fmla="val 7407"/>
             </a:avLst>
           </a:prstGeom>
           <a:solidFill>
@@ -9001,160 +10779,78 @@
       </p:sp>
       <p:sp>
         <p:nvSpPr>
-          <p:cNvPr id="6" name="Shape 4"/>
-          <p:cNvSpPr/>
-          <p:nvPr/>
-        </p:nvSpPr>
-        <p:spPr>
-          <a:xfrm>
-            <a:off x="548640" y="1737360"/>
-            <a:ext cx="2606040" cy="868680"/>
+          <p:cNvPr id="10" name="Text 7"/>
+          <p:cNvSpPr/>
+          <p:nvPr/>
+        </p:nvSpPr>
+        <p:spPr>
+          <a:xfrm>
+            <a:off x="8641080" y="3291840"/>
+            <a:ext cx="2834640" cy="960120"/>
+          </a:xfrm>
+          <a:prstGeom prst="rect">
+            <a:avLst/>
+          </a:prstGeom>
+          <a:noFill/>
+          <a:ln/>
+        </p:spPr>
+        <p:txBody>
+          <a:bodyPr wrap="square" lIns="0" tIns="0" rIns="0" bIns="0" rtlCol="0" anchor="ctr"/>
+          <a:lstStyle/>
+          <a:p>
+            <a:pPr indent="0" marL="0">
+              <a:lnSpc>
+                <a:spcPct val="105000"/>
+              </a:lnSpc>
+              <a:buNone/>
+            </a:pPr>
+            <a:r>
+              <a:rPr lang="en-US" sz="1300" b="1" dirty="0">
+                <a:solidFill>
+                  <a:srgbClr val="0E7C7B"/>
+                </a:solidFill>
+                <a:latin typeface="Malgun Gothic" pitchFamily="34" charset="0"/>
+                <a:ea typeface="Malgun Gothic" pitchFamily="34" charset="-122"/>
+                <a:cs typeface="Malgun Gothic" pitchFamily="34" charset="-120"/>
+              </a:rPr>
+              <a:t>↘ 다이어트(일반)
+</a:t>
+            </a:r>
+            <a:pPr indent="0" marL="0">
+              <a:lnSpc>
+                <a:spcPct val="105000"/>
+              </a:lnSpc>
+              <a:buNone/>
+            </a:pPr>
+            <a:r>
+              <a:rPr lang="en-US" sz="1100" dirty="0">
+                <a:solidFill>
+                  <a:srgbClr val="5B6B6A"/>
+                </a:solidFill>
+                <a:latin typeface="Malgun Gothic" pitchFamily="34" charset="0"/>
+                <a:ea typeface="Malgun Gothic" pitchFamily="34" charset="-122"/>
+                <a:cs typeface="Malgun Gothic" pitchFamily="34" charset="-120"/>
+              </a:rPr>
+              <a:t>13.3 → 4.6 지속 하락. 제네릭어 → 의학 시술어로 이동</a:t>
+            </a:r>
+            <a:endParaRPr lang="en-US" sz="1300" dirty="0"/>
+          </a:p>
+        </p:txBody>
+      </p:sp>
+      <p:sp>
+        <p:nvSpPr>
+          <p:cNvPr id="11" name="Shape 8"/>
+          <p:cNvSpPr/>
+          <p:nvPr/>
+        </p:nvSpPr>
+        <p:spPr>
+          <a:xfrm>
+            <a:off x="8458200" y="4526280"/>
+            <a:ext cx="3154680" cy="1280160"/>
           </a:xfrm>
           <a:prstGeom prst="roundRect">
             <a:avLst>
-              <a:gd name="adj" fmla="val 10526"/>
-            </a:avLst>
-          </a:prstGeom>
-          <a:solidFill>
-            <a:srgbClr val="0E7C7B"/>
-          </a:solidFill>
-          <a:ln/>
-        </p:spPr>
-      </p:sp>
-      <p:sp>
-        <p:nvSpPr>
-          <p:cNvPr id="7" name="Text 5"/>
-          <p:cNvSpPr/>
-          <p:nvPr/>
-        </p:nvSpPr>
-        <p:spPr>
-          <a:xfrm>
-            <a:off x="731520" y="1737360"/>
-            <a:ext cx="2240280" cy="868680"/>
-          </a:xfrm>
-          <a:prstGeom prst="rect">
-            <a:avLst/>
-          </a:prstGeom>
-          <a:noFill/>
-          <a:ln/>
-        </p:spPr>
-        <p:txBody>
-          <a:bodyPr wrap="square" lIns="0" tIns="0" rIns="0" bIns="0" rtlCol="0" anchor="ctr"/>
-          <a:lstStyle/>
-          <a:p>
-            <a:pPr indent="0" marL="0">
-              <a:buNone/>
-            </a:pPr>
-            <a:r>
-              <a:rPr lang="en-US" sz="1400" b="1" dirty="0">
-                <a:solidFill>
-                  <a:srgbClr val="FFFFFF"/>
-                </a:solidFill>
-                <a:latin typeface="Malgun Gothic" pitchFamily="34" charset="0"/>
-                <a:ea typeface="Malgun Gothic" pitchFamily="34" charset="-122"/>
-                <a:cs typeface="Malgun Gothic" pitchFamily="34" charset="-120"/>
-              </a:rPr>
-              <a:t>포지션</a:t>
-            </a:r>
-            <a:endParaRPr lang="en-US" sz="1400" dirty="0"/>
-          </a:p>
-        </p:txBody>
-      </p:sp>
-      <p:sp>
-        <p:nvSpPr>
-          <p:cNvPr id="8" name="Text 6"/>
-          <p:cNvSpPr/>
-          <p:nvPr/>
-        </p:nvSpPr>
-        <p:spPr>
-          <a:xfrm>
-            <a:off x="749808" y="2788920"/>
-            <a:ext cx="2240280" cy="914400"/>
-          </a:xfrm>
-          <a:prstGeom prst="rect">
-            <a:avLst/>
-          </a:prstGeom>
-          <a:noFill/>
-          <a:ln/>
-        </p:spPr>
-        <p:txBody>
-          <a:bodyPr wrap="square" rtlCol="0" anchor="t"/>
-          <a:lstStyle/>
-          <a:p>
-            <a:pPr indent="0" marL="0">
-              <a:buNone/>
-            </a:pPr>
-            <a:r>
-              <a:rPr lang="en-US" sz="1600" b="1" dirty="0">
-                <a:solidFill>
-                  <a:srgbClr val="16302E"/>
-                </a:solidFill>
-                <a:latin typeface="Malgun Gothic" pitchFamily="34" charset="0"/>
-                <a:ea typeface="Malgun Gothic" pitchFamily="34" charset="-122"/>
-                <a:cs typeface="Malgun Gothic" pitchFamily="34" charset="-120"/>
-              </a:rPr>
-              <a:t>양방 의학 비만치료</a:t>
-            </a:r>
-            <a:endParaRPr lang="en-US" sz="1600" dirty="0"/>
-          </a:p>
-        </p:txBody>
-      </p:sp>
-      <p:sp>
-        <p:nvSpPr>
-          <p:cNvPr id="9" name="Text 7"/>
-          <p:cNvSpPr/>
-          <p:nvPr/>
-        </p:nvSpPr>
-        <p:spPr>
-          <a:xfrm>
-            <a:off x="749808" y="3749040"/>
-            <a:ext cx="2240280" cy="1920240"/>
-          </a:xfrm>
-          <a:prstGeom prst="rect">
-            <a:avLst/>
-          </a:prstGeom>
-          <a:noFill/>
-          <a:ln/>
-        </p:spPr>
-        <p:txBody>
-          <a:bodyPr wrap="square" rtlCol="0" anchor="t"/>
-          <a:lstStyle/>
-          <a:p>
-            <a:pPr indent="0" marL="0">
-              <a:lnSpc>
-                <a:spcPct val="120000"/>
-              </a:lnSpc>
-              <a:buNone/>
-            </a:pPr>
-            <a:r>
-              <a:rPr lang="en-US" sz="1200" dirty="0">
-                <a:solidFill>
-                  <a:srgbClr val="5B6B6A"/>
-                </a:solidFill>
-                <a:latin typeface="Malgun Gothic" pitchFamily="34" charset="0"/>
-                <a:ea typeface="Malgun Gothic" pitchFamily="34" charset="-122"/>
-                <a:cs typeface="Malgun Gothic" pitchFamily="34" charset="-120"/>
-              </a:rPr>
-              <a:t>위고비·삭센다·식욕억제·대사 관리로 한방 편중 시장의 빈틈 공략.</a:t>
-            </a:r>
-            <a:endParaRPr lang="en-US" sz="1200" dirty="0"/>
-          </a:p>
-        </p:txBody>
-      </p:sp>
-      <p:sp>
-        <p:nvSpPr>
-          <p:cNvPr id="10" name="Shape 8"/>
-          <p:cNvSpPr/>
-          <p:nvPr/>
-        </p:nvSpPr>
-        <p:spPr>
-          <a:xfrm>
-            <a:off x="3337560" y="1737360"/>
-            <a:ext cx="2606040" cy="4114800"/>
-          </a:xfrm>
-          <a:prstGeom prst="roundRect">
-            <a:avLst>
-              <a:gd name="adj" fmla="val 3509"/>
+              <a:gd name="adj" fmla="val 7143"/>
             </a:avLst>
           </a:prstGeom>
           <a:solidFill>
@@ -9170,36 +10866,14 @@
       </p:sp>
       <p:sp>
         <p:nvSpPr>
-          <p:cNvPr id="11" name="Shape 9"/>
-          <p:cNvSpPr/>
-          <p:nvPr/>
-        </p:nvSpPr>
-        <p:spPr>
-          <a:xfrm>
-            <a:off x="3337560" y="1737360"/>
-            <a:ext cx="2606040" cy="868680"/>
-          </a:xfrm>
-          <a:prstGeom prst="roundRect">
-            <a:avLst>
-              <a:gd name="adj" fmla="val 10526"/>
-            </a:avLst>
-          </a:prstGeom>
-          <a:solidFill>
-            <a:srgbClr val="FF6B5B"/>
-          </a:solidFill>
-          <a:ln/>
-        </p:spPr>
-      </p:sp>
-      <p:sp>
-        <p:nvSpPr>
-          <p:cNvPr id="12" name="Text 10"/>
-          <p:cNvSpPr/>
-          <p:nvPr/>
-        </p:nvSpPr>
-        <p:spPr>
-          <a:xfrm>
-            <a:off x="3520440" y="1737360"/>
-            <a:ext cx="2240280" cy="868680"/>
+          <p:cNvPr id="12" name="Text 9"/>
+          <p:cNvSpPr/>
+          <p:nvPr/>
+        </p:nvSpPr>
+        <p:spPr>
+          <a:xfrm>
+            <a:off x="8641080" y="4663440"/>
+            <a:ext cx="2834640" cy="1005840"/>
           </a:xfrm>
           <a:prstGeom prst="rect">
             <a:avLst/>
@@ -9212,91 +10886,31 @@
           <a:lstStyle/>
           <a:p>
             <a:pPr indent="0" marL="0">
-              <a:buNone/>
-            </a:pPr>
-            <a:r>
-              <a:rPr lang="en-US" sz="1400" b="1" dirty="0">
-                <a:solidFill>
-                  <a:srgbClr val="FFFFFF"/>
-                </a:solidFill>
-                <a:latin typeface="Malgun Gothic" pitchFamily="34" charset="0"/>
-                <a:ea typeface="Malgun Gothic" pitchFamily="34" charset="-122"/>
-                <a:cs typeface="Malgun Gothic" pitchFamily="34" charset="-120"/>
-              </a:rPr>
-              <a:t>타깃</a:t>
-            </a:r>
-            <a:endParaRPr lang="en-US" sz="1400" dirty="0"/>
-          </a:p>
-        </p:txBody>
-      </p:sp>
-      <p:sp>
-        <p:nvSpPr>
-          <p:cNvPr id="13" name="Text 11"/>
-          <p:cNvSpPr/>
-          <p:nvPr/>
-        </p:nvSpPr>
-        <p:spPr>
-          <a:xfrm>
-            <a:off x="3538728" y="2788920"/>
-            <a:ext cx="2240280" cy="914400"/>
-          </a:xfrm>
-          <a:prstGeom prst="rect">
-            <a:avLst/>
-          </a:prstGeom>
-          <a:noFill/>
-          <a:ln/>
-        </p:spPr>
-        <p:txBody>
-          <a:bodyPr wrap="square" rtlCol="0" anchor="t"/>
-          <a:lstStyle/>
-          <a:p>
-            <a:pPr indent="0" marL="0">
-              <a:buNone/>
-            </a:pPr>
-            <a:r>
-              <a:rPr lang="en-US" sz="1600" b="1" dirty="0">
-                <a:solidFill>
-                  <a:srgbClr val="16302E"/>
-                </a:solidFill>
-                <a:latin typeface="Malgun Gothic" pitchFamily="34" charset="0"/>
-                <a:ea typeface="Malgun Gothic" pitchFamily="34" charset="-122"/>
-                <a:cs typeface="Malgun Gothic" pitchFamily="34" charset="-120"/>
-              </a:rPr>
-              <a:t>40대 코어 · 이원화</a:t>
-            </a:r>
-            <a:endParaRPr lang="en-US" sz="1600" dirty="0"/>
-          </a:p>
-        </p:txBody>
-      </p:sp>
-      <p:sp>
-        <p:nvSpPr>
-          <p:cNvPr id="14" name="Text 12"/>
-          <p:cNvSpPr/>
-          <p:nvPr/>
-        </p:nvSpPr>
-        <p:spPr>
-          <a:xfrm>
-            <a:off x="3538728" y="3749040"/>
-            <a:ext cx="2240280" cy="1920240"/>
-          </a:xfrm>
-          <a:prstGeom prst="rect">
-            <a:avLst/>
-          </a:prstGeom>
-          <a:noFill/>
-          <a:ln/>
-        </p:spPr>
-        <p:txBody>
-          <a:bodyPr wrap="square" rtlCol="0" anchor="t"/>
-          <a:lstStyle/>
-          <a:p>
-            <a:pPr indent="0" marL="0">
               <a:lnSpc>
-                <a:spcPct val="120000"/>
+                <a:spcPct val="105000"/>
               </a:lnSpc>
               <a:buNone/>
             </a:pPr>
             <a:r>
-              <a:rPr lang="en-US" sz="1200" dirty="0">
+              <a:rPr lang="en-US" sz="1300" b="1" dirty="0">
+                <a:solidFill>
+                  <a:srgbClr val="FF6B5B"/>
+                </a:solidFill>
+                <a:latin typeface="Malgun Gothic" pitchFamily="34" charset="0"/>
+                <a:ea typeface="Malgun Gothic" pitchFamily="34" charset="-122"/>
+                <a:cs typeface="Malgun Gothic" pitchFamily="34" charset="-120"/>
+              </a:rPr>
+              <a:t>계절성
+</a:t>
+            </a:r>
+            <a:pPr indent="0" marL="0">
+              <a:lnSpc>
+                <a:spcPct val="105000"/>
+              </a:lnSpc>
+              <a:buNone/>
+            </a:pPr>
+            <a:r>
+              <a:rPr lang="en-US" sz="1100" dirty="0">
                 <a:solidFill>
                   <a:srgbClr val="5B6B6A"/>
                 </a:solidFill>
@@ -9304,353 +10918,15 @@
                 <a:ea typeface="Malgun Gothic" pitchFamily="34" charset="-122"/>
                 <a:cs typeface="Malgun Gothic" pitchFamily="34" charset="-120"/>
               </a:rPr>
-              <a:t>여성 30~40대(체형·건강) + 남성 40~50대(대사·검진 연계) 이원 카피.</a:t>
-            </a:r>
-            <a:endParaRPr lang="en-US" sz="1200" dirty="0"/>
-          </a:p>
-        </p:txBody>
-      </p:sp>
-      <p:sp>
-        <p:nvSpPr>
-          <p:cNvPr id="15" name="Shape 13"/>
-          <p:cNvSpPr/>
-          <p:nvPr/>
-        </p:nvSpPr>
-        <p:spPr>
-          <a:xfrm>
-            <a:off x="6126480" y="1737360"/>
-            <a:ext cx="2606040" cy="4114800"/>
-          </a:xfrm>
-          <a:prstGeom prst="roundRect">
-            <a:avLst>
-              <a:gd name="adj" fmla="val 3509"/>
-            </a:avLst>
-          </a:prstGeom>
-          <a:solidFill>
-            <a:srgbClr val="F1F6F5"/>
-          </a:solidFill>
-          <a:ln w="12700">
-            <a:solidFill>
-              <a:srgbClr val="D9E5E3"/>
-            </a:solidFill>
-            <a:prstDash val="solid"/>
-          </a:ln>
-        </p:spPr>
-      </p:sp>
-      <p:sp>
-        <p:nvSpPr>
-          <p:cNvPr id="16" name="Shape 14"/>
-          <p:cNvSpPr/>
-          <p:nvPr/>
-        </p:nvSpPr>
-        <p:spPr>
-          <a:xfrm>
-            <a:off x="6126480" y="1737360"/>
-            <a:ext cx="2606040" cy="868680"/>
-          </a:xfrm>
-          <a:prstGeom prst="roundRect">
-            <a:avLst>
-              <a:gd name="adj" fmla="val 10526"/>
-            </a:avLst>
-          </a:prstGeom>
-          <a:solidFill>
-            <a:srgbClr val="2BB79A"/>
-          </a:solidFill>
-          <a:ln/>
-        </p:spPr>
-      </p:sp>
-      <p:sp>
-        <p:nvSpPr>
-          <p:cNvPr id="17" name="Text 15"/>
-          <p:cNvSpPr/>
-          <p:nvPr/>
-        </p:nvSpPr>
-        <p:spPr>
-          <a:xfrm>
-            <a:off x="6309360" y="1737360"/>
-            <a:ext cx="2240280" cy="868680"/>
-          </a:xfrm>
-          <a:prstGeom prst="rect">
-            <a:avLst/>
-          </a:prstGeom>
-          <a:noFill/>
-          <a:ln/>
-        </p:spPr>
-        <p:txBody>
-          <a:bodyPr wrap="square" lIns="0" tIns="0" rIns="0" bIns="0" rtlCol="0" anchor="ctr"/>
-          <a:lstStyle/>
-          <a:p>
-            <a:pPr indent="0" marL="0">
-              <a:buNone/>
-            </a:pPr>
-            <a:r>
-              <a:rPr lang="en-US" sz="1400" b="1" dirty="0">
-                <a:solidFill>
-                  <a:srgbClr val="FFFFFF"/>
-                </a:solidFill>
-                <a:latin typeface="Malgun Gothic" pitchFamily="34" charset="0"/>
-                <a:ea typeface="Malgun Gothic" pitchFamily="34" charset="-122"/>
-                <a:cs typeface="Malgun Gothic" pitchFamily="34" charset="-120"/>
-              </a:rPr>
-              <a:t>키워드</a:t>
-            </a:r>
-            <a:endParaRPr lang="en-US" sz="1400" dirty="0"/>
-          </a:p>
-        </p:txBody>
-      </p:sp>
-      <p:sp>
-        <p:nvSpPr>
-          <p:cNvPr id="18" name="Text 16"/>
-          <p:cNvSpPr/>
-          <p:nvPr/>
-        </p:nvSpPr>
-        <p:spPr>
-          <a:xfrm>
-            <a:off x="6327648" y="2788920"/>
-            <a:ext cx="2240280" cy="914400"/>
-          </a:xfrm>
-          <a:prstGeom prst="rect">
-            <a:avLst/>
-          </a:prstGeom>
-          <a:noFill/>
-          <a:ln/>
-        </p:spPr>
-        <p:txBody>
-          <a:bodyPr wrap="square" rtlCol="0" anchor="t"/>
-          <a:lstStyle/>
-          <a:p>
-            <a:pPr indent="0" marL="0">
-              <a:buNone/>
-            </a:pPr>
-            <a:r>
-              <a:rPr lang="en-US" sz="1600" b="1" dirty="0">
-                <a:solidFill>
-                  <a:srgbClr val="16302E"/>
-                </a:solidFill>
-                <a:latin typeface="Malgun Gothic" pitchFamily="34" charset="0"/>
-                <a:ea typeface="Malgun Gothic" pitchFamily="34" charset="-122"/>
-                <a:cs typeface="Malgun Gothic" pitchFamily="34" charset="-120"/>
-              </a:rPr>
-              <a:t>시술어 + 지역 롱테일</a:t>
-            </a:r>
-            <a:endParaRPr lang="en-US" sz="1600" dirty="0"/>
-          </a:p>
-        </p:txBody>
-      </p:sp>
-      <p:sp>
-        <p:nvSpPr>
-          <p:cNvPr id="19" name="Text 17"/>
-          <p:cNvSpPr/>
-          <p:nvPr/>
-        </p:nvSpPr>
-        <p:spPr>
-          <a:xfrm>
-            <a:off x="6327648" y="3749040"/>
-            <a:ext cx="2240280" cy="1920240"/>
-          </a:xfrm>
-          <a:prstGeom prst="rect">
-            <a:avLst/>
-          </a:prstGeom>
-          <a:noFill/>
-          <a:ln/>
-        </p:spPr>
-        <p:txBody>
-          <a:bodyPr wrap="square" rtlCol="0" anchor="t"/>
-          <a:lstStyle/>
-          <a:p>
-            <a:pPr indent="0" marL="0">
-              <a:lnSpc>
-                <a:spcPct val="120000"/>
-              </a:lnSpc>
-              <a:buNone/>
-            </a:pPr>
-            <a:r>
-              <a:rPr lang="en-US" sz="1200" dirty="0">
-                <a:solidFill>
-                  <a:srgbClr val="5B6B6A"/>
-                </a:solidFill>
-                <a:latin typeface="Malgun Gothic" pitchFamily="34" charset="0"/>
-                <a:ea typeface="Malgun Gothic" pitchFamily="34" charset="-122"/>
-                <a:cs typeface="Malgun Gothic" pitchFamily="34" charset="-120"/>
-              </a:rPr>
-              <a:t>'위고비/삭센다/다이어트주사' 선점 + '대구·성서·월배·죽전' 롱테일 SEO/GEO.</a:t>
-            </a:r>
-            <a:endParaRPr lang="en-US" sz="1200" dirty="0"/>
-          </a:p>
-        </p:txBody>
-      </p:sp>
-      <p:sp>
-        <p:nvSpPr>
-          <p:cNvPr id="20" name="Shape 18"/>
-          <p:cNvSpPr/>
-          <p:nvPr/>
-        </p:nvSpPr>
-        <p:spPr>
-          <a:xfrm>
-            <a:off x="8915400" y="1737360"/>
-            <a:ext cx="2606040" cy="4114800"/>
-          </a:xfrm>
-          <a:prstGeom prst="roundRect">
-            <a:avLst>
-              <a:gd name="adj" fmla="val 3509"/>
-            </a:avLst>
-          </a:prstGeom>
-          <a:solidFill>
-            <a:srgbClr val="F1F6F5"/>
-          </a:solidFill>
-          <a:ln w="12700">
-            <a:solidFill>
-              <a:srgbClr val="D9E5E3"/>
-            </a:solidFill>
-            <a:prstDash val="solid"/>
-          </a:ln>
-        </p:spPr>
-      </p:sp>
-      <p:sp>
-        <p:nvSpPr>
-          <p:cNvPr id="21" name="Shape 19"/>
-          <p:cNvSpPr/>
-          <p:nvPr/>
-        </p:nvSpPr>
-        <p:spPr>
-          <a:xfrm>
-            <a:off x="8915400" y="1737360"/>
-            <a:ext cx="2606040" cy="868680"/>
-          </a:xfrm>
-          <a:prstGeom prst="roundRect">
-            <a:avLst>
-              <a:gd name="adj" fmla="val 10526"/>
-            </a:avLst>
-          </a:prstGeom>
-          <a:solidFill>
-            <a:srgbClr val="0F3B3A"/>
-          </a:solidFill>
-          <a:ln/>
-        </p:spPr>
-      </p:sp>
-      <p:sp>
-        <p:nvSpPr>
-          <p:cNvPr id="22" name="Text 20"/>
-          <p:cNvSpPr/>
-          <p:nvPr/>
-        </p:nvSpPr>
-        <p:spPr>
-          <a:xfrm>
-            <a:off x="9098280" y="1737360"/>
-            <a:ext cx="2240280" cy="868680"/>
-          </a:xfrm>
-          <a:prstGeom prst="rect">
-            <a:avLst/>
-          </a:prstGeom>
-          <a:noFill/>
-          <a:ln/>
-        </p:spPr>
-        <p:txBody>
-          <a:bodyPr wrap="square" lIns="0" tIns="0" rIns="0" bIns="0" rtlCol="0" anchor="ctr"/>
-          <a:lstStyle/>
-          <a:p>
-            <a:pPr indent="0" marL="0">
-              <a:buNone/>
-            </a:pPr>
-            <a:r>
-              <a:rPr lang="en-US" sz="1400" b="1" dirty="0">
-                <a:solidFill>
-                  <a:srgbClr val="FFFFFF"/>
-                </a:solidFill>
-                <a:latin typeface="Malgun Gothic" pitchFamily="34" charset="0"/>
-                <a:ea typeface="Malgun Gothic" pitchFamily="34" charset="-122"/>
-                <a:cs typeface="Malgun Gothic" pitchFamily="34" charset="-120"/>
-              </a:rPr>
-              <a:t>타이밍</a:t>
-            </a:r>
-            <a:endParaRPr lang="en-US" sz="1400" dirty="0"/>
-          </a:p>
-        </p:txBody>
-      </p:sp>
-      <p:sp>
-        <p:nvSpPr>
-          <p:cNvPr id="23" name="Text 21"/>
-          <p:cNvSpPr/>
-          <p:nvPr/>
-        </p:nvSpPr>
-        <p:spPr>
-          <a:xfrm>
-            <a:off x="9116568" y="2788920"/>
-            <a:ext cx="2240280" cy="914400"/>
-          </a:xfrm>
-          <a:prstGeom prst="rect">
-            <a:avLst/>
-          </a:prstGeom>
-          <a:noFill/>
-          <a:ln/>
-        </p:spPr>
-        <p:txBody>
-          <a:bodyPr wrap="square" rtlCol="0" anchor="t"/>
-          <a:lstStyle/>
-          <a:p>
-            <a:pPr indent="0" marL="0">
-              <a:buNone/>
-            </a:pPr>
-            <a:r>
-              <a:rPr lang="en-US" sz="1600" b="1" dirty="0">
-                <a:solidFill>
-                  <a:srgbClr val="16302E"/>
-                </a:solidFill>
-                <a:latin typeface="Malgun Gothic" pitchFamily="34" charset="0"/>
-                <a:ea typeface="Malgun Gothic" pitchFamily="34" charset="-122"/>
-                <a:cs typeface="Malgun Gothic" pitchFamily="34" charset="-120"/>
-              </a:rPr>
-              <a:t>12~1월 선행 광고</a:t>
-            </a:r>
-            <a:endParaRPr lang="en-US" sz="1600" dirty="0"/>
-          </a:p>
-        </p:txBody>
-      </p:sp>
-      <p:sp>
-        <p:nvSpPr>
-          <p:cNvPr id="24" name="Text 22"/>
-          <p:cNvSpPr/>
-          <p:nvPr/>
-        </p:nvSpPr>
-        <p:spPr>
-          <a:xfrm>
-            <a:off x="9116568" y="3749040"/>
-            <a:ext cx="2240280" cy="1920240"/>
-          </a:xfrm>
-          <a:prstGeom prst="rect">
-            <a:avLst/>
-          </a:prstGeom>
-          <a:noFill/>
-          <a:ln/>
-        </p:spPr>
-        <p:txBody>
-          <a:bodyPr wrap="square" rtlCol="0" anchor="t"/>
-          <a:lstStyle/>
-          <a:p>
-            <a:pPr indent="0" marL="0">
-              <a:lnSpc>
-                <a:spcPct val="120000"/>
-              </a:lnSpc>
-              <a:buNone/>
-            </a:pPr>
-            <a:r>
-              <a:rPr lang="en-US" sz="1200" dirty="0">
-                <a:solidFill>
-                  <a:srgbClr val="5B6B6A"/>
-                </a:solidFill>
-                <a:latin typeface="Malgun Gothic" pitchFamily="34" charset="0"/>
-                <a:ea typeface="Malgun Gothic" pitchFamily="34" charset="-122"/>
-                <a:cs typeface="Malgun Gothic" pitchFamily="34" charset="-120"/>
-              </a:rPr>
-              <a:t>연초·봄 검색 피크 직전에 콘텐츠·광고를 미리 깔아 수확.</a:t>
-            </a:r>
-            <a:endParaRPr lang="en-US" sz="1200" dirty="0"/>
-          </a:p>
-        </p:txBody>
-      </p:sp>
-      <p:sp>
-        <p:nvSpPr>
-          <p:cNvPr id="25" name="Text 23"/>
+              <a:t>1~5월 강세, 11~12월 저점 → 광고는 12~1월 선행 배치</a:t>
+            </a:r>
+            <a:endParaRPr lang="en-US" sz="1300" dirty="0"/>
+          </a:p>
+        </p:txBody>
+      </p:sp>
+      <p:sp>
+        <p:nvSpPr>
+          <p:cNvPr id="13" name="Text 10"/>
           <p:cNvSpPr/>
           <p:nvPr/>
         </p:nvSpPr>
@@ -9689,7 +10965,7 @@
       </p:sp>
       <p:sp>
         <p:nvSpPr>
-          <p:cNvPr id="26" name="Text 24"/>
+          <p:cNvPr id="14" name="Text 11"/>
           <p:cNvSpPr/>
           <p:nvPr/>
         </p:nvSpPr>
@@ -9791,7 +11067,7 @@
                 <a:ea typeface="Malgun Gothic" pitchFamily="34" charset="-122"/>
                 <a:cs typeface="Malgun Gothic" pitchFamily="34" charset="-120"/>
               </a:rPr>
-              <a:t>실행 로드맵</a:t>
+              <a:t>전략 · 포지셔닝</a:t>
             </a:r>
             <a:endParaRPr lang="en-US" sz="1200" dirty="0"/>
           </a:p>
@@ -9830,7 +11106,7 @@
                 <a:ea typeface="Malgun Gothic" pitchFamily="34" charset="-122"/>
                 <a:cs typeface="Malgun Gothic" pitchFamily="34" charset="-120"/>
               </a:rPr>
-              <a:t>실측 → 조준 → 선점 → 제안</a:t>
+              <a:t>빈틈을 파고드는 4개 축</a:t>
             </a:r>
             <a:endParaRPr lang="en-US" sz="3000" dirty="0"/>
           </a:p>
@@ -9883,94 +11159,12 @@
         </p:nvSpPr>
         <p:spPr>
           <a:xfrm>
-            <a:off x="640080" y="1783080"/>
-            <a:ext cx="822960" cy="822960"/>
-          </a:xfrm>
-          <a:prstGeom prst="ellipse">
-            <a:avLst/>
-          </a:prstGeom>
-          <a:solidFill>
-            <a:srgbClr val="0E7C7B"/>
-          </a:solidFill>
-          <a:ln/>
-        </p:spPr>
-      </p:sp>
-      <p:sp>
-        <p:nvSpPr>
-          <p:cNvPr id="6" name="Text 4"/>
-          <p:cNvSpPr/>
-          <p:nvPr/>
-        </p:nvSpPr>
-        <p:spPr>
-          <a:xfrm>
-            <a:off x="640080" y="1783080"/>
-            <a:ext cx="822960" cy="822960"/>
-          </a:xfrm>
-          <a:prstGeom prst="rect">
-            <a:avLst/>
-          </a:prstGeom>
-          <a:noFill/>
-          <a:ln/>
-        </p:spPr>
-        <p:txBody>
-          <a:bodyPr wrap="square" lIns="0" tIns="0" rIns="0" bIns="0" rtlCol="0" anchor="ctr"/>
-          <a:lstStyle/>
-          <a:p>
-            <a:pPr algn="ctr" indent="0" marL="0">
-              <a:buNone/>
-            </a:pPr>
-            <a:r>
-              <a:rPr lang="en-US" sz="2400" b="1" dirty="0">
-                <a:solidFill>
-                  <a:srgbClr val="FFFFFF"/>
-                </a:solidFill>
-                <a:latin typeface="Cambria" pitchFamily="34" charset="0"/>
-                <a:ea typeface="Cambria" pitchFamily="34" charset="-122"/>
-                <a:cs typeface="Cambria" pitchFamily="34" charset="-120"/>
-              </a:rPr>
-              <a:t>1</a:t>
-            </a:r>
-            <a:endParaRPr lang="en-US" sz="2400" dirty="0"/>
-          </a:p>
-        </p:txBody>
-      </p:sp>
-      <p:sp>
-        <p:nvSpPr>
-          <p:cNvPr id="7" name="Shape 5"/>
-          <p:cNvSpPr/>
-          <p:nvPr/>
-        </p:nvSpPr>
-        <p:spPr>
-          <a:xfrm>
-            <a:off x="1051560" y="2606040"/>
-            <a:ext cx="0" cy="256032"/>
-          </a:xfrm>
-          <a:prstGeom prst="line">
-            <a:avLst/>
-          </a:prstGeom>
-          <a:noFill/>
-          <a:ln w="25400">
-            <a:solidFill>
-              <a:srgbClr val="D9E5E3"/>
-            </a:solidFill>
-            <a:prstDash val="solid"/>
-          </a:ln>
-        </p:spPr>
-      </p:sp>
-      <p:sp>
-        <p:nvSpPr>
-          <p:cNvPr id="8" name="Shape 6"/>
-          <p:cNvSpPr/>
-          <p:nvPr/>
-        </p:nvSpPr>
-        <p:spPr>
-          <a:xfrm>
-            <a:off x="1783080" y="1801368"/>
-            <a:ext cx="9829800" cy="786384"/>
+            <a:off x="548640" y="1737360"/>
+            <a:ext cx="2606040" cy="4114800"/>
           </a:xfrm>
           <a:prstGeom prst="roundRect">
             <a:avLst>
-              <a:gd name="adj" fmla="val 9302"/>
+              <a:gd name="adj" fmla="val 3509"/>
             </a:avLst>
           </a:prstGeom>
           <a:solidFill>
@@ -9986,220 +11180,160 @@
       </p:sp>
       <p:sp>
         <p:nvSpPr>
-          <p:cNvPr id="9" name="Text 7"/>
-          <p:cNvSpPr/>
-          <p:nvPr/>
-        </p:nvSpPr>
-        <p:spPr>
-          <a:xfrm>
-            <a:off x="2011680" y="1801368"/>
-            <a:ext cx="1371600" cy="786384"/>
-          </a:xfrm>
-          <a:prstGeom prst="rect">
-            <a:avLst/>
-          </a:prstGeom>
-          <a:noFill/>
-          <a:ln/>
-        </p:spPr>
-        <p:txBody>
-          <a:bodyPr wrap="square" lIns="0" tIns="0" rIns="0" bIns="0" rtlCol="0" anchor="ctr"/>
-          <a:lstStyle/>
-          <a:p>
-            <a:pPr indent="0" marL="0">
-              <a:buNone/>
-            </a:pPr>
-            <a:r>
-              <a:rPr lang="en-US" sz="1200" b="1" dirty="0">
-                <a:solidFill>
-                  <a:srgbClr val="0E7C7B"/>
-                </a:solidFill>
-                <a:latin typeface="Malgun Gothic" pitchFamily="34" charset="0"/>
-                <a:ea typeface="Malgun Gothic" pitchFamily="34" charset="-122"/>
-                <a:cs typeface="Malgun Gothic" pitchFamily="34" charset="-120"/>
-              </a:rPr>
-              <a:t>STEP 1</a:t>
-            </a:r>
-            <a:endParaRPr lang="en-US" sz="1200" dirty="0"/>
-          </a:p>
-        </p:txBody>
-      </p:sp>
-      <p:sp>
-        <p:nvSpPr>
-          <p:cNvPr id="10" name="Text 8"/>
-          <p:cNvSpPr/>
-          <p:nvPr/>
-        </p:nvSpPr>
-        <p:spPr>
-          <a:xfrm>
-            <a:off x="3383280" y="1801368"/>
-            <a:ext cx="2468880" cy="786384"/>
-          </a:xfrm>
-          <a:prstGeom prst="rect">
-            <a:avLst/>
-          </a:prstGeom>
-          <a:noFill/>
-          <a:ln/>
-        </p:spPr>
-        <p:txBody>
-          <a:bodyPr wrap="square" lIns="0" tIns="0" rIns="0" bIns="0" rtlCol="0" anchor="ctr"/>
-          <a:lstStyle/>
-          <a:p>
-            <a:pPr indent="0" marL="0">
-              <a:buNone/>
-            </a:pPr>
-            <a:r>
-              <a:rPr lang="en-US" sz="1400" b="1" dirty="0">
-                <a:solidFill>
-                  <a:srgbClr val="16302E"/>
-                </a:solidFill>
-                <a:latin typeface="Malgun Gothic" pitchFamily="34" charset="0"/>
-                <a:ea typeface="Malgun Gothic" pitchFamily="34" charset="-122"/>
-                <a:cs typeface="Malgun Gothic" pitchFamily="34" charset="-120"/>
-              </a:rPr>
-              <a:t>데이터 확정</a:t>
-            </a:r>
-            <a:endParaRPr lang="en-US" sz="1400" dirty="0"/>
-          </a:p>
-        </p:txBody>
-      </p:sp>
-      <p:sp>
-        <p:nvSpPr>
-          <p:cNvPr id="11" name="Text 9"/>
-          <p:cNvSpPr/>
-          <p:nvPr/>
-        </p:nvSpPr>
-        <p:spPr>
-          <a:xfrm>
-            <a:off x="5943600" y="1801368"/>
-            <a:ext cx="5486400" cy="786384"/>
-          </a:xfrm>
-          <a:prstGeom prst="rect">
-            <a:avLst/>
-          </a:prstGeom>
-          <a:noFill/>
-          <a:ln/>
-        </p:spPr>
-        <p:txBody>
-          <a:bodyPr wrap="square" lIns="635" tIns="635" rIns="635" bIns="635" rtlCol="0" anchor="ctr"/>
-          <a:lstStyle/>
-          <a:p>
-            <a:pPr indent="0" marL="0">
-              <a:lnSpc>
-                <a:spcPct val="105000"/>
-              </a:lnSpc>
-              <a:buNone/>
-            </a:pPr>
-            <a:r>
-              <a:rPr lang="en-US" sz="1150" dirty="0">
-                <a:solidFill>
-                  <a:srgbClr val="5B6B6A"/>
-                </a:solidFill>
-                <a:latin typeface="Malgun Gothic" pitchFamily="34" charset="0"/>
-                <a:ea typeface="Malgun Gothic" pitchFamily="34" charset="-122"/>
-                <a:cs typeface="Malgun Gothic" pitchFamily="34" charset="-120"/>
-              </a:rPr>
-              <a:t>행안부 성별인구 + 심평원 의원/한의원 종별 수로 TAM·경쟁 밀도 마감.</a:t>
-            </a:r>
-            <a:endParaRPr lang="en-US" sz="1150" dirty="0"/>
-          </a:p>
-        </p:txBody>
-      </p:sp>
-      <p:sp>
-        <p:nvSpPr>
-          <p:cNvPr id="12" name="Shape 10"/>
-          <p:cNvSpPr/>
-          <p:nvPr/>
-        </p:nvSpPr>
-        <p:spPr>
-          <a:xfrm>
-            <a:off x="640080" y="2862072"/>
-            <a:ext cx="822960" cy="822960"/>
-          </a:xfrm>
-          <a:prstGeom prst="ellipse">
-            <a:avLst/>
-          </a:prstGeom>
-          <a:solidFill>
-            <a:srgbClr val="2BB79A"/>
-          </a:solidFill>
-          <a:ln/>
-        </p:spPr>
-      </p:sp>
-      <p:sp>
-        <p:nvSpPr>
-          <p:cNvPr id="13" name="Text 11"/>
-          <p:cNvSpPr/>
-          <p:nvPr/>
-        </p:nvSpPr>
-        <p:spPr>
-          <a:xfrm>
-            <a:off x="640080" y="2862072"/>
-            <a:ext cx="822960" cy="822960"/>
-          </a:xfrm>
-          <a:prstGeom prst="rect">
-            <a:avLst/>
-          </a:prstGeom>
-          <a:noFill/>
-          <a:ln/>
-        </p:spPr>
-        <p:txBody>
-          <a:bodyPr wrap="square" lIns="0" tIns="0" rIns="0" bIns="0" rtlCol="0" anchor="ctr"/>
-          <a:lstStyle/>
-          <a:p>
-            <a:pPr algn="ctr" indent="0" marL="0">
-              <a:buNone/>
-            </a:pPr>
-            <a:r>
-              <a:rPr lang="en-US" sz="2400" b="1" dirty="0">
-                <a:solidFill>
-                  <a:srgbClr val="FFFFFF"/>
-                </a:solidFill>
-                <a:latin typeface="Cambria" pitchFamily="34" charset="0"/>
-                <a:ea typeface="Cambria" pitchFamily="34" charset="-122"/>
-                <a:cs typeface="Cambria" pitchFamily="34" charset="-120"/>
-              </a:rPr>
-              <a:t>2</a:t>
-            </a:r>
-            <a:endParaRPr lang="en-US" sz="2400" dirty="0"/>
-          </a:p>
-        </p:txBody>
-      </p:sp>
-      <p:sp>
-        <p:nvSpPr>
-          <p:cNvPr id="14" name="Shape 12"/>
-          <p:cNvSpPr/>
-          <p:nvPr/>
-        </p:nvSpPr>
-        <p:spPr>
-          <a:xfrm>
-            <a:off x="1051560" y="3685032"/>
-            <a:ext cx="0" cy="256032"/>
-          </a:xfrm>
-          <a:prstGeom prst="line">
-            <a:avLst/>
-          </a:prstGeom>
-          <a:noFill/>
-          <a:ln w="25400">
-            <a:solidFill>
-              <a:srgbClr val="D9E5E3"/>
-            </a:solidFill>
-            <a:prstDash val="solid"/>
-          </a:ln>
-        </p:spPr>
-      </p:sp>
-      <p:sp>
-        <p:nvSpPr>
-          <p:cNvPr id="15" name="Shape 13"/>
-          <p:cNvSpPr/>
-          <p:nvPr/>
-        </p:nvSpPr>
-        <p:spPr>
-          <a:xfrm>
-            <a:off x="1783080" y="2880360"/>
-            <a:ext cx="9829800" cy="786384"/>
+          <p:cNvPr id="6" name="Shape 4"/>
+          <p:cNvSpPr/>
+          <p:nvPr/>
+        </p:nvSpPr>
+        <p:spPr>
+          <a:xfrm>
+            <a:off x="548640" y="1737360"/>
+            <a:ext cx="2606040" cy="868680"/>
           </a:xfrm>
           <a:prstGeom prst="roundRect">
             <a:avLst>
-              <a:gd name="adj" fmla="val 9302"/>
+              <a:gd name="adj" fmla="val 10526"/>
+            </a:avLst>
+          </a:prstGeom>
+          <a:solidFill>
+            <a:srgbClr val="0E7C7B"/>
+          </a:solidFill>
+          <a:ln/>
+        </p:spPr>
+      </p:sp>
+      <p:sp>
+        <p:nvSpPr>
+          <p:cNvPr id="7" name="Text 5"/>
+          <p:cNvSpPr/>
+          <p:nvPr/>
+        </p:nvSpPr>
+        <p:spPr>
+          <a:xfrm>
+            <a:off x="731520" y="1737360"/>
+            <a:ext cx="2240280" cy="868680"/>
+          </a:xfrm>
+          <a:prstGeom prst="rect">
+            <a:avLst/>
+          </a:prstGeom>
+          <a:noFill/>
+          <a:ln/>
+        </p:spPr>
+        <p:txBody>
+          <a:bodyPr wrap="square" lIns="0" tIns="0" rIns="0" bIns="0" rtlCol="0" anchor="ctr"/>
+          <a:lstStyle/>
+          <a:p>
+            <a:pPr indent="0" marL="0">
+              <a:buNone/>
+            </a:pPr>
+            <a:r>
+              <a:rPr lang="en-US" sz="1400" b="1" dirty="0">
+                <a:solidFill>
+                  <a:srgbClr val="FFFFFF"/>
+                </a:solidFill>
+                <a:latin typeface="Malgun Gothic" pitchFamily="34" charset="0"/>
+                <a:ea typeface="Malgun Gothic" pitchFamily="34" charset="-122"/>
+                <a:cs typeface="Malgun Gothic" pitchFamily="34" charset="-120"/>
+              </a:rPr>
+              <a:t>포지션</a:t>
+            </a:r>
+            <a:endParaRPr lang="en-US" sz="1400" dirty="0"/>
+          </a:p>
+        </p:txBody>
+      </p:sp>
+      <p:sp>
+        <p:nvSpPr>
+          <p:cNvPr id="8" name="Text 6"/>
+          <p:cNvSpPr/>
+          <p:nvPr/>
+        </p:nvSpPr>
+        <p:spPr>
+          <a:xfrm>
+            <a:off x="749808" y="2788920"/>
+            <a:ext cx="2240280" cy="914400"/>
+          </a:xfrm>
+          <a:prstGeom prst="rect">
+            <a:avLst/>
+          </a:prstGeom>
+          <a:noFill/>
+          <a:ln/>
+        </p:spPr>
+        <p:txBody>
+          <a:bodyPr wrap="square" rtlCol="0" anchor="t"/>
+          <a:lstStyle/>
+          <a:p>
+            <a:pPr indent="0" marL="0">
+              <a:buNone/>
+            </a:pPr>
+            <a:r>
+              <a:rPr lang="en-US" sz="1600" b="1" dirty="0">
+                <a:solidFill>
+                  <a:srgbClr val="16302E"/>
+                </a:solidFill>
+                <a:latin typeface="Malgun Gothic" pitchFamily="34" charset="0"/>
+                <a:ea typeface="Malgun Gothic" pitchFamily="34" charset="-122"/>
+                <a:cs typeface="Malgun Gothic" pitchFamily="34" charset="-120"/>
+              </a:rPr>
+              <a:t>양방 의학 비만치료</a:t>
+            </a:r>
+            <a:endParaRPr lang="en-US" sz="1600" dirty="0"/>
+          </a:p>
+        </p:txBody>
+      </p:sp>
+      <p:sp>
+        <p:nvSpPr>
+          <p:cNvPr id="9" name="Text 7"/>
+          <p:cNvSpPr/>
+          <p:nvPr/>
+        </p:nvSpPr>
+        <p:spPr>
+          <a:xfrm>
+            <a:off x="749808" y="3749040"/>
+            <a:ext cx="2240280" cy="1920240"/>
+          </a:xfrm>
+          <a:prstGeom prst="rect">
+            <a:avLst/>
+          </a:prstGeom>
+          <a:noFill/>
+          <a:ln/>
+        </p:spPr>
+        <p:txBody>
+          <a:bodyPr wrap="square" rtlCol="0" anchor="t"/>
+          <a:lstStyle/>
+          <a:p>
+            <a:pPr indent="0" marL="0">
+              <a:lnSpc>
+                <a:spcPct val="120000"/>
+              </a:lnSpc>
+              <a:buNone/>
+            </a:pPr>
+            <a:r>
+              <a:rPr lang="en-US" sz="1200" dirty="0">
+                <a:solidFill>
+                  <a:srgbClr val="5B6B6A"/>
+                </a:solidFill>
+                <a:latin typeface="Malgun Gothic" pitchFamily="34" charset="0"/>
+                <a:ea typeface="Malgun Gothic" pitchFamily="34" charset="-122"/>
+                <a:cs typeface="Malgun Gothic" pitchFamily="34" charset="-120"/>
+              </a:rPr>
+              <a:t>위고비·삭센다·식욕억제·대사 관리로 한방 편중 시장의 빈틈 공략.</a:t>
+            </a:r>
+            <a:endParaRPr lang="en-US" sz="1200" dirty="0"/>
+          </a:p>
+        </p:txBody>
+      </p:sp>
+      <p:sp>
+        <p:nvSpPr>
+          <p:cNvPr id="10" name="Shape 8"/>
+          <p:cNvSpPr/>
+          <p:nvPr/>
+        </p:nvSpPr>
+        <p:spPr>
+          <a:xfrm>
+            <a:off x="3337560" y="1737360"/>
+            <a:ext cx="2606040" cy="4114800"/>
+          </a:xfrm>
+          <a:prstGeom prst="roundRect">
+            <a:avLst>
+              <a:gd name="adj" fmla="val 3509"/>
             </a:avLst>
           </a:prstGeom>
           <a:solidFill>
@@ -10215,220 +11349,160 @@
       </p:sp>
       <p:sp>
         <p:nvSpPr>
-          <p:cNvPr id="16" name="Text 14"/>
-          <p:cNvSpPr/>
-          <p:nvPr/>
-        </p:nvSpPr>
-        <p:spPr>
-          <a:xfrm>
-            <a:off x="2011680" y="2880360"/>
-            <a:ext cx="1371600" cy="786384"/>
-          </a:xfrm>
-          <a:prstGeom prst="rect">
-            <a:avLst/>
-          </a:prstGeom>
-          <a:noFill/>
-          <a:ln/>
-        </p:spPr>
-        <p:txBody>
-          <a:bodyPr wrap="square" lIns="0" tIns="0" rIns="0" bIns="0" rtlCol="0" anchor="ctr"/>
-          <a:lstStyle/>
-          <a:p>
-            <a:pPr indent="0" marL="0">
-              <a:buNone/>
-            </a:pPr>
-            <a:r>
-              <a:rPr lang="en-US" sz="1200" b="1" dirty="0">
-                <a:solidFill>
-                  <a:srgbClr val="2BB79A"/>
-                </a:solidFill>
-                <a:latin typeface="Malgun Gothic" pitchFamily="34" charset="0"/>
-                <a:ea typeface="Malgun Gothic" pitchFamily="34" charset="-122"/>
-                <a:cs typeface="Malgun Gothic" pitchFamily="34" charset="-120"/>
-              </a:rPr>
-              <a:t>STEP 2</a:t>
-            </a:r>
-            <a:endParaRPr lang="en-US" sz="1200" dirty="0"/>
-          </a:p>
-        </p:txBody>
-      </p:sp>
-      <p:sp>
-        <p:nvSpPr>
-          <p:cNvPr id="17" name="Text 15"/>
-          <p:cNvSpPr/>
-          <p:nvPr/>
-        </p:nvSpPr>
-        <p:spPr>
-          <a:xfrm>
-            <a:off x="3383280" y="2880360"/>
-            <a:ext cx="2468880" cy="786384"/>
-          </a:xfrm>
-          <a:prstGeom prst="rect">
-            <a:avLst/>
-          </a:prstGeom>
-          <a:noFill/>
-          <a:ln/>
-        </p:spPr>
-        <p:txBody>
-          <a:bodyPr wrap="square" lIns="0" tIns="0" rIns="0" bIns="0" rtlCol="0" anchor="ctr"/>
-          <a:lstStyle/>
-          <a:p>
-            <a:pPr indent="0" marL="0">
-              <a:buNone/>
-            </a:pPr>
-            <a:r>
-              <a:rPr lang="en-US" sz="1400" b="1" dirty="0">
-                <a:solidFill>
-                  <a:srgbClr val="16302E"/>
-                </a:solidFill>
-                <a:latin typeface="Malgun Gothic" pitchFamily="34" charset="0"/>
-                <a:ea typeface="Malgun Gothic" pitchFamily="34" charset="-122"/>
-                <a:cs typeface="Malgun Gothic" pitchFamily="34" charset="-120"/>
-              </a:rPr>
-              <a:t>포지션·크리에이티브</a:t>
-            </a:r>
-            <a:endParaRPr lang="en-US" sz="1400" dirty="0"/>
-          </a:p>
-        </p:txBody>
-      </p:sp>
-      <p:sp>
-        <p:nvSpPr>
-          <p:cNvPr id="18" name="Text 16"/>
-          <p:cNvSpPr/>
-          <p:nvPr/>
-        </p:nvSpPr>
-        <p:spPr>
-          <a:xfrm>
-            <a:off x="5943600" y="2880360"/>
-            <a:ext cx="5486400" cy="786384"/>
-          </a:xfrm>
-          <a:prstGeom prst="rect">
-            <a:avLst/>
-          </a:prstGeom>
-          <a:noFill/>
-          <a:ln/>
-        </p:spPr>
-        <p:txBody>
-          <a:bodyPr wrap="square" lIns="635" tIns="635" rIns="635" bIns="635" rtlCol="0" anchor="ctr"/>
-          <a:lstStyle/>
-          <a:p>
-            <a:pPr indent="0" marL="0">
-              <a:lnSpc>
-                <a:spcPct val="105000"/>
-              </a:lnSpc>
-              <a:buNone/>
-            </a:pPr>
-            <a:r>
-              <a:rPr lang="en-US" sz="1150" dirty="0">
-                <a:solidFill>
-                  <a:srgbClr val="5B6B6A"/>
-                </a:solidFill>
-                <a:latin typeface="Malgun Gothic" pitchFamily="34" charset="0"/>
-                <a:ea typeface="Malgun Gothic" pitchFamily="34" charset="-122"/>
-                <a:cs typeface="Malgun Gothic" pitchFamily="34" charset="-120"/>
-              </a:rPr>
-              <a:t>양방 의학 비만치료 메시지, 40대 신뢰 소구 카피·비주얼 세트 제작.</a:t>
-            </a:r>
-            <a:endParaRPr lang="en-US" sz="1150" dirty="0"/>
-          </a:p>
-        </p:txBody>
-      </p:sp>
-      <p:sp>
-        <p:nvSpPr>
-          <p:cNvPr id="19" name="Shape 17"/>
-          <p:cNvSpPr/>
-          <p:nvPr/>
-        </p:nvSpPr>
-        <p:spPr>
-          <a:xfrm>
-            <a:off x="640080" y="3941064"/>
-            <a:ext cx="822960" cy="822960"/>
-          </a:xfrm>
-          <a:prstGeom prst="ellipse">
-            <a:avLst/>
-          </a:prstGeom>
-          <a:solidFill>
-            <a:srgbClr val="0E7C7B"/>
-          </a:solidFill>
-          <a:ln/>
-        </p:spPr>
-      </p:sp>
-      <p:sp>
-        <p:nvSpPr>
-          <p:cNvPr id="20" name="Text 18"/>
-          <p:cNvSpPr/>
-          <p:nvPr/>
-        </p:nvSpPr>
-        <p:spPr>
-          <a:xfrm>
-            <a:off x="640080" y="3941064"/>
-            <a:ext cx="822960" cy="822960"/>
-          </a:xfrm>
-          <a:prstGeom prst="rect">
-            <a:avLst/>
-          </a:prstGeom>
-          <a:noFill/>
-          <a:ln/>
-        </p:spPr>
-        <p:txBody>
-          <a:bodyPr wrap="square" lIns="0" tIns="0" rIns="0" bIns="0" rtlCol="0" anchor="ctr"/>
-          <a:lstStyle/>
-          <a:p>
-            <a:pPr algn="ctr" indent="0" marL="0">
-              <a:buNone/>
-            </a:pPr>
-            <a:r>
-              <a:rPr lang="en-US" sz="2400" b="1" dirty="0">
-                <a:solidFill>
-                  <a:srgbClr val="FFFFFF"/>
-                </a:solidFill>
-                <a:latin typeface="Cambria" pitchFamily="34" charset="0"/>
-                <a:ea typeface="Cambria" pitchFamily="34" charset="-122"/>
-                <a:cs typeface="Cambria" pitchFamily="34" charset="-120"/>
-              </a:rPr>
-              <a:t>3</a:t>
-            </a:r>
-            <a:endParaRPr lang="en-US" sz="2400" dirty="0"/>
-          </a:p>
-        </p:txBody>
-      </p:sp>
-      <p:sp>
-        <p:nvSpPr>
-          <p:cNvPr id="21" name="Shape 19"/>
-          <p:cNvSpPr/>
-          <p:nvPr/>
-        </p:nvSpPr>
-        <p:spPr>
-          <a:xfrm>
-            <a:off x="1051560" y="4764024"/>
-            <a:ext cx="0" cy="256032"/>
-          </a:xfrm>
-          <a:prstGeom prst="line">
-            <a:avLst/>
-          </a:prstGeom>
-          <a:noFill/>
-          <a:ln w="25400">
-            <a:solidFill>
-              <a:srgbClr val="D9E5E3"/>
-            </a:solidFill>
-            <a:prstDash val="solid"/>
-          </a:ln>
-        </p:spPr>
-      </p:sp>
-      <p:sp>
-        <p:nvSpPr>
-          <p:cNvPr id="22" name="Shape 20"/>
-          <p:cNvSpPr/>
-          <p:nvPr/>
-        </p:nvSpPr>
-        <p:spPr>
-          <a:xfrm>
-            <a:off x="1783080" y="3959352"/>
-            <a:ext cx="9829800" cy="786384"/>
+          <p:cNvPr id="11" name="Shape 9"/>
+          <p:cNvSpPr/>
+          <p:nvPr/>
+        </p:nvSpPr>
+        <p:spPr>
+          <a:xfrm>
+            <a:off x="3337560" y="1737360"/>
+            <a:ext cx="2606040" cy="868680"/>
           </a:xfrm>
           <a:prstGeom prst="roundRect">
             <a:avLst>
-              <a:gd name="adj" fmla="val 9302"/>
+              <a:gd name="adj" fmla="val 10526"/>
+            </a:avLst>
+          </a:prstGeom>
+          <a:solidFill>
+            <a:srgbClr val="FF6B5B"/>
+          </a:solidFill>
+          <a:ln/>
+        </p:spPr>
+      </p:sp>
+      <p:sp>
+        <p:nvSpPr>
+          <p:cNvPr id="12" name="Text 10"/>
+          <p:cNvSpPr/>
+          <p:nvPr/>
+        </p:nvSpPr>
+        <p:spPr>
+          <a:xfrm>
+            <a:off x="3520440" y="1737360"/>
+            <a:ext cx="2240280" cy="868680"/>
+          </a:xfrm>
+          <a:prstGeom prst="rect">
+            <a:avLst/>
+          </a:prstGeom>
+          <a:noFill/>
+          <a:ln/>
+        </p:spPr>
+        <p:txBody>
+          <a:bodyPr wrap="square" lIns="0" tIns="0" rIns="0" bIns="0" rtlCol="0" anchor="ctr"/>
+          <a:lstStyle/>
+          <a:p>
+            <a:pPr indent="0" marL="0">
+              <a:buNone/>
+            </a:pPr>
+            <a:r>
+              <a:rPr lang="en-US" sz="1400" b="1" dirty="0">
+                <a:solidFill>
+                  <a:srgbClr val="FFFFFF"/>
+                </a:solidFill>
+                <a:latin typeface="Malgun Gothic" pitchFamily="34" charset="0"/>
+                <a:ea typeface="Malgun Gothic" pitchFamily="34" charset="-122"/>
+                <a:cs typeface="Malgun Gothic" pitchFamily="34" charset="-120"/>
+              </a:rPr>
+              <a:t>타깃</a:t>
+            </a:r>
+            <a:endParaRPr lang="en-US" sz="1400" dirty="0"/>
+          </a:p>
+        </p:txBody>
+      </p:sp>
+      <p:sp>
+        <p:nvSpPr>
+          <p:cNvPr id="13" name="Text 11"/>
+          <p:cNvSpPr/>
+          <p:nvPr/>
+        </p:nvSpPr>
+        <p:spPr>
+          <a:xfrm>
+            <a:off x="3538728" y="2788920"/>
+            <a:ext cx="2240280" cy="914400"/>
+          </a:xfrm>
+          <a:prstGeom prst="rect">
+            <a:avLst/>
+          </a:prstGeom>
+          <a:noFill/>
+          <a:ln/>
+        </p:spPr>
+        <p:txBody>
+          <a:bodyPr wrap="square" rtlCol="0" anchor="t"/>
+          <a:lstStyle/>
+          <a:p>
+            <a:pPr indent="0" marL="0">
+              <a:buNone/>
+            </a:pPr>
+            <a:r>
+              <a:rPr lang="en-US" sz="1600" b="1" dirty="0">
+                <a:solidFill>
+                  <a:srgbClr val="16302E"/>
+                </a:solidFill>
+                <a:latin typeface="Malgun Gothic" pitchFamily="34" charset="0"/>
+                <a:ea typeface="Malgun Gothic" pitchFamily="34" charset="-122"/>
+                <a:cs typeface="Malgun Gothic" pitchFamily="34" charset="-120"/>
+              </a:rPr>
+              <a:t>40대 코어 · 이원화</a:t>
+            </a:r>
+            <a:endParaRPr lang="en-US" sz="1600" dirty="0"/>
+          </a:p>
+        </p:txBody>
+      </p:sp>
+      <p:sp>
+        <p:nvSpPr>
+          <p:cNvPr id="14" name="Text 12"/>
+          <p:cNvSpPr/>
+          <p:nvPr/>
+        </p:nvSpPr>
+        <p:spPr>
+          <a:xfrm>
+            <a:off x="3538728" y="3749040"/>
+            <a:ext cx="2240280" cy="1920240"/>
+          </a:xfrm>
+          <a:prstGeom prst="rect">
+            <a:avLst/>
+          </a:prstGeom>
+          <a:noFill/>
+          <a:ln/>
+        </p:spPr>
+        <p:txBody>
+          <a:bodyPr wrap="square" rtlCol="0" anchor="t"/>
+          <a:lstStyle/>
+          <a:p>
+            <a:pPr indent="0" marL="0">
+              <a:lnSpc>
+                <a:spcPct val="120000"/>
+              </a:lnSpc>
+              <a:buNone/>
+            </a:pPr>
+            <a:r>
+              <a:rPr lang="en-US" sz="1200" dirty="0">
+                <a:solidFill>
+                  <a:srgbClr val="5B6B6A"/>
+                </a:solidFill>
+                <a:latin typeface="Malgun Gothic" pitchFamily="34" charset="0"/>
+                <a:ea typeface="Malgun Gothic" pitchFamily="34" charset="-122"/>
+                <a:cs typeface="Malgun Gothic" pitchFamily="34" charset="-120"/>
+              </a:rPr>
+              <a:t>여성 30~40대(체형·건강) + 남성 40~50대(대사·검진 연계) 이원 카피.</a:t>
+            </a:r>
+            <a:endParaRPr lang="en-US" sz="1200" dirty="0"/>
+          </a:p>
+        </p:txBody>
+      </p:sp>
+      <p:sp>
+        <p:nvSpPr>
+          <p:cNvPr id="15" name="Shape 13"/>
+          <p:cNvSpPr/>
+          <p:nvPr/>
+        </p:nvSpPr>
+        <p:spPr>
+          <a:xfrm>
+            <a:off x="6126480" y="1737360"/>
+            <a:ext cx="2606040" cy="4114800"/>
+          </a:xfrm>
+          <a:prstGeom prst="roundRect">
+            <a:avLst>
+              <a:gd name="adj" fmla="val 3509"/>
             </a:avLst>
           </a:prstGeom>
           <a:solidFill>
@@ -10444,137 +11518,19 @@
       </p:sp>
       <p:sp>
         <p:nvSpPr>
-          <p:cNvPr id="23" name="Text 21"/>
-          <p:cNvSpPr/>
-          <p:nvPr/>
-        </p:nvSpPr>
-        <p:spPr>
-          <a:xfrm>
-            <a:off x="2011680" y="3959352"/>
-            <a:ext cx="1371600" cy="786384"/>
-          </a:xfrm>
-          <a:prstGeom prst="rect">
-            <a:avLst/>
-          </a:prstGeom>
-          <a:noFill/>
-          <a:ln/>
-        </p:spPr>
-        <p:txBody>
-          <a:bodyPr wrap="square" lIns="0" tIns="0" rIns="0" bIns="0" rtlCol="0" anchor="ctr"/>
-          <a:lstStyle/>
-          <a:p>
-            <a:pPr indent="0" marL="0">
-              <a:buNone/>
-            </a:pPr>
-            <a:r>
-              <a:rPr lang="en-US" sz="1200" b="1" dirty="0">
-                <a:solidFill>
-                  <a:srgbClr val="0E7C7B"/>
-                </a:solidFill>
-                <a:latin typeface="Malgun Gothic" pitchFamily="34" charset="0"/>
-                <a:ea typeface="Malgun Gothic" pitchFamily="34" charset="-122"/>
-                <a:cs typeface="Malgun Gothic" pitchFamily="34" charset="-120"/>
-              </a:rPr>
-              <a:t>STEP 3</a:t>
-            </a:r>
-            <a:endParaRPr lang="en-US" sz="1200" dirty="0"/>
-          </a:p>
-        </p:txBody>
-      </p:sp>
-      <p:sp>
-        <p:nvSpPr>
-          <p:cNvPr id="24" name="Text 22"/>
-          <p:cNvSpPr/>
-          <p:nvPr/>
-        </p:nvSpPr>
-        <p:spPr>
-          <a:xfrm>
-            <a:off x="3383280" y="3959352"/>
-            <a:ext cx="2468880" cy="786384"/>
-          </a:xfrm>
-          <a:prstGeom prst="rect">
-            <a:avLst/>
-          </a:prstGeom>
-          <a:noFill/>
-          <a:ln/>
-        </p:spPr>
-        <p:txBody>
-          <a:bodyPr wrap="square" lIns="0" tIns="0" rIns="0" bIns="0" rtlCol="0" anchor="ctr"/>
-          <a:lstStyle/>
-          <a:p>
-            <a:pPr indent="0" marL="0">
-              <a:buNone/>
-            </a:pPr>
-            <a:r>
-              <a:rPr lang="en-US" sz="1400" b="1" dirty="0">
-                <a:solidFill>
-                  <a:srgbClr val="16302E"/>
-                </a:solidFill>
-                <a:latin typeface="Malgun Gothic" pitchFamily="34" charset="0"/>
-                <a:ea typeface="Malgun Gothic" pitchFamily="34" charset="-122"/>
-                <a:cs typeface="Malgun Gothic" pitchFamily="34" charset="-120"/>
-              </a:rPr>
-              <a:t>검색 선점</a:t>
-            </a:r>
-            <a:endParaRPr lang="en-US" sz="1400" dirty="0"/>
-          </a:p>
-        </p:txBody>
-      </p:sp>
-      <p:sp>
-        <p:nvSpPr>
-          <p:cNvPr id="25" name="Text 23"/>
-          <p:cNvSpPr/>
-          <p:nvPr/>
-        </p:nvSpPr>
-        <p:spPr>
-          <a:xfrm>
-            <a:off x="5943600" y="3959352"/>
-            <a:ext cx="5486400" cy="786384"/>
-          </a:xfrm>
-          <a:prstGeom prst="rect">
-            <a:avLst/>
-          </a:prstGeom>
-          <a:noFill/>
-          <a:ln/>
-        </p:spPr>
-        <p:txBody>
-          <a:bodyPr wrap="square" lIns="635" tIns="635" rIns="635" bIns="635" rtlCol="0" anchor="ctr"/>
-          <a:lstStyle/>
-          <a:p>
-            <a:pPr indent="0" marL="0">
-              <a:lnSpc>
-                <a:spcPct val="105000"/>
-              </a:lnSpc>
-              <a:buNone/>
-            </a:pPr>
-            <a:r>
-              <a:rPr lang="en-US" sz="1150" dirty="0">
-                <a:solidFill>
-                  <a:srgbClr val="5B6B6A"/>
-                </a:solidFill>
-                <a:latin typeface="Malgun Gothic" pitchFamily="34" charset="0"/>
-                <a:ea typeface="Malgun Gothic" pitchFamily="34" charset="-122"/>
-                <a:cs typeface="Malgun Gothic" pitchFamily="34" charset="-120"/>
-              </a:rPr>
-              <a:t>시술어 광고 + 대구·랜드마크 롱테일 SEO/GEO(seo-engine)로 노출 장악.</a:t>
-            </a:r>
-            <a:endParaRPr lang="en-US" sz="1150" dirty="0"/>
-          </a:p>
-        </p:txBody>
-      </p:sp>
-      <p:sp>
-        <p:nvSpPr>
-          <p:cNvPr id="26" name="Shape 24"/>
-          <p:cNvSpPr/>
-          <p:nvPr/>
-        </p:nvSpPr>
-        <p:spPr>
-          <a:xfrm>
-            <a:off x="640080" y="5020056"/>
-            <a:ext cx="822960" cy="822960"/>
-          </a:xfrm>
-          <a:prstGeom prst="ellipse">
-            <a:avLst/>
+          <p:cNvPr id="16" name="Shape 14"/>
+          <p:cNvSpPr/>
+          <p:nvPr/>
+        </p:nvSpPr>
+        <p:spPr>
+          <a:xfrm>
+            <a:off x="6126480" y="1737360"/>
+            <a:ext cx="2606040" cy="868680"/>
+          </a:xfrm>
+          <a:prstGeom prst="roundRect">
+            <a:avLst>
+              <a:gd name="adj" fmla="val 10526"/>
+            </a:avLst>
           </a:prstGeom>
           <a:solidFill>
             <a:srgbClr val="2BB79A"/>
@@ -10584,14 +11540,14 @@
       </p:sp>
       <p:sp>
         <p:nvSpPr>
-          <p:cNvPr id="27" name="Text 25"/>
-          <p:cNvSpPr/>
-          <p:nvPr/>
-        </p:nvSpPr>
-        <p:spPr>
-          <a:xfrm>
-            <a:off x="640080" y="5020056"/>
-            <a:ext cx="822960" cy="822960"/>
+          <p:cNvPr id="17" name="Text 15"/>
+          <p:cNvSpPr/>
+          <p:nvPr/>
+        </p:nvSpPr>
+        <p:spPr>
+          <a:xfrm>
+            <a:off x="6309360" y="1737360"/>
+            <a:ext cx="2240280" cy="868680"/>
           </a:xfrm>
           <a:prstGeom prst="rect">
             <a:avLst/>
@@ -10603,38 +11559,119 @@
           <a:bodyPr wrap="square" lIns="0" tIns="0" rIns="0" bIns="0" rtlCol="0" anchor="ctr"/>
           <a:lstStyle/>
           <a:p>
-            <a:pPr algn="ctr" indent="0" marL="0">
-              <a:buNone/>
-            </a:pPr>
-            <a:r>
-              <a:rPr lang="en-US" sz="2400" b="1" dirty="0">
+            <a:pPr indent="0" marL="0">
+              <a:buNone/>
+            </a:pPr>
+            <a:r>
+              <a:rPr lang="en-US" sz="1400" b="1" dirty="0">
                 <a:solidFill>
                   <a:srgbClr val="FFFFFF"/>
                 </a:solidFill>
-                <a:latin typeface="Cambria" pitchFamily="34" charset="0"/>
-                <a:ea typeface="Cambria" pitchFamily="34" charset="-122"/>
-                <a:cs typeface="Cambria" pitchFamily="34" charset="-120"/>
-              </a:rPr>
-              <a:t>4</a:t>
-            </a:r>
-            <a:endParaRPr lang="en-US" sz="2400" dirty="0"/>
-          </a:p>
-        </p:txBody>
-      </p:sp>
-      <p:sp>
-        <p:nvSpPr>
-          <p:cNvPr id="28" name="Shape 26"/>
-          <p:cNvSpPr/>
-          <p:nvPr/>
-        </p:nvSpPr>
-        <p:spPr>
-          <a:xfrm>
-            <a:off x="1783080" y="5038344"/>
-            <a:ext cx="9829800" cy="786384"/>
+                <a:latin typeface="Malgun Gothic" pitchFamily="34" charset="0"/>
+                <a:ea typeface="Malgun Gothic" pitchFamily="34" charset="-122"/>
+                <a:cs typeface="Malgun Gothic" pitchFamily="34" charset="-120"/>
+              </a:rPr>
+              <a:t>키워드</a:t>
+            </a:r>
+            <a:endParaRPr lang="en-US" sz="1400" dirty="0"/>
+          </a:p>
+        </p:txBody>
+      </p:sp>
+      <p:sp>
+        <p:nvSpPr>
+          <p:cNvPr id="18" name="Text 16"/>
+          <p:cNvSpPr/>
+          <p:nvPr/>
+        </p:nvSpPr>
+        <p:spPr>
+          <a:xfrm>
+            <a:off x="6327648" y="2788920"/>
+            <a:ext cx="2240280" cy="914400"/>
+          </a:xfrm>
+          <a:prstGeom prst="rect">
+            <a:avLst/>
+          </a:prstGeom>
+          <a:noFill/>
+          <a:ln/>
+        </p:spPr>
+        <p:txBody>
+          <a:bodyPr wrap="square" rtlCol="0" anchor="t"/>
+          <a:lstStyle/>
+          <a:p>
+            <a:pPr indent="0" marL="0">
+              <a:buNone/>
+            </a:pPr>
+            <a:r>
+              <a:rPr lang="en-US" sz="1600" b="1" dirty="0">
+                <a:solidFill>
+                  <a:srgbClr val="16302E"/>
+                </a:solidFill>
+                <a:latin typeface="Malgun Gothic" pitchFamily="34" charset="0"/>
+                <a:ea typeface="Malgun Gothic" pitchFamily="34" charset="-122"/>
+                <a:cs typeface="Malgun Gothic" pitchFamily="34" charset="-120"/>
+              </a:rPr>
+              <a:t>시술어 + 지역 롱테일</a:t>
+            </a:r>
+            <a:endParaRPr lang="en-US" sz="1600" dirty="0"/>
+          </a:p>
+        </p:txBody>
+      </p:sp>
+      <p:sp>
+        <p:nvSpPr>
+          <p:cNvPr id="19" name="Text 17"/>
+          <p:cNvSpPr/>
+          <p:nvPr/>
+        </p:nvSpPr>
+        <p:spPr>
+          <a:xfrm>
+            <a:off x="6327648" y="3749040"/>
+            <a:ext cx="2240280" cy="1920240"/>
+          </a:xfrm>
+          <a:prstGeom prst="rect">
+            <a:avLst/>
+          </a:prstGeom>
+          <a:noFill/>
+          <a:ln/>
+        </p:spPr>
+        <p:txBody>
+          <a:bodyPr wrap="square" rtlCol="0" anchor="t"/>
+          <a:lstStyle/>
+          <a:p>
+            <a:pPr indent="0" marL="0">
+              <a:lnSpc>
+                <a:spcPct val="120000"/>
+              </a:lnSpc>
+              <a:buNone/>
+            </a:pPr>
+            <a:r>
+              <a:rPr lang="en-US" sz="1200" dirty="0">
+                <a:solidFill>
+                  <a:srgbClr val="5B6B6A"/>
+                </a:solidFill>
+                <a:latin typeface="Malgun Gothic" pitchFamily="34" charset="0"/>
+                <a:ea typeface="Malgun Gothic" pitchFamily="34" charset="-122"/>
+                <a:cs typeface="Malgun Gothic" pitchFamily="34" charset="-120"/>
+              </a:rPr>
+              <a:t>'위고비/삭센다/다이어트주사' 선점 + '대구·성서·월배·죽전' 롱테일 SEO/GEO.</a:t>
+            </a:r>
+            <a:endParaRPr lang="en-US" sz="1200" dirty="0"/>
+          </a:p>
+        </p:txBody>
+      </p:sp>
+      <p:sp>
+        <p:nvSpPr>
+          <p:cNvPr id="20" name="Shape 18"/>
+          <p:cNvSpPr/>
+          <p:nvPr/>
+        </p:nvSpPr>
+        <p:spPr>
+          <a:xfrm>
+            <a:off x="8915400" y="1737360"/>
+            <a:ext cx="2606040" cy="4114800"/>
           </a:xfrm>
           <a:prstGeom prst="roundRect">
             <a:avLst>
-              <a:gd name="adj" fmla="val 9302"/>
+              <a:gd name="adj" fmla="val 3509"/>
             </a:avLst>
           </a:prstGeom>
           <a:solidFill>
@@ -10650,14 +11687,36 @@
       </p:sp>
       <p:sp>
         <p:nvSpPr>
-          <p:cNvPr id="29" name="Text 27"/>
-          <p:cNvSpPr/>
-          <p:nvPr/>
-        </p:nvSpPr>
-        <p:spPr>
-          <a:xfrm>
-            <a:off x="2011680" y="5038344"/>
-            <a:ext cx="1371600" cy="786384"/>
+          <p:cNvPr id="21" name="Shape 19"/>
+          <p:cNvSpPr/>
+          <p:nvPr/>
+        </p:nvSpPr>
+        <p:spPr>
+          <a:xfrm>
+            <a:off x="8915400" y="1737360"/>
+            <a:ext cx="2606040" cy="868680"/>
+          </a:xfrm>
+          <a:prstGeom prst="roundRect">
+            <a:avLst>
+              <a:gd name="adj" fmla="val 10526"/>
+            </a:avLst>
+          </a:prstGeom>
+          <a:solidFill>
+            <a:srgbClr val="0F3B3A"/>
+          </a:solidFill>
+          <a:ln/>
+        </p:spPr>
+      </p:sp>
+      <p:sp>
+        <p:nvSpPr>
+          <p:cNvPr id="22" name="Text 20"/>
+          <p:cNvSpPr/>
+          <p:nvPr/>
+        </p:nvSpPr>
+        <p:spPr>
+          <a:xfrm>
+            <a:off x="9098280" y="1737360"/>
+            <a:ext cx="2240280" cy="868680"/>
           </a:xfrm>
           <a:prstGeom prst="rect">
             <a:avLst/>
@@ -10673,15 +11732,96 @@
               <a:buNone/>
             </a:pPr>
             <a:r>
-              <a:rPr lang="en-US" sz="1200" b="1" dirty="0">
-                <a:solidFill>
-                  <a:srgbClr val="2BB79A"/>
-                </a:solidFill>
-                <a:latin typeface="Malgun Gothic" pitchFamily="34" charset="0"/>
-                <a:ea typeface="Malgun Gothic" pitchFamily="34" charset="-122"/>
-                <a:cs typeface="Malgun Gothic" pitchFamily="34" charset="-120"/>
-              </a:rPr>
-              <a:t>STEP 4</a:t>
+              <a:rPr lang="en-US" sz="1400" b="1" dirty="0">
+                <a:solidFill>
+                  <a:srgbClr val="FFFFFF"/>
+                </a:solidFill>
+                <a:latin typeface="Malgun Gothic" pitchFamily="34" charset="0"/>
+                <a:ea typeface="Malgun Gothic" pitchFamily="34" charset="-122"/>
+                <a:cs typeface="Malgun Gothic" pitchFamily="34" charset="-120"/>
+              </a:rPr>
+              <a:t>타이밍</a:t>
+            </a:r>
+            <a:endParaRPr lang="en-US" sz="1400" dirty="0"/>
+          </a:p>
+        </p:txBody>
+      </p:sp>
+      <p:sp>
+        <p:nvSpPr>
+          <p:cNvPr id="23" name="Text 21"/>
+          <p:cNvSpPr/>
+          <p:nvPr/>
+        </p:nvSpPr>
+        <p:spPr>
+          <a:xfrm>
+            <a:off x="9116568" y="2788920"/>
+            <a:ext cx="2240280" cy="914400"/>
+          </a:xfrm>
+          <a:prstGeom prst="rect">
+            <a:avLst/>
+          </a:prstGeom>
+          <a:noFill/>
+          <a:ln/>
+        </p:spPr>
+        <p:txBody>
+          <a:bodyPr wrap="square" rtlCol="0" anchor="t"/>
+          <a:lstStyle/>
+          <a:p>
+            <a:pPr indent="0" marL="0">
+              <a:buNone/>
+            </a:pPr>
+            <a:r>
+              <a:rPr lang="en-US" sz="1600" b="1" dirty="0">
+                <a:solidFill>
+                  <a:srgbClr val="16302E"/>
+                </a:solidFill>
+                <a:latin typeface="Malgun Gothic" pitchFamily="34" charset="0"/>
+                <a:ea typeface="Malgun Gothic" pitchFamily="34" charset="-122"/>
+                <a:cs typeface="Malgun Gothic" pitchFamily="34" charset="-120"/>
+              </a:rPr>
+              <a:t>12~1월 선행 광고</a:t>
+            </a:r>
+            <a:endParaRPr lang="en-US" sz="1600" dirty="0"/>
+          </a:p>
+        </p:txBody>
+      </p:sp>
+      <p:sp>
+        <p:nvSpPr>
+          <p:cNvPr id="24" name="Text 22"/>
+          <p:cNvSpPr/>
+          <p:nvPr/>
+        </p:nvSpPr>
+        <p:spPr>
+          <a:xfrm>
+            <a:off x="9116568" y="3749040"/>
+            <a:ext cx="2240280" cy="1920240"/>
+          </a:xfrm>
+          <a:prstGeom prst="rect">
+            <a:avLst/>
+          </a:prstGeom>
+          <a:noFill/>
+          <a:ln/>
+        </p:spPr>
+        <p:txBody>
+          <a:bodyPr wrap="square" rtlCol="0" anchor="t"/>
+          <a:lstStyle/>
+          <a:p>
+            <a:pPr indent="0" marL="0">
+              <a:lnSpc>
+                <a:spcPct val="120000"/>
+              </a:lnSpc>
+              <a:buNone/>
+            </a:pPr>
+            <a:r>
+              <a:rPr lang="en-US" sz="1200" dirty="0">
+                <a:solidFill>
+                  <a:srgbClr val="5B6B6A"/>
+                </a:solidFill>
+                <a:latin typeface="Malgun Gothic" pitchFamily="34" charset="0"/>
+                <a:ea typeface="Malgun Gothic" pitchFamily="34" charset="-122"/>
+                <a:cs typeface="Malgun Gothic" pitchFamily="34" charset="-120"/>
+              </a:rPr>
+              <a:t>연초·봄 검색 피크 직전에 콘텐츠·광고를 미리 깔아 수확.</a:t>
             </a:r>
             <a:endParaRPr lang="en-US" sz="1200" dirty="0"/>
           </a:p>
@@ -10689,88 +11829,7 @@
       </p:sp>
       <p:sp>
         <p:nvSpPr>
-          <p:cNvPr id="30" name="Text 28"/>
-          <p:cNvSpPr/>
-          <p:nvPr/>
-        </p:nvSpPr>
-        <p:spPr>
-          <a:xfrm>
-            <a:off x="3383280" y="5038344"/>
-            <a:ext cx="2468880" cy="786384"/>
-          </a:xfrm>
-          <a:prstGeom prst="rect">
-            <a:avLst/>
-          </a:prstGeom>
-          <a:noFill/>
-          <a:ln/>
-        </p:spPr>
-        <p:txBody>
-          <a:bodyPr wrap="square" lIns="0" tIns="0" rIns="0" bIns="0" rtlCol="0" anchor="ctr"/>
-          <a:lstStyle/>
-          <a:p>
-            <a:pPr indent="0" marL="0">
-              <a:buNone/>
-            </a:pPr>
-            <a:r>
-              <a:rPr lang="en-US" sz="1400" b="1" dirty="0">
-                <a:solidFill>
-                  <a:srgbClr val="16302E"/>
-                </a:solidFill>
-                <a:latin typeface="Malgun Gothic" pitchFamily="34" charset="0"/>
-                <a:ea typeface="Malgun Gothic" pitchFamily="34" charset="-122"/>
-                <a:cs typeface="Malgun Gothic" pitchFamily="34" charset="-120"/>
-              </a:rPr>
-              <a:t>제안·집행</a:t>
-            </a:r>
-            <a:endParaRPr lang="en-US" sz="1400" dirty="0"/>
-          </a:p>
-        </p:txBody>
-      </p:sp>
-      <p:sp>
-        <p:nvSpPr>
-          <p:cNvPr id="31" name="Text 29"/>
-          <p:cNvSpPr/>
-          <p:nvPr/>
-        </p:nvSpPr>
-        <p:spPr>
-          <a:xfrm>
-            <a:off x="5943600" y="5038344"/>
-            <a:ext cx="5486400" cy="786384"/>
-          </a:xfrm>
-          <a:prstGeom prst="rect">
-            <a:avLst/>
-          </a:prstGeom>
-          <a:noFill/>
-          <a:ln/>
-        </p:spPr>
-        <p:txBody>
-          <a:bodyPr wrap="square" lIns="635" tIns="635" rIns="635" bIns="635" rtlCol="0" anchor="ctr"/>
-          <a:lstStyle/>
-          <a:p>
-            <a:pPr indent="0" marL="0">
-              <a:lnSpc>
-                <a:spcPct val="105000"/>
-              </a:lnSpc>
-              <a:buNone/>
-            </a:pPr>
-            <a:r>
-              <a:rPr lang="en-US" sz="1150" dirty="0">
-                <a:solidFill>
-                  <a:srgbClr val="5B6B6A"/>
-                </a:solidFill>
-                <a:latin typeface="Malgun Gothic" pitchFamily="34" charset="0"/>
-                <a:ea typeface="Malgun Gothic" pitchFamily="34" charset="-122"/>
-                <a:cs typeface="Malgun Gothic" pitchFamily="34" charset="-120"/>
-              </a:rPr>
-              <a:t>1페이지 클라이언트 제안서 합본, 12~1월 광고 선행 집행으로 봄 피크 수확.</a:t>
-            </a:r>
-            <a:endParaRPr lang="en-US" sz="1150" dirty="0"/>
-          </a:p>
-        </p:txBody>
-      </p:sp>
-      <p:sp>
-        <p:nvSpPr>
-          <p:cNvPr id="32" name="Text 30"/>
+          <p:cNvPr id="25" name="Text 23"/>
           <p:cNvSpPr/>
           <p:nvPr/>
         </p:nvSpPr>
@@ -10809,7 +11868,7 @@
       </p:sp>
       <p:sp>
         <p:nvSpPr>
-          <p:cNvPr id="33" name="Text 31"/>
+          <p:cNvPr id="26" name="Text 24"/>
           <p:cNvSpPr/>
           <p:nvPr/>
         </p:nvSpPr>

--- a/docs/analysis/대구-달서구-다이어트-상권분석.pptx
+++ b/docs/analysis/대구-달서구-다이어트-상권분석.pptx
@@ -118,6 +118,286 @@
 </file>
 
 <file path=ppt/charts/chart1.xml><?xml version="1.0" encoding="utf-8"?>
+<c:chartSpace xmlns:c="http://schemas.openxmlformats.org/drawingml/2006/chart" xmlns:a="http://schemas.openxmlformats.org/drawingml/2006/main" xmlns:r="http://schemas.openxmlformats.org/officeDocument/2006/relationships">
+  <c:date1904 val="0"/>
+  <c:roundedCorners val="1"/>
+  <c:chart>
+    <c:autoTitleDeleted val="1"/>
+    <c:plotArea>
+      <c:layout/>
+      <c:barChart>
+        <c:barDir val="bar"/>
+        <c:grouping val="clustered"/>
+        <c:varyColors val="0"/>
+        <c:ser>
+          <c:idx val="0"/>
+          <c:order val="0"/>
+          <c:tx>
+            <c:strRef>
+              <c:f>Sheet1!$B$1</c:f>
+              <c:strCache>
+                <c:ptCount val="1"/>
+                <c:pt idx="0">
+                  <c:v>기관수</c:v>
+                </c:pt>
+              </c:strCache>
+            </c:strRef>
+          </c:tx>
+          <c:spPr>
+            <a:solidFill>
+              <a:srgbClr val="FF6B5B"/>
+            </a:solidFill>
+            <a:effectLst/>
+          </c:spPr>
+          <c:invertIfNegative val="0"/>
+          <c:dLbls>
+            <c:numFmt formatCode="#,##0" sourceLinked="0"/>
+            <c:txPr>
+              <a:bodyPr/>
+              <a:lstStyle/>
+              <a:p>
+                <a:pPr>
+                  <a:defRPr b="1" i="0" strike="noStrike" sz="1100" u="none">
+                    <a:solidFill>
+                      <a:srgbClr val="16302E"/>
+                    </a:solidFill>
+                    <a:latin typeface="Malgun Gothic"/>
+                  </a:defRPr>
+                </a:pPr>
+              </a:p>
+            </c:txPr>
+            <c:showLegendKey val="0"/>
+            <c:showVal val="1"/>
+            <c:showCatName val="0"/>
+            <c:showSerName val="0"/>
+            <c:showPercent val="0"/>
+            <c:showBubbleSize val="0"/>
+            <c:showLeaderLines val="0"/>
+          </c:dLbls>
+          <c:dPt>
+            <c:idx val="0"/>
+            <c:invertIfNegative val="0"/>
+            <c:bubble3D val="0"/>
+            <c:spPr>
+              <a:solidFill>
+                <a:srgbClr val="FF6B5B"/>
+              </a:solidFill>
+              <a:effectLst/>
+            </c:spPr>
+          </c:dPt>
+          <c:dPt>
+            <c:idx val="1"/>
+            <c:invertIfNegative val="0"/>
+            <c:bubble3D val="0"/>
+            <c:spPr>
+              <a:solidFill>
+                <a:srgbClr val="2BB79A"/>
+              </a:solidFill>
+              <a:effectLst/>
+            </c:spPr>
+          </c:dPt>
+          <c:dPt>
+            <c:idx val="2"/>
+            <c:invertIfNegative val="0"/>
+            <c:bubble3D val="0"/>
+            <c:spPr>
+              <a:solidFill>
+                <a:srgbClr val="0E7C7B"/>
+              </a:solidFill>
+              <a:effectLst/>
+            </c:spPr>
+          </c:dPt>
+          <c:dPt>
+            <c:idx val="3"/>
+            <c:invertIfNegative val="0"/>
+            <c:bubble3D val="0"/>
+            <c:spPr>
+              <a:solidFill>
+                <a:srgbClr val="0F3B3A"/>
+              </a:solidFill>
+              <a:effectLst/>
+            </c:spPr>
+          </c:dPt>
+          <c:cat>
+            <c:multiLvlStrRef>
+              <c:f>Sheet1!$A$2:$A$5</c:f>
+              <c:multiLvlStrCache>
+                <c:ptCount val="4"/>
+                <c:lvl>
+                  <c:pt idx="0">
+                    <c:v>의원</c:v>
+                  </c:pt>
+                  <c:pt idx="1">
+                    <c:v>치과의원</c:v>
+                  </c:pt>
+                  <c:pt idx="2">
+                    <c:v>한의원</c:v>
+                  </c:pt>
+                  <c:pt idx="3">
+                    <c:v>병원</c:v>
+                  </c:pt>
+                </c:lvl>
+              </c:multiLvlStrCache>
+            </c:multiLvlStrRef>
+          </c:cat>
+          <c:val>
+            <c:numRef>
+              <c:f>Sheet1!$B$2:$B$5</c:f>
+              <c:numCache>
+                <c:formatCode>General</c:formatCode>
+                <c:ptCount val="4"/>
+                <c:pt idx="0">
+                  <c:v>429</c:v>
+                </c:pt>
+                <c:pt idx="1">
+                  <c:v>216</c:v>
+                </c:pt>
+                <c:pt idx="2">
+                  <c:v>173</c:v>
+                </c:pt>
+                <c:pt idx="3">
+                  <c:v>21</c:v>
+                </c:pt>
+              </c:numCache>
+            </c:numRef>
+          </c:val>
+        </c:ser>
+        <c:dLbls>
+          <c:numFmt formatCode="#,##0" sourceLinked="0"/>
+          <c:txPr>
+            <a:bodyPr/>
+            <a:lstStyle/>
+            <a:p>
+              <a:pPr>
+                <a:defRPr b="1" i="0" strike="noStrike" sz="1100" u="none">
+                  <a:solidFill>
+                    <a:srgbClr val="16302E"/>
+                  </a:solidFill>
+                  <a:latin typeface="Malgun Gothic"/>
+                </a:defRPr>
+              </a:pPr>
+            </a:p>
+          </c:txPr>
+          <c:showLegendKey val="0"/>
+          <c:showVal val="1"/>
+          <c:showCatName val="0"/>
+          <c:showSerName val="0"/>
+          <c:showPercent val="0"/>
+          <c:showBubbleSize val="0"/>
+          <c:showLeaderLines val="0"/>
+        </c:dLbls>
+        <c:gapWidth val="40"/>
+        <c:overlap val="0"/>
+        <c:axId val="2094734554"/>
+        <c:axId val="2094734552"/>
+        <c:axId val="2094734556"/>
+      </c:barChart>
+      <c:catAx>
+        <c:axId val="2094734554"/>
+        <c:scaling>
+          <c:orientation val="minMax"/>
+        </c:scaling>
+        <c:delete val="0"/>
+        <c:axPos val="l"/>
+        <c:numFmt formatCode="General" sourceLinked="1"/>
+        <c:majorTickMark val="out"/>
+        <c:minorTickMark val="none"/>
+        <c:tickLblPos val="nextTo"/>
+        <c:spPr>
+          <a:ln w="12700" cap="flat">
+            <a:solidFill>
+              <a:srgbClr val="888888"/>
+            </a:solidFill>
+            <a:prstDash val="solid"/>
+            <a:round/>
+          </a:ln>
+        </c:spPr>
+        <c:txPr>
+          <a:bodyPr/>
+          <a:lstStyle/>
+          <a:p>
+            <a:pPr>
+              <a:defRPr sz="1200" b="0" i="0" u="none" strike="noStrike">
+                <a:solidFill>
+                  <a:srgbClr val="16302E"/>
+                </a:solidFill>
+                <a:latin typeface="Malgun Gothic"/>
+              </a:defRPr>
+            </a:pPr>
+            <a:endParaRPr lang="en-US"/>
+          </a:p>
+        </c:txPr>
+        <c:crossAx val="2094734552"/>
+        <c:crosses val="autoZero"/>
+        <c:auto val="1"/>
+        <c:lblAlgn val="ctr"/>
+        <c:noMultiLvlLbl val="1"/>
+      </c:catAx>
+      <c:valAx>
+        <c:axId val="2094734552"/>
+        <c:scaling>
+          <c:orientation val="minMax"/>
+          <c:max val="520"/>
+        </c:scaling>
+        <c:delete val="1"/>
+        <c:axPos val="b"/>
+        <c:numFmt formatCode="General" sourceLinked="0"/>
+        <c:majorTickMark val="out"/>
+        <c:minorTickMark val="none"/>
+        <c:tickLblPos val="low"/>
+        <c:spPr>
+          <a:ln w="12700" cap="flat">
+            <a:solidFill>
+              <a:srgbClr val="888888"/>
+            </a:solidFill>
+            <a:prstDash val="solid"/>
+            <a:round/>
+          </a:ln>
+        </c:spPr>
+        <c:txPr>
+          <a:bodyPr/>
+          <a:lstStyle/>
+          <a:p>
+            <a:pPr>
+              <a:defRPr sz="1200" b="0" i="0" u="none" strike="noStrike">
+                <a:solidFill>
+                  <a:srgbClr val="000000"/>
+                </a:solidFill>
+                <a:latin typeface="Arial"/>
+              </a:defRPr>
+            </a:pPr>
+            <a:endParaRPr lang="en-US"/>
+          </a:p>
+        </c:txPr>
+        <c:crossAx val="2094734554"/>
+        <c:crosses val="autoZero"/>
+        <c:crossBetween val="between"/>
+      </c:valAx>
+      <c:spPr>
+        <a:noFill/>
+        <a:ln>
+          <a:noFill/>
+        </a:ln>
+        <a:effectLst/>
+      </c:spPr>
+    </c:plotArea>
+    <c:plotVisOnly val="1"/>
+    <c:dispBlanksAs val="span"/>
+  </c:chart>
+  <c:spPr>
+    <a:noFill/>
+    <a:ln>
+      <a:noFill/>
+    </a:ln>
+    <a:effectLst/>
+  </c:spPr>
+  <c:externalData r:id="rId1">
+    <c:autoUpdate val="0"/>
+  </c:externalData>
+</c:chartSpace>
+</file>
+
+<file path=ppt/charts/chart2.xml><?xml version="1.0" encoding="utf-8"?>
 <c:chartSpace xmlns:c="http://schemas.openxmlformats.org/drawingml/2006/chart" xmlns:a="http://schemas.openxmlformats.org/drawingml/2006/main" xmlns:r="http://schemas.openxmlformats.org/officeDocument/2006/relationships">
   <c:date1904 val="0"/>
   <c:roundedCorners val="1"/>
@@ -432,7 +712,7 @@
 </c:chartSpace>
 </file>
 
-<file path=ppt/charts/chart2.xml><?xml version="1.0" encoding="utf-8"?>
+<file path=ppt/charts/chart3.xml><?xml version="1.0" encoding="utf-8"?>
 <c:chartSpace xmlns:c="http://schemas.openxmlformats.org/drawingml/2006/chart" xmlns:a="http://schemas.openxmlformats.org/drawingml/2006/main" xmlns:r="http://schemas.openxmlformats.org/officeDocument/2006/relationships">
   <c:date1904 val="0"/>
   <c:roundedCorners val="1"/>
@@ -1965,7 +2245,7 @@
           <a:p>
             <a:r>
               <a:rPr lang="en-US" dirty="0"/>
-              <a:t>866개 의료기관(대구 20.8%), 1만명당 16.7개. 공급 총량 균형이나 다이어트 상위 노출은 한방 편중 → 양방 의학 비만치료 빈틈.</a:t>
+              <a:t>심평원 2026.3 전수: 달서구 872개(대구 20.6%), 1만명당 16.9. 의원 429 vs 한의원 173(2.5배). 공급은 양방 우세이나 다이어트 검색은 한의원 점유 → 양방 의원 마케팅 공백이 기회. 밀집 1위 상인동.</a:t>
             </a:r>
             <a:endParaRPr lang="en-US" dirty="0"/>
           </a:p>
@@ -3049,7 +3329,7 @@
                 <a:ea typeface="Cambria" pitchFamily="34" charset="-122"/>
                 <a:cs typeface="Cambria" pitchFamily="34" charset="-120"/>
               </a:rPr>
-              <a:t>866</a:t>
+              <a:t>872</a:t>
             </a:r>
             <a:endParaRPr lang="en-US" sz="2600" dirty="0"/>
           </a:p>
@@ -3088,7 +3368,7 @@
                 <a:ea typeface="Malgun Gothic" pitchFamily="34" charset="-122"/>
                 <a:cs typeface="Malgun Gothic" pitchFamily="34" charset="-120"/>
               </a:rPr>
-              <a:t>의료기관 수 (대구의 20.8%)</a:t>
+              <a:t>의료기관 수 (대구의 20.6%)</a:t>
             </a:r>
             <a:endParaRPr lang="en-US" sz="1200" dirty="0"/>
           </a:p>
@@ -4588,7 +4868,7 @@
                 <a:ea typeface="Malgun Gothic" pitchFamily="34" charset="-122"/>
                 <a:cs typeface="Malgun Gothic" pitchFamily="34" charset="-120"/>
               </a:rPr>
-              <a:t>공공데이터/건강보험심사평가원 의료기관 현황
+              <a:t>심평원 요양기관 명부(2026.03, 전수 872개) + 진료통계(2022)
 </a:t>
             </a:r>
             <a:pPr indent="0" marL="0">
@@ -4724,7 +5004,7 @@
                 <a:ea typeface="Malgun Gothic" pitchFamily="34" charset="-122"/>
                 <a:cs typeface="Malgun Gothic" pitchFamily="34" charset="-120"/>
               </a:rPr>
-              <a:t>추가 확정이 필요한 항목</a:t>
+              <a:t>실측 완료 · 남은 정밀화</a:t>
             </a:r>
             <a:endParaRPr lang="en-US" sz="1500" dirty="0"/>
           </a:p>
@@ -4753,7 +5033,7 @@
           <a:p>
             <a:pPr indent="0" marL="0">
               <a:lnSpc>
-                <a:spcPct val="130000"/>
+                <a:spcPct val="135000"/>
               </a:lnSpc>
               <a:buNone/>
             </a:pPr>
@@ -4766,11 +5046,11 @@
                 <a:ea typeface="Malgun Gothic" pitchFamily="34" charset="-122"/>
                 <a:cs typeface="Malgun Gothic" pitchFamily="34" charset="-120"/>
               </a:rPr>
-              <a:t>· 여성 × 30~50대 코어 인원  </a:t>
+              <a:t>✓ 인구·성별·세대  </a:t>
             </a:r>
             <a:pPr indent="0" marL="0">
               <a:lnSpc>
-                <a:spcPct val="130000"/>
+                <a:spcPct val="135000"/>
               </a:lnSpc>
               <a:buNone/>
             </a:pPr>
@@ -4783,12 +5063,12 @@
                 <a:ea typeface="Malgun Gothic" pitchFamily="34" charset="-122"/>
                 <a:cs typeface="Malgun Gothic" pitchFamily="34" charset="-120"/>
               </a:rPr>
-              <a:t>→ 연령×성별 원자료(동별 성별 합계는 실측 확정)
+              <a:t>행안부 2026.03 실측
 </a:t>
             </a:r>
             <a:pPr indent="0" marL="0">
               <a:lnSpc>
-                <a:spcPct val="130000"/>
+                <a:spcPct val="135000"/>
               </a:lnSpc>
               <a:buNone/>
             </a:pPr>
@@ -4801,11 +5081,11 @@
                 <a:ea typeface="Malgun Gothic" pitchFamily="34" charset="-122"/>
                 <a:cs typeface="Malgun Gothic" pitchFamily="34" charset="-120"/>
               </a:rPr>
-              <a:t>· 의원 vs 한의원 종별 분해  </a:t>
+              <a:t>✓ 기관 종별 수  </a:t>
             </a:r>
             <a:pPr indent="0" marL="0">
               <a:lnSpc>
-                <a:spcPct val="130000"/>
+                <a:spcPct val="135000"/>
               </a:lnSpc>
               <a:buNone/>
             </a:pPr>
@@ -4818,12 +5098,12 @@
                 <a:ea typeface="Malgun Gothic" pitchFamily="34" charset="-122"/>
                 <a:cs typeface="Malgun Gothic" pitchFamily="34" charset="-120"/>
               </a:rPr>
-              <a:t>→ 심평원 표시과목별 표(전체 866개는 확정)
+              <a:t>심평원 2026.03 전수(872개)
 </a:t>
             </a:r>
             <a:pPr indent="0" marL="0">
               <a:lnSpc>
-                <a:spcPct val="130000"/>
+                <a:spcPct val="135000"/>
               </a:lnSpc>
               <a:buNone/>
             </a:pPr>
@@ -4836,11 +5116,11 @@
                 <a:ea typeface="Malgun Gothic" pitchFamily="34" charset="-122"/>
                 <a:cs typeface="Malgun Gothic" pitchFamily="34" charset="-120"/>
               </a:rPr>
-              <a:t>· 검색 f:m 절대비  </a:t>
+              <a:t>✓ 비만·대사 진료  </a:t>
             </a:r>
             <a:pPr indent="0" marL="0">
               <a:lnSpc>
-                <a:spcPct val="130000"/>
+                <a:spcPct val="135000"/>
               </a:lnSpc>
               <a:buNone/>
             </a:pPr>
@@ -4853,7 +5133,42 @@
                 <a:ea typeface="Malgun Gothic" pitchFamily="34" charset="-122"/>
                 <a:cs typeface="Malgun Gothic" pitchFamily="34" charset="-120"/>
               </a:rPr>
-              <a:t>→ 네이버 검색광고 성별 노출/클릭</a:t>
+              <a:t>심평원 2022 진료통계
+</a:t>
+            </a:r>
+            <a:pPr indent="0" marL="0">
+              <a:lnSpc>
+                <a:spcPct val="135000"/>
+              </a:lnSpc>
+              <a:buNone/>
+            </a:pPr>
+            <a:r>
+              <a:rPr lang="en-US" sz="1200" b="1" dirty="0">
+                <a:solidFill>
+                  <a:srgbClr val="FFFFFF"/>
+                </a:solidFill>
+                <a:latin typeface="Malgun Gothic" pitchFamily="34" charset="0"/>
+                <a:ea typeface="Malgun Gothic" pitchFamily="34" charset="-122"/>
+                <a:cs typeface="Malgun Gothic" pitchFamily="34" charset="-120"/>
+              </a:rPr>
+              <a:t>· 남은 정밀화  </a:t>
+            </a:r>
+            <a:pPr indent="0" marL="0">
+              <a:lnSpc>
+                <a:spcPct val="135000"/>
+              </a:lnSpc>
+              <a:buNone/>
+            </a:pPr>
+            <a:r>
+              <a:rPr lang="en-US" sz="1200" dirty="0">
+                <a:solidFill>
+                  <a:srgbClr val="9FBAB7"/>
+                </a:solidFill>
+                <a:latin typeface="Malgun Gothic" pitchFamily="34" charset="0"/>
+                <a:ea typeface="Malgun Gothic" pitchFamily="34" charset="-122"/>
+                <a:cs typeface="Malgun Gothic" pitchFamily="34" charset="-120"/>
+              </a:rPr>
+              <a:t>여성×30~50대 코어 · f:m 검색 절대비</a:t>
             </a:r>
             <a:endParaRPr lang="en-US" sz="1200" dirty="0"/>
           </a:p>
@@ -5333,7 +5648,7 @@
                 <a:ea typeface="Malgun Gothic" pitchFamily="34" charset="-122"/>
                 <a:cs typeface="Malgun Gothic" pitchFamily="34" charset="-120"/>
               </a:rPr>
-              <a:t>양방 전문공급의 빈틈</a:t>
+              <a:t>마케팅의 빈틈(공급 아님)</a:t>
             </a:r>
             <a:endParaRPr lang="en-US" sz="1600" dirty="0"/>
           </a:p>
@@ -5375,7 +5690,7 @@
                 <a:ea typeface="Malgun Gothic" pitchFamily="34" charset="-122"/>
                 <a:cs typeface="Malgun Gothic" pitchFamily="34" charset="-120"/>
               </a:rPr>
-              <a:t>의료기관 866개(대구 20.8%)지만 다이어트 상위 노출은 한방 편중. 양방 의학 비만치료 포지션이 비어 있음.</a:t>
+              <a:t>의료기관 872개 중 의원 429 &gt; 한의원 173(2.5배)인데도 '다이어트' 검색은 한의원이 점유. 양방 의원의 다이어트 마케팅 공백이 곧 기회.</a:t>
             </a:r>
             <a:endParaRPr lang="en-US" sz="1200" dirty="0"/>
           </a:p>
@@ -6959,7 +7274,7 @@
                 <a:ea typeface="Malgun Gothic" pitchFamily="34" charset="-122"/>
                 <a:cs typeface="Malgun Gothic" pitchFamily="34" charset="-120"/>
               </a:rPr>
-              <a:t>공급 총량은 균형, 다이어트 전문은 한방 편중</a:t>
+              <a:t>공급은 양방 의원이 우세 — 빈틈은 '다이어트 마케팅'</a:t>
             </a:r>
             <a:endParaRPr lang="en-US" sz="3000" dirty="0"/>
           </a:p>
@@ -7012,12 +7327,12 @@
         </p:nvSpPr>
         <p:spPr>
           <a:xfrm>
-            <a:off x="548640" y="1691640"/>
-            <a:ext cx="2743200" cy="1783080"/>
+            <a:off x="548640" y="1645920"/>
+            <a:ext cx="2743200" cy="1737360"/>
           </a:xfrm>
           <a:prstGeom prst="roundRect">
             <a:avLst>
-              <a:gd name="adj" fmla="val 4615"/>
+              <a:gd name="adj" fmla="val 4737"/>
             </a:avLst>
           </a:prstGeom>
           <a:solidFill>
@@ -7046,7 +7361,7 @@
         </p:nvSpPr>
         <p:spPr>
           <a:xfrm>
-            <a:off x="594360" y="1837944"/>
+            <a:off x="594360" y="1792224"/>
             <a:ext cx="2651760" cy="640080"/>
           </a:xfrm>
           <a:prstGeom prst="rect">
@@ -7071,7 +7386,7 @@
                 <a:ea typeface="Cambria" pitchFamily="34" charset="-122"/>
                 <a:cs typeface="Cambria" pitchFamily="34" charset="-120"/>
               </a:rPr>
-              <a:t>866</a:t>
+              <a:t>872</a:t>
             </a:r>
             <a:pPr algn="ctr" indent="0" marL="0">
               <a:buNone/>
@@ -7085,7 +7400,7 @@
                 <a:ea typeface="Malgun Gothic" pitchFamily="34" charset="-122"/>
                 <a:cs typeface="Malgun Gothic" pitchFamily="34" charset="-120"/>
               </a:rPr>
-              <a:t> 개소</a:t>
+              <a:t> 개</a:t>
             </a:r>
             <a:endParaRPr lang="en-US" sz="3300" dirty="0"/>
           </a:p>
@@ -7099,7 +7414,7 @@
         </p:nvSpPr>
         <p:spPr>
           <a:xfrm>
-            <a:off x="658368" y="2907792"/>
+            <a:off x="658368" y="2816352"/>
             <a:ext cx="2523744" cy="457200"/>
           </a:xfrm>
           <a:prstGeom prst="rect">
@@ -7124,7 +7439,7 @@
                 <a:ea typeface="Malgun Gothic" pitchFamily="34" charset="-122"/>
                 <a:cs typeface="Malgun Gothic" pitchFamily="34" charset="-120"/>
               </a:rPr>
-              <a:t>달서구 의료기관 수 (전 종별 합계)</a:t>
+              <a:t>달서구 요양기관 (심평원 2026.3 전수)</a:t>
             </a:r>
             <a:endParaRPr lang="en-US" sz="1100" dirty="0"/>
           </a:p>
@@ -7138,12 +7453,12 @@
         </p:nvSpPr>
         <p:spPr>
           <a:xfrm>
-            <a:off x="3429000" y="1691640"/>
-            <a:ext cx="2743200" cy="1783080"/>
+            <a:off x="3429000" y="1645920"/>
+            <a:ext cx="2743200" cy="1737360"/>
           </a:xfrm>
           <a:prstGeom prst="roundRect">
             <a:avLst>
-              <a:gd name="adj" fmla="val 4615"/>
+              <a:gd name="adj" fmla="val 4737"/>
             </a:avLst>
           </a:prstGeom>
           <a:solidFill>
@@ -7172,7 +7487,7 @@
         </p:nvSpPr>
         <p:spPr>
           <a:xfrm>
-            <a:off x="3474720" y="1837944"/>
+            <a:off x="3474720" y="1792224"/>
             <a:ext cx="2651760" cy="640080"/>
           </a:xfrm>
           <a:prstGeom prst="rect">
@@ -7197,7 +7512,7 @@
                 <a:ea typeface="Cambria" pitchFamily="34" charset="-122"/>
                 <a:cs typeface="Cambria" pitchFamily="34" charset="-120"/>
               </a:rPr>
-              <a:t>20.8</a:t>
+              <a:t>20.6</a:t>
             </a:r>
             <a:pPr algn="ctr" indent="0" marL="0">
               <a:buNone/>
@@ -7225,7 +7540,7 @@
         </p:nvSpPr>
         <p:spPr>
           <a:xfrm>
-            <a:off x="3538728" y="2907792"/>
+            <a:off x="3538728" y="2816352"/>
             <a:ext cx="2523744" cy="457200"/>
           </a:xfrm>
           <a:prstGeom prst="rect">
@@ -7250,7 +7565,7 @@
                 <a:ea typeface="Malgun Gothic" pitchFamily="34" charset="-122"/>
                 <a:cs typeface="Malgun Gothic" pitchFamily="34" charset="-120"/>
               </a:rPr>
-              <a:t>대구 전체 4,155개소 중 달서구 점유율</a:t>
+              <a:t>대구 4,225개 중 달서구 점유율</a:t>
             </a:r>
             <a:endParaRPr lang="en-US" sz="1100" dirty="0"/>
           </a:p>
@@ -7264,12 +7579,12 @@
         </p:nvSpPr>
         <p:spPr>
           <a:xfrm>
-            <a:off x="6309360" y="1691640"/>
-            <a:ext cx="2743200" cy="1783080"/>
+            <a:off x="6309360" y="1645920"/>
+            <a:ext cx="2743200" cy="1737360"/>
           </a:xfrm>
           <a:prstGeom prst="roundRect">
             <a:avLst>
-              <a:gd name="adj" fmla="val 4615"/>
+              <a:gd name="adj" fmla="val 4737"/>
             </a:avLst>
           </a:prstGeom>
           <a:solidFill>
@@ -7298,7 +7613,7 @@
         </p:nvSpPr>
         <p:spPr>
           <a:xfrm>
-            <a:off x="6355080" y="1837944"/>
+            <a:off x="6355080" y="1792224"/>
             <a:ext cx="2651760" cy="640080"/>
           </a:xfrm>
           <a:prstGeom prst="rect">
@@ -7323,7 +7638,7 @@
                 <a:ea typeface="Cambria" pitchFamily="34" charset="-122"/>
                 <a:cs typeface="Cambria" pitchFamily="34" charset="-120"/>
               </a:rPr>
-              <a:t>16.7</a:t>
+              <a:t>16.9</a:t>
             </a:r>
             <a:pPr algn="ctr" indent="0" marL="0">
               <a:buNone/>
@@ -7351,7 +7666,7 @@
         </p:nvSpPr>
         <p:spPr>
           <a:xfrm>
-            <a:off x="6419088" y="2907792"/>
+            <a:off x="6419088" y="2816352"/>
             <a:ext cx="2523744" cy="457200"/>
           </a:xfrm>
           <a:prstGeom prst="rect">
@@ -7376,7 +7691,7 @@
                 <a:ea typeface="Malgun Gothic" pitchFamily="34" charset="-122"/>
                 <a:cs typeface="Malgun Gothic" pitchFamily="34" charset="-120"/>
               </a:rPr>
-              <a:t>인구 1만 명당 의료기관 수</a:t>
+              <a:t>인구 1만 명당 요양기관</a:t>
             </a:r>
             <a:endParaRPr lang="en-US" sz="1100" dirty="0"/>
           </a:p>
@@ -7390,12 +7705,12 @@
         </p:nvSpPr>
         <p:spPr>
           <a:xfrm>
-            <a:off x="9189720" y="1691640"/>
-            <a:ext cx="2423160" cy="1783080"/>
+            <a:off x="9189720" y="1645920"/>
+            <a:ext cx="2423160" cy="1737360"/>
           </a:xfrm>
           <a:prstGeom prst="roundRect">
             <a:avLst>
-              <a:gd name="adj" fmla="val 4615"/>
+              <a:gd name="adj" fmla="val 4737"/>
             </a:avLst>
           </a:prstGeom>
           <a:solidFill>
@@ -7424,7 +7739,7 @@
         </p:nvSpPr>
         <p:spPr>
           <a:xfrm>
-            <a:off x="9235440" y="1837944"/>
+            <a:off x="9235440" y="1792224"/>
             <a:ext cx="2331720" cy="640080"/>
           </a:xfrm>
           <a:prstGeom prst="rect">
@@ -7449,7 +7764,7 @@
                 <a:ea typeface="Cambria" pitchFamily="34" charset="-122"/>
                 <a:cs typeface="Cambria" pitchFamily="34" charset="-120"/>
               </a:rPr>
-              <a:t>4/5</a:t>
+              <a:t>2.5 : 1</a:t>
             </a:r>
             <a:pPr algn="ctr" indent="0" marL="0">
               <a:buNone/>
@@ -7466,7 +7781,7 @@
         </p:nvSpPr>
         <p:spPr>
           <a:xfrm>
-            <a:off x="9299448" y="2907792"/>
+            <a:off x="9299448" y="2816352"/>
             <a:ext cx="2203704" cy="457200"/>
           </a:xfrm>
           <a:prstGeom prst="rect">
@@ -7491,7 +7806,7 @@
                 <a:ea typeface="Malgun Gothic" pitchFamily="34" charset="-122"/>
                 <a:cs typeface="Malgun Gothic" pitchFamily="34" charset="-120"/>
               </a:rPr>
-              <a:t>'다이어트' 상위 노출 중 한방 비중</a:t>
+              <a:t>의원(429) : 한의원(173)</a:t>
             </a:r>
             <a:endParaRPr lang="en-US" sz="1100" dirty="0"/>
           </a:p>
@@ -7499,18 +7814,73 @@
       </p:sp>
       <p:sp>
         <p:nvSpPr>
-          <p:cNvPr id="17" name="Shape 15"/>
-          <p:cNvSpPr/>
-          <p:nvPr/>
-        </p:nvSpPr>
-        <p:spPr>
-          <a:xfrm>
-            <a:off x="548640" y="3749040"/>
-            <a:ext cx="11064240" cy="2240280"/>
+          <p:cNvPr id="17" name="Text 15"/>
+          <p:cNvSpPr/>
+          <p:nvPr/>
+        </p:nvSpPr>
+        <p:spPr>
+          <a:xfrm>
+            <a:off x="548640" y="3566160"/>
+            <a:ext cx="5212080" cy="320040"/>
+          </a:xfrm>
+          <a:prstGeom prst="rect">
+            <a:avLst/>
+          </a:prstGeom>
+          <a:noFill/>
+          <a:ln/>
+        </p:spPr>
+        <p:txBody>
+          <a:bodyPr wrap="square" rtlCol="0" anchor="ctr"/>
+          <a:lstStyle/>
+          <a:p>
+            <a:pPr indent="0" marL="0">
+              <a:buNone/>
+            </a:pPr>
+            <a:r>
+              <a:rPr lang="en-US" sz="1300" b="1" dirty="0">
+                <a:solidFill>
+                  <a:srgbClr val="16302E"/>
+                </a:solidFill>
+                <a:latin typeface="Malgun Gothic" pitchFamily="34" charset="0"/>
+                <a:ea typeface="Malgun Gothic" pitchFamily="34" charset="-122"/>
+                <a:cs typeface="Malgun Gothic" pitchFamily="34" charset="-120"/>
+              </a:rPr>
+              <a:t>종별 기관 수</a:t>
+            </a:r>
+            <a:endParaRPr lang="en-US" sz="1300" dirty="0"/>
+          </a:p>
+        </p:txBody>
+      </p:sp>
+      <p:graphicFrame>
+        <p:nvGraphicFramePr>
+          <p:cNvPr id="18" name="Chart 0" descr=""/>
+          <p:cNvGraphicFramePr/>
+          <p:nvPr/>
+        </p:nvGraphicFramePr>
+        <p:xfrm>
+          <a:off x="502920" y="3931920"/>
+          <a:ext cx="5257800" cy="2057400"/>
+        </p:xfrm>
+        <a:graphic xmlns:a="http://schemas.openxmlformats.org/drawingml/2006/main">
+          <a:graphicData uri="http://schemas.openxmlformats.org/drawingml/2006/chart">
+            <c:chart xmlns:c="http://schemas.openxmlformats.org/drawingml/2006/chart" r:id="rId1"/>
+          </a:graphicData>
+        </a:graphic>
+      </p:graphicFrame>
+      <p:sp>
+        <p:nvSpPr>
+          <p:cNvPr id="19" name="Shape 16"/>
+          <p:cNvSpPr/>
+          <p:nvPr/>
+        </p:nvSpPr>
+        <p:spPr>
+          <a:xfrm>
+            <a:off x="5943600" y="3657600"/>
+            <a:ext cx="5669280" cy="2331720"/>
           </a:xfrm>
           <a:prstGeom prst="roundRect">
             <a:avLst>
-              <a:gd name="adj" fmla="val 4082"/>
+              <a:gd name="adj" fmla="val 3922"/>
             </a:avLst>
           </a:prstGeom>
           <a:solidFill>
@@ -7526,14 +7896,14 @@
       </p:sp>
       <p:sp>
         <p:nvSpPr>
-          <p:cNvPr id="18" name="Text 16"/>
-          <p:cNvSpPr/>
-          <p:nvPr/>
-        </p:nvSpPr>
-        <p:spPr>
-          <a:xfrm>
-            <a:off x="777240" y="3931920"/>
-            <a:ext cx="5486400" cy="365760"/>
+          <p:cNvPr id="20" name="Text 17"/>
+          <p:cNvSpPr/>
+          <p:nvPr/>
+        </p:nvSpPr>
+        <p:spPr>
+          <a:xfrm>
+            <a:off x="6172200" y="3822192"/>
+            <a:ext cx="5212080" cy="365760"/>
           </a:xfrm>
           <a:prstGeom prst="rect">
             <a:avLst/>
@@ -7557,7 +7927,7 @@
                 <a:ea typeface="Malgun Gothic" pitchFamily="34" charset="-122"/>
                 <a:cs typeface="Malgun Gothic" pitchFamily="34" charset="-120"/>
               </a:rPr>
-              <a:t>핵심 해석</a:t>
+              <a:t>핵심 = 공급 아닌 '마케팅'의 빈틈</a:t>
             </a:r>
             <a:endParaRPr lang="en-US" sz="1500" dirty="0"/>
           </a:p>
@@ -7565,14 +7935,14 @@
       </p:sp>
       <p:sp>
         <p:nvSpPr>
-          <p:cNvPr id="19" name="Text 17"/>
-          <p:cNvSpPr/>
-          <p:nvPr/>
-        </p:nvSpPr>
-        <p:spPr>
-          <a:xfrm>
-            <a:off x="777240" y="4315968"/>
-            <a:ext cx="10607040" cy="1554480"/>
+          <p:cNvPr id="21" name="Text 18"/>
+          <p:cNvSpPr/>
+          <p:nvPr/>
+        </p:nvSpPr>
+        <p:spPr>
+          <a:xfrm>
+            <a:off x="6172200" y="4206240"/>
+            <a:ext cx="5257800" cy="1737360"/>
           </a:xfrm>
           <a:prstGeom prst="rect">
             <a:avLst/>
@@ -7586,12 +7956,12 @@
           <a:p>
             <a:pPr indent="0" marL="0">
               <a:lnSpc>
-                <a:spcPct val="120000"/>
+                <a:spcPct val="112000"/>
               </a:lnSpc>
               <a:buNone/>
             </a:pPr>
             <a:r>
-              <a:rPr lang="en-US" sz="1300" b="1" dirty="0">
+              <a:rPr lang="en-US" sz="1200" b="1" dirty="0">
                 <a:solidFill>
                   <a:srgbClr val="16302E"/>
                 </a:solidFill>
@@ -7599,16 +7969,16 @@
                 <a:ea typeface="Malgun Gothic" pitchFamily="34" charset="-122"/>
                 <a:cs typeface="Malgun Gothic" pitchFamily="34" charset="-120"/>
               </a:rPr>
-              <a:t>인구 비중 21.9% vs 의료기관 비중 20.8% → 소폭 과소공급.  </a:t>
+              <a:t>양방 의원이 한의원의 2.5배(429 vs 173)로 수적 우위.  </a:t>
             </a:r>
             <a:pPr indent="0" marL="0">
               <a:lnSpc>
-                <a:spcPct val="120000"/>
+                <a:spcPct val="112000"/>
               </a:lnSpc>
               <a:buNone/>
             </a:pPr>
             <a:r>
-              <a:rPr lang="en-US" sz="1300" dirty="0">
+              <a:rPr lang="en-US" sz="1200" dirty="0">
                 <a:solidFill>
                   <a:srgbClr val="5B6B6A"/>
                 </a:solidFill>
@@ -7616,34 +7986,35 @@
                 <a:ea typeface="Malgun Gothic" pitchFamily="34" charset="-122"/>
                 <a:cs typeface="Malgun Gothic" pitchFamily="34" charset="-120"/>
               </a:rPr>
-              <a:t>대형 수요 대비 공급 밀도가 낮아 신규 진입 여지가 있음.
+              <a:t>그런데 '다이어트' 검색 상위는 한의원이 점유 → 다수 양방 의원이 다이어트를 마케팅하지 않을 뿐.
 </a:t>
             </a:r>
             <a:pPr indent="0" marL="0">
               <a:lnSpc>
-                <a:spcPct val="120000"/>
+                <a:spcPct val="112000"/>
               </a:lnSpc>
               <a:buNone/>
             </a:pPr>
             <a:r>
-              <a:rPr lang="en-US" sz="1300" b="1" dirty="0">
-                <a:solidFill>
-                  <a:srgbClr val="16302E"/>
-                </a:solidFill>
-                <a:latin typeface="Malgun Gothic" pitchFamily="34" charset="0"/>
-                <a:ea typeface="Malgun Gothic" pitchFamily="34" charset="-122"/>
-                <a:cs typeface="Malgun Gothic" pitchFamily="34" charset="-120"/>
-              </a:rPr>
-              <a:t>그러나 다이어트·비만 '전문 포지션'은 한방에 쏠려 있음.  </a:t>
+              <a:rPr lang="en-US" sz="1200" b="1" dirty="0">
+                <a:solidFill>
+                  <a:srgbClr val="FF6B5B"/>
+                </a:solidFill>
+                <a:latin typeface="Malgun Gothic" pitchFamily="34" charset="0"/>
+                <a:ea typeface="Malgun Gothic" pitchFamily="34" charset="-122"/>
+                <a:cs typeface="Malgun Gothic" pitchFamily="34" charset="-120"/>
+              </a:rPr>
+              <a:t>→ 기존 429개 양방 의원의 다이어트 포지셔닝(위고비·삭센다·대사)이 곧 기회.
+</a:t>
             </a:r>
             <a:pPr indent="0" marL="0">
               <a:lnSpc>
-                <a:spcPct val="120000"/>
+                <a:spcPct val="112000"/>
               </a:lnSpc>
               <a:buNone/>
             </a:pPr>
             <a:r>
-              <a:rPr lang="en-US" sz="1300" dirty="0">
+              <a:rPr lang="en-US" sz="1200" dirty="0">
                 <a:solidFill>
                   <a:srgbClr val="5B6B6A"/>
                 </a:solidFill>
@@ -7651,33 +8022,15 @@
                 <a:ea typeface="Malgun Gothic" pitchFamily="34" charset="-122"/>
                 <a:cs typeface="Malgun Gothic" pitchFamily="34" charset="-120"/>
               </a:rPr>
-              <a:t>'달서구 다이어트' 상위 노출 5곳 중 4곳이 한의원/한방병원.
-</a:t>
-            </a:r>
-            <a:pPr indent="0" marL="0">
-              <a:lnSpc>
-                <a:spcPct val="120000"/>
-              </a:lnSpc>
-              <a:buNone/>
-            </a:pPr>
-            <a:r>
-              <a:rPr lang="en-US" sz="1300" b="1" dirty="0">
-                <a:solidFill>
-                  <a:srgbClr val="FF6B5B"/>
-                </a:solidFill>
-                <a:latin typeface="Malgun Gothic" pitchFamily="34" charset="0"/>
-                <a:ea typeface="Malgun Gothic" pitchFamily="34" charset="-122"/>
-                <a:cs typeface="Malgun Gothic" pitchFamily="34" charset="-120"/>
-              </a:rPr>
-              <a:t>→ 양방 의학 비만치료(주사·처방·대사) 브랜드의 진입·검색 선점 여지가 큼.</a:t>
-            </a:r>
-            <a:endParaRPr lang="en-US" sz="1300" dirty="0"/>
-          </a:p>
-        </p:txBody>
-      </p:sp>
-      <p:sp>
-        <p:nvSpPr>
-          <p:cNvPr id="20" name="Text 18"/>
+              <a:t>밀집 1위 상인동(129) &gt; 감삼 83 &gt; 월성 81 &gt; 이곡 79 — 월배·달구벌대로 이중 축.</a:t>
+            </a:r>
+            <a:endParaRPr lang="en-US" sz="1200" dirty="0"/>
+          </a:p>
+        </p:txBody>
+      </p:sp>
+      <p:sp>
+        <p:nvSpPr>
+          <p:cNvPr id="22" name="Text 19"/>
           <p:cNvSpPr/>
           <p:nvPr/>
         </p:nvSpPr>
@@ -7716,7 +8069,7 @@
       </p:sp>
       <p:sp>
         <p:nvSpPr>
-          <p:cNvPr id="21" name="Text 19"/>
+          <p:cNvPr id="23" name="Text 20"/>
           <p:cNvSpPr/>
           <p:nvPr/>
         </p:nvSpPr>
@@ -9903,7 +10256,7 @@
                 <a:ea typeface="Malgun Gothic" pitchFamily="34" charset="-122"/>
                 <a:cs typeface="Malgun Gothic" pitchFamily="34" charset="-120"/>
               </a:rPr>
-              <a:t>달구벌대로변 죽전~감삼이 미용·의원 밀집축, 월배권(상인·진천·월성)은 생활밀착 한의원 중심. 전문 비만 브랜드가 얇아 검색·브랜딩 선점 이익이 큼.</a:t>
+              <a:t>기관 수 밀집 1위는 월배권 상인동(129), 이어 감삼(83)·월성(81)·이곡(79). 월배·달구벌대로 이중 축. 양방 다이어트 브랜딩이 얇아 검색·브랜딩 선점 이익이 큼.</a:t>
             </a:r>
             <a:endParaRPr lang="en-US" sz="1250" dirty="0"/>
           </a:p>
